--- a/python-course-ppt/逐节课件/Python讲授课件-单元13.pptx
+++ b/python-course-ppt/逐节课件/Python讲授课件-单元13.pptx
@@ -335,6 +335,86 @@
           </a:p>
         </p:txBody>
       </p:sp>
+      <p:sp>
+        <p:nvSpPr>
+          <p:cNvPr id="2" name="讲课提示"/>
+          <p:cNvSpPr txBox="1"/>
+          <p:nvPr/>
+        </p:nvSpPr>
+        <p:spPr>
+          <a:xfrm>
+            <a:off x="457200" y="457200"/>
+            <a:ext cx="6858000" cy="4800600"/>
+          </a:xfrm>
+          <a:prstGeom prst="rect">
+            <a:avLst/>
+          </a:prstGeom>
+        </p:spPr>
+        <p:txBody>
+          <a:bodyPr wrap="square"/>
+          <a:lstStyle/>
+          <a:p>
+            <a:r>
+              <a:rPr lang="zh-CN" dirty="0"/>
+              <a:t>单元 13 · 单元 13 · 射击与外星舰队</a:t>
+            </a:r>
+          </a:p>
+          <a:p>
+            <a:r>
+              <a:rPr lang="zh-CN" dirty="0"/>
+              <a:t/>
+            </a:r>
+          </a:p>
+          <a:p>
+            <a:r>
+              <a:rPr lang="zh-CN" dirty="0"/>
+              <a:t>本单元包含以下课节：</a:t>
+            </a:r>
+          </a:p>
+          <a:p>
+            <a:r>
+              <a:rPr lang="zh-CN" dirty="0"/>
+              <a:t>· 第 70 节 编组 Group 与精灵 Sprite</a:t>
+            </a:r>
+          </a:p>
+          <a:p>
+            <a:r>
+              <a:rPr lang="zh-CN" dirty="0"/>
+              <a:t>· 第 71 节 射击：Bullet 类与开火</a:t>
+            </a:r>
+          </a:p>
+          <a:p>
+            <a:r>
+              <a:rPr lang="zh-CN" dirty="0"/>
+              <a:t>· 第 72 节 外星舰队与整体移动</a:t>
+            </a:r>
+          </a:p>
+          <a:p>
+            <a:r>
+              <a:rPr lang="zh-CN" dirty="0"/>
+              <a:t>· 第 73 节 碰撞检测与游戏结束</a:t>
+            </a:r>
+          </a:p>
+          <a:p>
+            <a:r>
+              <a:rPr lang="zh-CN" dirty="0"/>
+              <a:t>· 第 74 节 实战、答案与验收复盘</a:t>
+            </a:r>
+          </a:p>
+          <a:p>
+            <a:r>
+              <a:rPr lang="zh-CN" dirty="0"/>
+              <a:t/>
+            </a:r>
+          </a:p>
+          <a:p>
+            <a:r>
+              <a:rPr lang="zh-CN" dirty="0"/>
+              <a:t>开场用 3 分钟讲清：这个单元学完能做出什么，最后会被关卡怎么验。</a:t>
+            </a:r>
+          </a:p>
+        </p:txBody>
+      </p:sp>
     </p:spTree>
   </p:cSld>
   <p:clrMapOvr>
@@ -458,6 +538,104 @@
           </a:p>
         </p:txBody>
       </p:sp>
+      <p:sp>
+        <p:nvSpPr>
+          <p:cNvPr id="2" name="讲课提示"/>
+          <p:cNvSpPr txBox="1"/>
+          <p:nvPr/>
+        </p:nvSpPr>
+        <p:spPr>
+          <a:xfrm>
+            <a:off x="457200" y="457200"/>
+            <a:ext cx="6858000" cy="4800600"/>
+          </a:xfrm>
+          <a:prstGeom prst="rect">
+            <a:avLst/>
+          </a:prstGeom>
+        </p:spPr>
+        <p:txBody>
+          <a:bodyPr wrap="square"/>
+          <a:lstStyle/>
+          <a:p>
+            <a:r>
+              <a:rPr lang="zh-CN" dirty="0"/>
+              <a:t>第 74 节 · 实战、答案与验收复盘</a:t>
+            </a:r>
+          </a:p>
+          <a:p>
+            <a:r>
+              <a:rPr lang="zh-CN" dirty="0"/>
+              <a:t>单元 13 · 射击与外星舰队 · W16</a:t>
+            </a:r>
+          </a:p>
+          <a:p>
+            <a:r>
+              <a:rPr lang="zh-CN" dirty="0"/>
+              <a:t/>
+            </a:r>
+          </a:p>
+          <a:p>
+            <a:r>
+              <a:rPr lang="zh-CN" dirty="0"/>
+              <a:t>学习目标：独立完成单元 13 练习，能讲清每处遍历删除的写法</a:t>
+            </a:r>
+          </a:p>
+          <a:p>
+            <a:r>
+              <a:rPr lang="zh-CN" dirty="0"/>
+              <a:t/>
+            </a:r>
+          </a:p>
+          <a:p>
+            <a:r>
+              <a:rPr lang="zh-CN" dirty="0"/>
+              <a:t>课堂实操（40 分钟，不看答案）：</a:t>
+            </a:r>
+          </a:p>
+          <a:p>
+            <a:r>
+              <a:rPr lang="zh-CN" dirty="0"/>
+              <a:t>· 限时 30 分钟独立完成基础档</a:t>
+            </a:r>
+          </a:p>
+          <a:p>
+            <a:r>
+              <a:rPr lang="zh-CN" dirty="0"/>
+              <a:t>· 逐题对照答案，错的当场重跑</a:t>
+            </a:r>
+          </a:p>
+          <a:p>
+            <a:r>
+              <a:rPr lang="zh-CN" dirty="0"/>
+              <a:t/>
+            </a:r>
+          </a:p>
+          <a:p>
+            <a:r>
+              <a:rPr lang="zh-CN" dirty="0"/>
+              <a:t>课后作业：</a:t>
+            </a:r>
+          </a:p>
+          <a:p>
+            <a:r>
+              <a:rPr lang="zh-CN" dirty="0"/>
+              <a:t>· ★ 产出：完整可玩的外星人入侵（能射、能得分、能结束）</a:t>
+            </a:r>
+          </a:p>
+          <a:p>
+            <a:r>
+              <a:rPr lang="zh-CN" dirty="0"/>
+              <a:t/>
+            </a:r>
+          </a:p>
+          <a:p>
+            <a:r>
+              <a:rPr lang="zh-CN" dirty="0"/>
+              <a:t>节奏：讲 20 分钟 → 学员自己敲 40 分钟（不看答案）→ 对讲评自查 20 分钟 → 写作业 10 分钟。</a:t>
+            </a:r>
+          </a:p>
+        </p:txBody>
+      </p:sp>
     </p:spTree>
   </p:cSld>
   <p:clrMapOvr>
@@ -551,6 +729,74 @@
           </a:p>
         </p:txBody>
       </p:sp>
+      <p:sp>
+        <p:nvSpPr>
+          <p:cNvPr id="2" name="讲课提示"/>
+          <p:cNvSpPr txBox="1"/>
+          <p:nvPr/>
+        </p:nvSpPr>
+        <p:spPr>
+          <a:xfrm>
+            <a:off x="457200" y="457200"/>
+            <a:ext cx="6858000" cy="4800600"/>
+          </a:xfrm>
+          <a:prstGeom prst="rect">
+            <a:avLst/>
+          </a:prstGeom>
+        </p:spPr>
+        <p:txBody>
+          <a:bodyPr wrap="square"/>
+          <a:lstStyle/>
+          <a:p>
+            <a:r>
+              <a:rPr lang="zh-CN" dirty="0"/>
+              <a:t>第 74 节 · 核心知识点：实战、答案与验收复盘</a:t>
+            </a:r>
+          </a:p>
+          <a:p>
+            <a:r>
+              <a:rPr lang="zh-CN" dirty="0"/>
+              <a:t/>
+            </a:r>
+          </a:p>
+          <a:p>
+            <a:r>
+              <a:rPr lang="zh-CN" dirty="0"/>
+              <a:t>讲这一页时：先让学生说出上节课的结论，再逐块讲要点。</a:t>
+            </a:r>
+          </a:p>
+          <a:p>
+            <a:r>
+              <a:rPr lang="zh-CN" dirty="0"/>
+              <a:t>每讲完一块，问一句「这一步如果写错了，报错会长什么样？」——把错误提前讲。</a:t>
+            </a:r>
+          </a:p>
+          <a:p>
+            <a:r>
+              <a:rPr lang="zh-CN" dirty="0"/>
+              <a:t/>
+            </a:r>
+          </a:p>
+          <a:p>
+            <a:r>
+              <a:rPr lang="zh-CN" dirty="0"/>
+              <a:t>本节目标：独立完成单元 13 练习，能讲清每处遍历删除的写法</a:t>
+            </a:r>
+          </a:p>
+          <a:p>
+            <a:r>
+              <a:rPr lang="zh-CN" dirty="0"/>
+              <a:t/>
+            </a:r>
+          </a:p>
+          <a:p>
+            <a:r>
+              <a:rPr lang="zh-CN" dirty="0"/>
+              <a:t>看不到懂的地方，回讲义对应小节读一遍，再回来对着这页复述一次——能讲出来才算真懂。</a:t>
+            </a:r>
+          </a:p>
+        </p:txBody>
+      </p:sp>
     </p:spTree>
   </p:cSld>
   <p:clrMapOvr>
@@ -620,6 +866,50 @@
           </a:p>
         </p:txBody>
       </p:sp>
+      <p:sp>
+        <p:nvSpPr>
+          <p:cNvPr id="2" name="讲课提示"/>
+          <p:cNvSpPr txBox="1"/>
+          <p:nvPr/>
+        </p:nvSpPr>
+        <p:spPr>
+          <a:xfrm>
+            <a:off x="457200" y="457200"/>
+            <a:ext cx="6858000" cy="4800600"/>
+          </a:xfrm>
+          <a:prstGeom prst="rect">
+            <a:avLst/>
+          </a:prstGeom>
+        </p:spPr>
+        <p:txBody>
+          <a:bodyPr wrap="square"/>
+          <a:lstStyle/>
+          <a:p>
+            <a:r>
+              <a:rPr lang="zh-CN" dirty="0"/>
+              <a:t>单元 13 小结 · 单元 13 · 小结</a:t>
+            </a:r>
+          </a:p>
+          <a:p>
+            <a:r>
+              <a:rPr lang="zh-CN" dirty="0"/>
+              <a:t/>
+            </a:r>
+          </a:p>
+          <a:p>
+            <a:r>
+              <a:rPr lang="zh-CN" dirty="0"/>
+              <a:t>收尾动作：让学生合上讲义，口述本单元三个最重要的结论；说不出来的，回对应课节。</a:t>
+            </a:r>
+          </a:p>
+          <a:p>
+            <a:r>
+              <a:rPr lang="zh-CN" dirty="0"/>
+              <a:t>然后当场勾一遍本单元课节的「已完成」，没打勾的进下一单元前补掉。</a:t>
+            </a:r>
+          </a:p>
+        </p:txBody>
+      </p:sp>
     </p:spTree>
   </p:cSld>
   <p:clrMapOvr>
@@ -743,6 +1033,104 @@
           </a:p>
         </p:txBody>
       </p:sp>
+      <p:sp>
+        <p:nvSpPr>
+          <p:cNvPr id="2" name="讲课提示"/>
+          <p:cNvSpPr txBox="1"/>
+          <p:nvPr/>
+        </p:nvSpPr>
+        <p:spPr>
+          <a:xfrm>
+            <a:off x="457200" y="457200"/>
+            <a:ext cx="6858000" cy="4800600"/>
+          </a:xfrm>
+          <a:prstGeom prst="rect">
+            <a:avLst/>
+          </a:prstGeom>
+        </p:spPr>
+        <p:txBody>
+          <a:bodyPr wrap="square"/>
+          <a:lstStyle/>
+          <a:p>
+            <a:r>
+              <a:rPr lang="zh-CN" dirty="0"/>
+              <a:t>第 70 节 · 编组 Group 与精灵 Sprite</a:t>
+            </a:r>
+          </a:p>
+          <a:p>
+            <a:r>
+              <a:rPr lang="zh-CN" dirty="0"/>
+              <a:t>单元 13 · 射击与外星舰队 · W15</a:t>
+            </a:r>
+          </a:p>
+          <a:p>
+            <a:r>
+              <a:rPr lang="zh-CN" dirty="0"/>
+              <a:t/>
+            </a:r>
+          </a:p>
+          <a:p>
+            <a:r>
+              <a:rPr lang="zh-CN" dirty="0"/>
+              <a:t>学习目标：说清 Group 和普通 list 的三点差别；理解为什么 Pygame 用编组而不是列表</a:t>
+            </a:r>
+          </a:p>
+          <a:p>
+            <a:r>
+              <a:rPr lang="zh-CN" dirty="0"/>
+              <a:t/>
+            </a:r>
+          </a:p>
+          <a:p>
+            <a:r>
+              <a:rPr lang="zh-CN" dirty="0"/>
+              <a:t>课堂实操（40 分钟，不看答案）：</a:t>
+            </a:r>
+          </a:p>
+          <a:p>
+            <a:r>
+              <a:rPr lang="zh-CN" dirty="0"/>
+              <a:t>· 用纯 Python 演示 Group 的 add/update/remove 行为</a:t>
+            </a:r>
+          </a:p>
+          <a:p>
+            <a:r>
+              <a:rPr lang="zh-CN" dirty="0"/>
+              <a:t>· 对比 list 与 Group 的删除差异</a:t>
+            </a:r>
+          </a:p>
+          <a:p>
+            <a:r>
+              <a:rPr lang="zh-CN" dirty="0"/>
+              <a:t/>
+            </a:r>
+          </a:p>
+          <a:p>
+            <a:r>
+              <a:rPr lang="zh-CN" dirty="0"/>
+              <a:t>课后作业：</a:t>
+            </a:r>
+          </a:p>
+          <a:p>
+            <a:r>
+              <a:rPr lang="zh-CN" dirty="0"/>
+              <a:t>· 完成练习 13-1【编组基本功】</a:t>
+            </a:r>
+          </a:p>
+          <a:p>
+            <a:r>
+              <a:rPr lang="zh-CN" dirty="0"/>
+              <a:t/>
+            </a:r>
+          </a:p>
+          <a:p>
+            <a:r>
+              <a:rPr lang="zh-CN" dirty="0"/>
+              <a:t>节奏：讲 20 分钟 → 学员自己敲 40 分钟（不看答案）→ 对讲评自查 20 分钟 → 写作业 10 分钟。</a:t>
+            </a:r>
+          </a:p>
+        </p:txBody>
+      </p:sp>
     </p:spTree>
   </p:cSld>
   <p:clrMapOvr>
@@ -836,6 +1224,74 @@
           </a:p>
         </p:txBody>
       </p:sp>
+      <p:sp>
+        <p:nvSpPr>
+          <p:cNvPr id="2" name="讲课提示"/>
+          <p:cNvSpPr txBox="1"/>
+          <p:nvPr/>
+        </p:nvSpPr>
+        <p:spPr>
+          <a:xfrm>
+            <a:off x="457200" y="457200"/>
+            <a:ext cx="6858000" cy="4800600"/>
+          </a:xfrm>
+          <a:prstGeom prst="rect">
+            <a:avLst/>
+          </a:prstGeom>
+        </p:spPr>
+        <p:txBody>
+          <a:bodyPr wrap="square"/>
+          <a:lstStyle/>
+          <a:p>
+            <a:r>
+              <a:rPr lang="zh-CN" dirty="0"/>
+              <a:t>第 70 节 · 核心知识点：编组 Group 与精灵 Sprite</a:t>
+            </a:r>
+          </a:p>
+          <a:p>
+            <a:r>
+              <a:rPr lang="zh-CN" dirty="0"/>
+              <a:t/>
+            </a:r>
+          </a:p>
+          <a:p>
+            <a:r>
+              <a:rPr lang="zh-CN" dirty="0"/>
+              <a:t>讲这一页时：先让学生说出上节课的结论，再逐块讲要点。</a:t>
+            </a:r>
+          </a:p>
+          <a:p>
+            <a:r>
+              <a:rPr lang="zh-CN" dirty="0"/>
+              <a:t>每讲完一块，问一句「这一步如果写错了，报错会长什么样？」——把错误提前讲。</a:t>
+            </a:r>
+          </a:p>
+          <a:p>
+            <a:r>
+              <a:rPr lang="zh-CN" dirty="0"/>
+              <a:t/>
+            </a:r>
+          </a:p>
+          <a:p>
+            <a:r>
+              <a:rPr lang="zh-CN" dirty="0"/>
+              <a:t>本节目标：说清 Group 和普通 list 的三点差别；理解为什么 Pygame 用编组而不是列表</a:t>
+            </a:r>
+          </a:p>
+          <a:p>
+            <a:r>
+              <a:rPr lang="zh-CN" dirty="0"/>
+              <a:t/>
+            </a:r>
+          </a:p>
+          <a:p>
+            <a:r>
+              <a:rPr lang="zh-CN" dirty="0"/>
+              <a:t>看不到懂的地方，回讲义对应小节读一遍，再回来对着这页复述一次——能讲出来才算真懂。</a:t>
+            </a:r>
+          </a:p>
+        </p:txBody>
+      </p:sp>
     </p:spTree>
   </p:cSld>
   <p:clrMapOvr>
@@ -965,6 +1421,110 @@
           </a:p>
         </p:txBody>
       </p:sp>
+      <p:sp>
+        <p:nvSpPr>
+          <p:cNvPr id="2" name="讲课提示"/>
+          <p:cNvSpPr txBox="1"/>
+          <p:nvPr/>
+        </p:nvSpPr>
+        <p:spPr>
+          <a:xfrm>
+            <a:off x="457200" y="457200"/>
+            <a:ext cx="6858000" cy="4800600"/>
+          </a:xfrm>
+          <a:prstGeom prst="rect">
+            <a:avLst/>
+          </a:prstGeom>
+        </p:spPr>
+        <p:txBody>
+          <a:bodyPr wrap="square"/>
+          <a:lstStyle/>
+          <a:p>
+            <a:r>
+              <a:rPr lang="zh-CN" dirty="0"/>
+              <a:t>第 71 节 · 射击：Bullet 类与开火</a:t>
+            </a:r>
+          </a:p>
+          <a:p>
+            <a:r>
+              <a:rPr lang="zh-CN" dirty="0"/>
+              <a:t>单元 13 · 射击与外星舰队 · W15–W16</a:t>
+            </a:r>
+          </a:p>
+          <a:p>
+            <a:r>
+              <a:rPr lang="zh-CN" dirty="0"/>
+              <a:t/>
+            </a:r>
+          </a:p>
+          <a:p>
+            <a:r>
+              <a:rPr lang="zh-CN" dirty="0"/>
+              <a:t>学习目标：能创建 Bullet 类、把子弹存进编组、限制子弹数量</a:t>
+            </a:r>
+          </a:p>
+          <a:p>
+            <a:r>
+              <a:rPr lang="zh-CN" dirty="0"/>
+              <a:t/>
+            </a:r>
+          </a:p>
+          <a:p>
+            <a:r>
+              <a:rPr lang="zh-CN" dirty="0"/>
+              <a:t>课堂实操（40 分钟，不看答案）：</a:t>
+            </a:r>
+          </a:p>
+          <a:p>
+            <a:r>
+              <a:rPr lang="zh-CN" dirty="0"/>
+              <a:t>· 实现 Bullet 类并让它能向上飞</a:t>
+            </a:r>
+          </a:p>
+          <a:p>
+            <a:r>
+              <a:rPr lang="zh-CN" dirty="0"/>
+              <a:t>· 故意不开火，看子弹越积越多</a:t>
+            </a:r>
+          </a:p>
+          <a:p>
+            <a:r>
+              <a:rPr lang="zh-CN" dirty="0"/>
+              <a:t>· 把 limit 加严，观察效果</a:t>
+            </a:r>
+          </a:p>
+          <a:p>
+            <a:r>
+              <a:rPr lang="zh-CN" dirty="0"/>
+              <a:t/>
+            </a:r>
+          </a:p>
+          <a:p>
+            <a:r>
+              <a:rPr lang="zh-CN" dirty="0"/>
+              <a:t>课后作业：</a:t>
+            </a:r>
+          </a:p>
+          <a:p>
+            <a:r>
+              <a:rPr lang="zh-CN" dirty="0"/>
+              <a:t>· 完成练习 13-2【复现并修复「漏删」bug】</a:t>
+            </a:r>
+          </a:p>
+          <a:p>
+            <a:r>
+              <a:rPr lang="zh-CN" dirty="0"/>
+              <a:t/>
+            </a:r>
+          </a:p>
+          <a:p>
+            <a:r>
+              <a:rPr lang="zh-CN" dirty="0"/>
+              <a:t>节奏：讲 20 分钟 → 学员自己敲 40 分钟（不看答案）→ 对讲评自查 20 分钟 → 写作业 10 分钟。</a:t>
+            </a:r>
+          </a:p>
+        </p:txBody>
+      </p:sp>
     </p:spTree>
   </p:cSld>
   <p:clrMapOvr>
@@ -1058,6 +1618,74 @@
           </a:p>
         </p:txBody>
       </p:sp>
+      <p:sp>
+        <p:nvSpPr>
+          <p:cNvPr id="2" name="讲课提示"/>
+          <p:cNvSpPr txBox="1"/>
+          <p:nvPr/>
+        </p:nvSpPr>
+        <p:spPr>
+          <a:xfrm>
+            <a:off x="457200" y="457200"/>
+            <a:ext cx="6858000" cy="4800600"/>
+          </a:xfrm>
+          <a:prstGeom prst="rect">
+            <a:avLst/>
+          </a:prstGeom>
+        </p:spPr>
+        <p:txBody>
+          <a:bodyPr wrap="square"/>
+          <a:lstStyle/>
+          <a:p>
+            <a:r>
+              <a:rPr lang="zh-CN" dirty="0"/>
+              <a:t>第 71 节 · 核心知识点：射击：Bullet 类与开火</a:t>
+            </a:r>
+          </a:p>
+          <a:p>
+            <a:r>
+              <a:rPr lang="zh-CN" dirty="0"/>
+              <a:t/>
+            </a:r>
+          </a:p>
+          <a:p>
+            <a:r>
+              <a:rPr lang="zh-CN" dirty="0"/>
+              <a:t>讲这一页时：先让学生说出上节课的结论，再逐块讲要点。</a:t>
+            </a:r>
+          </a:p>
+          <a:p>
+            <a:r>
+              <a:rPr lang="zh-CN" dirty="0"/>
+              <a:t>每讲完一块，问一句「这一步如果写错了，报错会长什么样？」——把错误提前讲。</a:t>
+            </a:r>
+          </a:p>
+          <a:p>
+            <a:r>
+              <a:rPr lang="zh-CN" dirty="0"/>
+              <a:t/>
+            </a:r>
+          </a:p>
+          <a:p>
+            <a:r>
+              <a:rPr lang="zh-CN" dirty="0"/>
+              <a:t>本节目标：能创建 Bullet 类、把子弹存进编组、限制子弹数量</a:t>
+            </a:r>
+          </a:p>
+          <a:p>
+            <a:r>
+              <a:rPr lang="zh-CN" dirty="0"/>
+              <a:t/>
+            </a:r>
+          </a:p>
+          <a:p>
+            <a:r>
+              <a:rPr lang="zh-CN" dirty="0"/>
+              <a:t>看不到懂的地方，回讲义对应小节读一遍，再回来对着这页复述一次——能讲出来才算真懂。</a:t>
+            </a:r>
+          </a:p>
+        </p:txBody>
+      </p:sp>
     </p:spTree>
   </p:cSld>
   <p:clrMapOvr>
@@ -1187,6 +1815,110 @@
           </a:p>
         </p:txBody>
       </p:sp>
+      <p:sp>
+        <p:nvSpPr>
+          <p:cNvPr id="2" name="讲课提示"/>
+          <p:cNvSpPr txBox="1"/>
+          <p:nvPr/>
+        </p:nvSpPr>
+        <p:spPr>
+          <a:xfrm>
+            <a:off x="457200" y="457200"/>
+            <a:ext cx="6858000" cy="4800600"/>
+          </a:xfrm>
+          <a:prstGeom prst="rect">
+            <a:avLst/>
+          </a:prstGeom>
+        </p:spPr>
+        <p:txBody>
+          <a:bodyPr wrap="square"/>
+          <a:lstStyle/>
+          <a:p>
+            <a:r>
+              <a:rPr lang="zh-CN" dirty="0"/>
+              <a:t>第 72 节 · 外星舰队与整体移动</a:t>
+            </a:r>
+          </a:p>
+          <a:p>
+            <a:r>
+              <a:rPr lang="zh-CN" dirty="0"/>
+              <a:t>单元 13 · 射击与外星舰队 · W16</a:t>
+            </a:r>
+          </a:p>
+          <a:p>
+            <a:r>
+              <a:rPr lang="zh-CN" dirty="0"/>
+              <a:t/>
+            </a:r>
+          </a:p>
+          <a:p>
+            <a:r>
+              <a:rPr lang="zh-CN" dirty="0"/>
+              <a:t>学习目标：能生成多行外星舰队；用 fleet_direction 让整队移动、触边下移并反向</a:t>
+            </a:r>
+          </a:p>
+          <a:p>
+            <a:r>
+              <a:rPr lang="zh-CN" dirty="0"/>
+              <a:t/>
+            </a:r>
+          </a:p>
+          <a:p>
+            <a:r>
+              <a:rPr lang="zh-CN" dirty="0"/>
+              <a:t>课堂实操（40 分钟，不看答案）：</a:t>
+            </a:r>
+          </a:p>
+          <a:p>
+            <a:r>
+              <a:rPr lang="zh-CN" dirty="0"/>
+              <a:t>· 现场写 `_create_fleet()` 并重构</a:t>
+            </a:r>
+          </a:p>
+          <a:p>
+            <a:r>
+              <a:rPr lang="zh-CN" dirty="0"/>
+              <a:t>· 把速度改成 2，观察为什么 `==` 检测不到边缘</a:t>
+            </a:r>
+          </a:p>
+          <a:p>
+            <a:r>
+              <a:rPr lang="zh-CN" dirty="0"/>
+              <a:t>· 把舰队方向手动改反，看它怎么走</a:t>
+            </a:r>
+          </a:p>
+          <a:p>
+            <a:r>
+              <a:rPr lang="zh-CN" dirty="0"/>
+              <a:t/>
+            </a:r>
+          </a:p>
+          <a:p>
+            <a:r>
+              <a:rPr lang="zh-CN" dirty="0"/>
+              <a:t>课后作业：</a:t>
+            </a:r>
+          </a:p>
+          <a:p>
+            <a:r>
+              <a:rPr lang="zh-CN" dirty="0"/>
+              <a:t>· 完成练习 13-3【边缘检测】</a:t>
+            </a:r>
+          </a:p>
+          <a:p>
+            <a:r>
+              <a:rPr lang="zh-CN" dirty="0"/>
+              <a:t/>
+            </a:r>
+          </a:p>
+          <a:p>
+            <a:r>
+              <a:rPr lang="zh-CN" dirty="0"/>
+              <a:t>节奏：讲 20 分钟 → 学员自己敲 40 分钟（不看答案）→ 对讲评自查 20 分钟 → 写作业 10 分钟。</a:t>
+            </a:r>
+          </a:p>
+        </p:txBody>
+      </p:sp>
     </p:spTree>
   </p:cSld>
   <p:clrMapOvr>
@@ -1280,6 +2012,74 @@
           </a:p>
         </p:txBody>
       </p:sp>
+      <p:sp>
+        <p:nvSpPr>
+          <p:cNvPr id="2" name="讲课提示"/>
+          <p:cNvSpPr txBox="1"/>
+          <p:nvPr/>
+        </p:nvSpPr>
+        <p:spPr>
+          <a:xfrm>
+            <a:off x="457200" y="457200"/>
+            <a:ext cx="6858000" cy="4800600"/>
+          </a:xfrm>
+          <a:prstGeom prst="rect">
+            <a:avLst/>
+          </a:prstGeom>
+        </p:spPr>
+        <p:txBody>
+          <a:bodyPr wrap="square"/>
+          <a:lstStyle/>
+          <a:p>
+            <a:r>
+              <a:rPr lang="zh-CN" dirty="0"/>
+              <a:t>第 72 节 · 核心知识点：外星舰队与整体移动</a:t>
+            </a:r>
+          </a:p>
+          <a:p>
+            <a:r>
+              <a:rPr lang="zh-CN" dirty="0"/>
+              <a:t/>
+            </a:r>
+          </a:p>
+          <a:p>
+            <a:r>
+              <a:rPr lang="zh-CN" dirty="0"/>
+              <a:t>讲这一页时：先让学生说出上节课的结论，再逐块讲要点。</a:t>
+            </a:r>
+          </a:p>
+          <a:p>
+            <a:r>
+              <a:rPr lang="zh-CN" dirty="0"/>
+              <a:t>每讲完一块，问一句「这一步如果写错了，报错会长什么样？」——把错误提前讲。</a:t>
+            </a:r>
+          </a:p>
+          <a:p>
+            <a:r>
+              <a:rPr lang="zh-CN" dirty="0"/>
+              <a:t/>
+            </a:r>
+          </a:p>
+          <a:p>
+            <a:r>
+              <a:rPr lang="zh-CN" dirty="0"/>
+              <a:t>本节目标：能生成多行外星舰队；用 fleet_direction 让整队移动、触边下移并反向</a:t>
+            </a:r>
+          </a:p>
+          <a:p>
+            <a:r>
+              <a:rPr lang="zh-CN" dirty="0"/>
+              <a:t/>
+            </a:r>
+          </a:p>
+          <a:p>
+            <a:r>
+              <a:rPr lang="zh-CN" dirty="0"/>
+              <a:t>看不到懂的地方，回讲义对应小节读一遍，再回来对着这页复述一次——能讲出来才算真懂。</a:t>
+            </a:r>
+          </a:p>
+        </p:txBody>
+      </p:sp>
     </p:spTree>
   </p:cSld>
   <p:clrMapOvr>
@@ -1409,6 +2209,110 @@
           </a:p>
         </p:txBody>
       </p:sp>
+      <p:sp>
+        <p:nvSpPr>
+          <p:cNvPr id="2" name="讲课提示"/>
+          <p:cNvSpPr txBox="1"/>
+          <p:nvPr/>
+        </p:nvSpPr>
+        <p:spPr>
+          <a:xfrm>
+            <a:off x="457200" y="457200"/>
+            <a:ext cx="6858000" cy="4800600"/>
+          </a:xfrm>
+          <a:prstGeom prst="rect">
+            <a:avLst/>
+          </a:prstGeom>
+        </p:spPr>
+        <p:txBody>
+          <a:bodyPr wrap="square"/>
+          <a:lstStyle/>
+          <a:p>
+            <a:r>
+              <a:rPr lang="zh-CN" dirty="0"/>
+              <a:t>第 73 节 · 碰撞检测与游戏结束</a:t>
+            </a:r>
+          </a:p>
+          <a:p>
+            <a:r>
+              <a:rPr lang="zh-CN" dirty="0"/>
+              <a:t>单元 13 · 射击与外星舰队 · W16</a:t>
+            </a:r>
+          </a:p>
+          <a:p>
+            <a:r>
+              <a:rPr lang="zh-CN" dirty="0"/>
+              <a:t/>
+            </a:r>
+          </a:p>
+          <a:p>
+            <a:r>
+              <a:rPr lang="zh-CN" dirty="0"/>
+              <a:t>学习目标：用 groupcollide 击落外星人；检测飞船被撞与外星人触底，正确结束游戏</a:t>
+            </a:r>
+          </a:p>
+          <a:p>
+            <a:r>
+              <a:rPr lang="zh-CN" dirty="0"/>
+              <a:t/>
+            </a:r>
+          </a:p>
+          <a:p>
+            <a:r>
+              <a:rPr lang="zh-CN" dirty="0"/>
+              <a:t>课堂实操（40 分钟，不看答案）：</a:t>
+            </a:r>
+          </a:p>
+          <a:p>
+            <a:r>
+              <a:rPr lang="zh-CN" dirty="0"/>
+              <a:t>· 实现击落与加分</a:t>
+            </a:r>
+          </a:p>
+          <a:p>
+            <a:r>
+              <a:rPr lang="zh-CN" dirty="0"/>
+              <a:t>· 把两个 True 改成 False，复现「外星人不消失」bug</a:t>
+            </a:r>
+          </a:p>
+          <a:p>
+            <a:r>
+              <a:rPr lang="zh-CN" dirty="0"/>
+              <a:t>· 故意撞自己一次，看游戏是否正确结束</a:t>
+            </a:r>
+          </a:p>
+          <a:p>
+            <a:r>
+              <a:rPr lang="zh-CN" dirty="0"/>
+              <a:t/>
+            </a:r>
+          </a:p>
+          <a:p>
+            <a:r>
+              <a:rPr lang="zh-CN" dirty="0"/>
+              <a:t>课后作业：</a:t>
+            </a:r>
+          </a:p>
+          <a:p>
+            <a:r>
+              <a:rPr lang="zh-CN" dirty="0"/>
+              <a:t>· ★ 完成练习 13-5【三条命的完整流程】</a:t>
+            </a:r>
+          </a:p>
+          <a:p>
+            <a:r>
+              <a:rPr lang="zh-CN" dirty="0"/>
+              <a:t/>
+            </a:r>
+          </a:p>
+          <a:p>
+            <a:r>
+              <a:rPr lang="zh-CN" dirty="0"/>
+              <a:t>节奏：讲 20 分钟 → 学员自己敲 40 分钟（不看答案）→ 对讲评自查 20 分钟 → 写作业 10 分钟。</a:t>
+            </a:r>
+          </a:p>
+        </p:txBody>
+      </p:sp>
     </p:spTree>
   </p:cSld>
   <p:clrMapOvr>
@@ -1434,6 +2338,74 @@
           <a:chExt cx="0" cy="0"/>
         </a:xfrm>
       </p:grpSpPr>
+      <p:sp>
+        <p:nvSpPr>
+          <p:cNvPr id="2" name="讲课提示"/>
+          <p:cNvSpPr txBox="1"/>
+          <p:nvPr/>
+        </p:nvSpPr>
+        <p:spPr>
+          <a:xfrm>
+            <a:off x="457200" y="457200"/>
+            <a:ext cx="6858000" cy="4800600"/>
+          </a:xfrm>
+          <a:prstGeom prst="rect">
+            <a:avLst/>
+          </a:prstGeom>
+        </p:spPr>
+        <p:txBody>
+          <a:bodyPr wrap="square"/>
+          <a:lstStyle/>
+          <a:p>
+            <a:r>
+              <a:rPr lang="zh-CN" dirty="0"/>
+              <a:t>第 73 节 · 核心知识点：碰撞检测与游戏结束</a:t>
+            </a:r>
+          </a:p>
+          <a:p>
+            <a:r>
+              <a:rPr lang="zh-CN" dirty="0"/>
+              <a:t/>
+            </a:r>
+          </a:p>
+          <a:p>
+            <a:r>
+              <a:rPr lang="zh-CN" dirty="0"/>
+              <a:t>讲这一页时：先让学生说出上节课的结论，再逐块讲要点。</a:t>
+            </a:r>
+          </a:p>
+          <a:p>
+            <a:r>
+              <a:rPr lang="zh-CN" dirty="0"/>
+              <a:t>每讲完一块，问一句「这一步如果写错了，报错会长什么样？」——把错误提前讲。</a:t>
+            </a:r>
+          </a:p>
+          <a:p>
+            <a:r>
+              <a:rPr lang="zh-CN" dirty="0"/>
+              <a:t/>
+            </a:r>
+          </a:p>
+          <a:p>
+            <a:r>
+              <a:rPr lang="zh-CN" dirty="0"/>
+              <a:t>本节目标：用 groupcollide 击落外星人；检测飞船被撞与外星人触底，正确结束游戏</a:t>
+            </a:r>
+          </a:p>
+          <a:p>
+            <a:r>
+              <a:rPr lang="zh-CN" dirty="0"/>
+              <a:t/>
+            </a:r>
+          </a:p>
+          <a:p>
+            <a:r>
+              <a:rPr lang="zh-CN" dirty="0"/>
+              <a:t>看不到懂的地方，回讲义对应小节读一遍，再回来对着这页复述一次——能讲出来才算真懂。</a:t>
+            </a:r>
+          </a:p>
+        </p:txBody>
+      </p:sp>
       <p:sp>
         <p:nvSpPr>
           <p:cNvPr id="2" name="讲课提示"/>

--- a/python-course-ppt/逐节课件/Python讲授课件-单元13.pptx
+++ b/python-course-ppt/逐节课件/Python讲授课件-单元13.pptx
@@ -238,2250 +238,6 @@
 </p:notesMaster>
 </file>
 
-<file path=ppt/notesSlides/notesSlide1.xml><?xml version="1.0" encoding="utf-8"?>
-<p:notes xmlns:a="http://schemas.openxmlformats.org/drawingml/2006/main" xmlns:p="http://schemas.openxmlformats.org/presentationml/2006/main" xmlns:r="http://schemas.openxmlformats.org/officeDocument/2006/relationships">
-  <p:cSld>
-    <p:spTree>
-      <p:nvGrpSpPr>
-        <p:cNvPr id="1" name=""/>
-        <p:cNvGrpSpPr/>
-        <p:nvPr/>
-      </p:nvGrpSpPr>
-      <p:grpSpPr>
-        <a:xfrm>
-          <a:off x="0" y="0"/>
-          <a:ext cx="0" cy="0"/>
-          <a:chOff x="0" y="0"/>
-          <a:chExt cx="0" cy="0"/>
-        </a:xfrm>
-      </p:grpSpPr>
-      <p:sp>
-        <p:nvSpPr>
-          <p:cNvPr id="2" name="讲课提示"/>
-          <p:cNvSpPr txBox="1"/>
-          <p:nvPr/>
-        </p:nvSpPr>
-        <p:spPr>
-          <a:xfrm>
-            <a:off x="457200" y="457200"/>
-            <a:ext cx="6858000" cy="4800600"/>
-          </a:xfrm>
-          <a:prstGeom prst="rect">
-            <a:avLst/>
-          </a:prstGeom>
-        </p:spPr>
-        <p:txBody>
-          <a:bodyPr wrap="square"/>
-          <a:lstStyle/>
-          <a:p>
-            <a:r>
-              <a:rPr lang="zh-CN" dirty="0"/>
-              <a:t>单元 13 · 单元 13 · 射击与外星舰队</a:t>
-            </a:r>
-          </a:p>
-          <a:p>
-            <a:r>
-              <a:rPr lang="zh-CN" dirty="0"/>
-              <a:t/>
-            </a:r>
-          </a:p>
-          <a:p>
-            <a:r>
-              <a:rPr lang="zh-CN" dirty="0"/>
-              <a:t>本单元包含以下课节：</a:t>
-            </a:r>
-          </a:p>
-          <a:p>
-            <a:r>
-              <a:rPr lang="zh-CN" dirty="0"/>
-              <a:t>· 第 70 节 编组 Group 与精灵 Sprite</a:t>
-            </a:r>
-          </a:p>
-          <a:p>
-            <a:r>
-              <a:rPr lang="zh-CN" dirty="0"/>
-              <a:t>· 第 71 节 射击：Bullet 类与开火</a:t>
-            </a:r>
-          </a:p>
-          <a:p>
-            <a:r>
-              <a:rPr lang="zh-CN" dirty="0"/>
-              <a:t>· 第 72 节 外星舰队与整体移动</a:t>
-            </a:r>
-          </a:p>
-          <a:p>
-            <a:r>
-              <a:rPr lang="zh-CN" dirty="0"/>
-              <a:t>· 第 73 节 碰撞检测与游戏结束</a:t>
-            </a:r>
-          </a:p>
-          <a:p>
-            <a:r>
-              <a:rPr lang="zh-CN" dirty="0"/>
-              <a:t>· 第 74 节 实战、答案与验收复盘</a:t>
-            </a:r>
-          </a:p>
-          <a:p>
-            <a:r>
-              <a:rPr lang="zh-CN" dirty="0"/>
-              <a:t/>
-            </a:r>
-          </a:p>
-          <a:p>
-            <a:r>
-              <a:rPr lang="zh-CN" dirty="0"/>
-              <a:t>开场用 3 分钟讲清：这个单元学完能做出什么，最后会被关卡怎么验。</a:t>
-            </a:r>
-          </a:p>
-        </p:txBody>
-      </p:sp>
-      <p:sp>
-        <p:nvSpPr>
-          <p:cNvPr id="2" name="讲课提示"/>
-          <p:cNvSpPr txBox="1"/>
-          <p:nvPr/>
-        </p:nvSpPr>
-        <p:spPr>
-          <a:xfrm>
-            <a:off x="457200" y="457200"/>
-            <a:ext cx="6858000" cy="4800600"/>
-          </a:xfrm>
-          <a:prstGeom prst="rect">
-            <a:avLst/>
-          </a:prstGeom>
-        </p:spPr>
-        <p:txBody>
-          <a:bodyPr wrap="square"/>
-          <a:lstStyle/>
-          <a:p>
-            <a:r>
-              <a:rPr lang="zh-CN" dirty="0"/>
-              <a:t>单元 13 · 单元 13 · 射击与外星舰队</a:t>
-            </a:r>
-          </a:p>
-          <a:p>
-            <a:r>
-              <a:rPr lang="zh-CN" dirty="0"/>
-              <a:t/>
-            </a:r>
-          </a:p>
-          <a:p>
-            <a:r>
-              <a:rPr lang="zh-CN" dirty="0"/>
-              <a:t>本单元包含以下课节：</a:t>
-            </a:r>
-          </a:p>
-          <a:p>
-            <a:r>
-              <a:rPr lang="zh-CN" dirty="0"/>
-              <a:t>· 第 70 节 编组 Group 与精灵 Sprite</a:t>
-            </a:r>
-          </a:p>
-          <a:p>
-            <a:r>
-              <a:rPr lang="zh-CN" dirty="0"/>
-              <a:t>· 第 71 节 射击：Bullet 类与开火</a:t>
-            </a:r>
-          </a:p>
-          <a:p>
-            <a:r>
-              <a:rPr lang="zh-CN" dirty="0"/>
-              <a:t>· 第 72 节 外星舰队与整体移动</a:t>
-            </a:r>
-          </a:p>
-          <a:p>
-            <a:r>
-              <a:rPr lang="zh-CN" dirty="0"/>
-              <a:t>· 第 73 节 碰撞检测与游戏结束</a:t>
-            </a:r>
-          </a:p>
-          <a:p>
-            <a:r>
-              <a:rPr lang="zh-CN" dirty="0"/>
-              <a:t>· 第 74 节 实战、答案与验收复盘</a:t>
-            </a:r>
-          </a:p>
-          <a:p>
-            <a:r>
-              <a:rPr lang="zh-CN" dirty="0"/>
-              <a:t/>
-            </a:r>
-          </a:p>
-          <a:p>
-            <a:r>
-              <a:rPr lang="zh-CN" dirty="0"/>
-              <a:t>开场用 3 分钟讲清：这个单元学完能做出什么，最后会被关卡怎么验。</a:t>
-            </a:r>
-          </a:p>
-        </p:txBody>
-      </p:sp>
-    </p:spTree>
-  </p:cSld>
-  <p:clrMapOvr>
-    <a:masterClrMapping/>
-  </p:clrMapOvr>
-</p:notes>
-</file>
-
-<file path=ppt/notesSlides/notesSlide10.xml><?xml version="1.0" encoding="utf-8"?>
-<p:notes xmlns:a="http://schemas.openxmlformats.org/drawingml/2006/main" xmlns:p="http://schemas.openxmlformats.org/presentationml/2006/main" xmlns:r="http://schemas.openxmlformats.org/officeDocument/2006/relationships">
-  <p:cSld>
-    <p:spTree>
-      <p:nvGrpSpPr>
-        <p:cNvPr id="1" name=""/>
-        <p:cNvGrpSpPr/>
-        <p:nvPr/>
-      </p:nvGrpSpPr>
-      <p:grpSpPr>
-        <a:xfrm>
-          <a:off x="0" y="0"/>
-          <a:ext cx="0" cy="0"/>
-          <a:chOff x="0" y="0"/>
-          <a:chExt cx="0" cy="0"/>
-        </a:xfrm>
-      </p:grpSpPr>
-      <p:sp>
-        <p:nvSpPr>
-          <p:cNvPr id="2" name="讲课提示"/>
-          <p:cNvSpPr txBox="1"/>
-          <p:nvPr/>
-        </p:nvSpPr>
-        <p:spPr>
-          <a:xfrm>
-            <a:off x="457200" y="457200"/>
-            <a:ext cx="6858000" cy="4800600"/>
-          </a:xfrm>
-          <a:prstGeom prst="rect">
-            <a:avLst/>
-          </a:prstGeom>
-        </p:spPr>
-        <p:txBody>
-          <a:bodyPr wrap="square"/>
-          <a:lstStyle/>
-          <a:p>
-            <a:r>
-              <a:rPr lang="zh-CN" dirty="0"/>
-              <a:t>第 74 节 · 实战、答案与验收复盘</a:t>
-            </a:r>
-          </a:p>
-          <a:p>
-            <a:r>
-              <a:rPr lang="zh-CN" dirty="0"/>
-              <a:t>单元 13 · 射击与外星舰队 · W16</a:t>
-            </a:r>
-          </a:p>
-          <a:p>
-            <a:r>
-              <a:rPr lang="zh-CN" dirty="0"/>
-              <a:t/>
-            </a:r>
-          </a:p>
-          <a:p>
-            <a:r>
-              <a:rPr lang="zh-CN" dirty="0"/>
-              <a:t>学习目标：独立完成单元 13 练习，能讲清每处遍历删除的写法</a:t>
-            </a:r>
-          </a:p>
-          <a:p>
-            <a:r>
-              <a:rPr lang="zh-CN" dirty="0"/>
-              <a:t/>
-            </a:r>
-          </a:p>
-          <a:p>
-            <a:r>
-              <a:rPr lang="zh-CN" dirty="0"/>
-              <a:t>课堂实操（40 分钟，不看答案）：</a:t>
-            </a:r>
-          </a:p>
-          <a:p>
-            <a:r>
-              <a:rPr lang="zh-CN" dirty="0"/>
-              <a:t>· 限时 30 分钟独立完成基础档</a:t>
-            </a:r>
-          </a:p>
-          <a:p>
-            <a:r>
-              <a:rPr lang="zh-CN" dirty="0"/>
-              <a:t>· 逐题对照答案，错的当场重跑</a:t>
-            </a:r>
-          </a:p>
-          <a:p>
-            <a:r>
-              <a:rPr lang="zh-CN" dirty="0"/>
-              <a:t/>
-            </a:r>
-          </a:p>
-          <a:p>
-            <a:r>
-              <a:rPr lang="zh-CN" dirty="0"/>
-              <a:t>课后作业：</a:t>
-            </a:r>
-          </a:p>
-          <a:p>
-            <a:r>
-              <a:rPr lang="zh-CN" dirty="0"/>
-              <a:t>· ★ 产出：完整可玩的外星人入侵（能射、能得分、能结束）</a:t>
-            </a:r>
-          </a:p>
-          <a:p>
-            <a:r>
-              <a:rPr lang="zh-CN" dirty="0"/>
-              <a:t/>
-            </a:r>
-          </a:p>
-          <a:p>
-            <a:r>
-              <a:rPr lang="zh-CN" dirty="0"/>
-              <a:t>节奏：讲 20 分钟 → 学员自己敲 40 分钟（不看答案）→ 对讲评自查 20 分钟 → 写作业 10 分钟。</a:t>
-            </a:r>
-          </a:p>
-        </p:txBody>
-      </p:sp>
-      <p:sp>
-        <p:nvSpPr>
-          <p:cNvPr id="2" name="讲课提示"/>
-          <p:cNvSpPr txBox="1"/>
-          <p:nvPr/>
-        </p:nvSpPr>
-        <p:spPr>
-          <a:xfrm>
-            <a:off x="457200" y="457200"/>
-            <a:ext cx="6858000" cy="4800600"/>
-          </a:xfrm>
-          <a:prstGeom prst="rect">
-            <a:avLst/>
-          </a:prstGeom>
-        </p:spPr>
-        <p:txBody>
-          <a:bodyPr wrap="square"/>
-          <a:lstStyle/>
-          <a:p>
-            <a:r>
-              <a:rPr lang="zh-CN" dirty="0"/>
-              <a:t>第 74 节 · 实战、答案与验收复盘</a:t>
-            </a:r>
-          </a:p>
-          <a:p>
-            <a:r>
-              <a:rPr lang="zh-CN" dirty="0"/>
-              <a:t>单元 13 · 射击与外星舰队 · W16</a:t>
-            </a:r>
-          </a:p>
-          <a:p>
-            <a:r>
-              <a:rPr lang="zh-CN" dirty="0"/>
-              <a:t/>
-            </a:r>
-          </a:p>
-          <a:p>
-            <a:r>
-              <a:rPr lang="zh-CN" dirty="0"/>
-              <a:t>学习目标：独立完成单元 13 练习，能讲清每处遍历删除的写法</a:t>
-            </a:r>
-          </a:p>
-          <a:p>
-            <a:r>
-              <a:rPr lang="zh-CN" dirty="0"/>
-              <a:t/>
-            </a:r>
-          </a:p>
-          <a:p>
-            <a:r>
-              <a:rPr lang="zh-CN" dirty="0"/>
-              <a:t>课堂实操（40 分钟，不看答案）：</a:t>
-            </a:r>
-          </a:p>
-          <a:p>
-            <a:r>
-              <a:rPr lang="zh-CN" dirty="0"/>
-              <a:t>· 限时 30 分钟独立完成基础档</a:t>
-            </a:r>
-          </a:p>
-          <a:p>
-            <a:r>
-              <a:rPr lang="zh-CN" dirty="0"/>
-              <a:t>· 逐题对照答案，错的当场重跑</a:t>
-            </a:r>
-          </a:p>
-          <a:p>
-            <a:r>
-              <a:rPr lang="zh-CN" dirty="0"/>
-              <a:t/>
-            </a:r>
-          </a:p>
-          <a:p>
-            <a:r>
-              <a:rPr lang="zh-CN" dirty="0"/>
-              <a:t>课后作业：</a:t>
-            </a:r>
-          </a:p>
-          <a:p>
-            <a:r>
-              <a:rPr lang="zh-CN" dirty="0"/>
-              <a:t>· ★ 产出：完整可玩的外星人入侵（能射、能得分、能结束）</a:t>
-            </a:r>
-          </a:p>
-          <a:p>
-            <a:r>
-              <a:rPr lang="zh-CN" dirty="0"/>
-              <a:t/>
-            </a:r>
-          </a:p>
-          <a:p>
-            <a:r>
-              <a:rPr lang="zh-CN" dirty="0"/>
-              <a:t>节奏：讲 20 分钟 → 学员自己敲 40 分钟（不看答案）→ 对讲评自查 20 分钟 → 写作业 10 分钟。</a:t>
-            </a:r>
-          </a:p>
-        </p:txBody>
-      </p:sp>
-    </p:spTree>
-  </p:cSld>
-  <p:clrMapOvr>
-    <a:masterClrMapping/>
-  </p:clrMapOvr>
-</p:notes>
-</file>
-
-<file path=ppt/notesSlides/notesSlide11.xml><?xml version="1.0" encoding="utf-8"?>
-<p:notes xmlns:a="http://schemas.openxmlformats.org/drawingml/2006/main" xmlns:p="http://schemas.openxmlformats.org/presentationml/2006/main" xmlns:r="http://schemas.openxmlformats.org/officeDocument/2006/relationships">
-  <p:cSld>
-    <p:spTree>
-      <p:nvGrpSpPr>
-        <p:cNvPr id="1" name=""/>
-        <p:cNvGrpSpPr/>
-        <p:nvPr/>
-      </p:nvGrpSpPr>
-      <p:grpSpPr>
-        <a:xfrm>
-          <a:off x="0" y="0"/>
-          <a:ext cx="0" cy="0"/>
-          <a:chOff x="0" y="0"/>
-          <a:chExt cx="0" cy="0"/>
-        </a:xfrm>
-      </p:grpSpPr>
-      <p:sp>
-        <p:nvSpPr>
-          <p:cNvPr id="2" name="讲课提示"/>
-          <p:cNvSpPr txBox="1"/>
-          <p:nvPr/>
-        </p:nvSpPr>
-        <p:spPr>
-          <a:xfrm>
-            <a:off x="457200" y="457200"/>
-            <a:ext cx="6858000" cy="4800600"/>
-          </a:xfrm>
-          <a:prstGeom prst="rect">
-            <a:avLst/>
-          </a:prstGeom>
-        </p:spPr>
-        <p:txBody>
-          <a:bodyPr wrap="square"/>
-          <a:lstStyle/>
-          <a:p>
-            <a:r>
-              <a:rPr lang="zh-CN" dirty="0"/>
-              <a:t>第 74 节 · 核心知识点：实战、答案与验收复盘</a:t>
-            </a:r>
-          </a:p>
-          <a:p>
-            <a:r>
-              <a:rPr lang="zh-CN" dirty="0"/>
-              <a:t/>
-            </a:r>
-          </a:p>
-          <a:p>
-            <a:r>
-              <a:rPr lang="zh-CN" dirty="0"/>
-              <a:t>讲这一页时：先让学生说出上节课的结论，再逐块讲要点。</a:t>
-            </a:r>
-          </a:p>
-          <a:p>
-            <a:r>
-              <a:rPr lang="zh-CN" dirty="0"/>
-              <a:t>每讲完一块，问一句「这一步如果写错了，报错会长什么样？」——把错误提前讲。</a:t>
-            </a:r>
-          </a:p>
-          <a:p>
-            <a:r>
-              <a:rPr lang="zh-CN" dirty="0"/>
-              <a:t/>
-            </a:r>
-          </a:p>
-          <a:p>
-            <a:r>
-              <a:rPr lang="zh-CN" dirty="0"/>
-              <a:t>本节目标：独立完成单元 13 练习，能讲清每处遍历删除的写法</a:t>
-            </a:r>
-          </a:p>
-          <a:p>
-            <a:r>
-              <a:rPr lang="zh-CN" dirty="0"/>
-              <a:t/>
-            </a:r>
-          </a:p>
-          <a:p>
-            <a:r>
-              <a:rPr lang="zh-CN" dirty="0"/>
-              <a:t>看不到懂的地方，回讲义对应小节读一遍，再回来对着这页复述一次——能讲出来才算真懂。</a:t>
-            </a:r>
-          </a:p>
-        </p:txBody>
-      </p:sp>
-      <p:sp>
-        <p:nvSpPr>
-          <p:cNvPr id="2" name="讲课提示"/>
-          <p:cNvSpPr txBox="1"/>
-          <p:nvPr/>
-        </p:nvSpPr>
-        <p:spPr>
-          <a:xfrm>
-            <a:off x="457200" y="457200"/>
-            <a:ext cx="6858000" cy="4800600"/>
-          </a:xfrm>
-          <a:prstGeom prst="rect">
-            <a:avLst/>
-          </a:prstGeom>
-        </p:spPr>
-        <p:txBody>
-          <a:bodyPr wrap="square"/>
-          <a:lstStyle/>
-          <a:p>
-            <a:r>
-              <a:rPr lang="zh-CN" dirty="0"/>
-              <a:t>第 74 节 · 核心知识点：实战、答案与验收复盘</a:t>
-            </a:r>
-          </a:p>
-          <a:p>
-            <a:r>
-              <a:rPr lang="zh-CN" dirty="0"/>
-              <a:t/>
-            </a:r>
-          </a:p>
-          <a:p>
-            <a:r>
-              <a:rPr lang="zh-CN" dirty="0"/>
-              <a:t>讲这一页时：先让学生说出上节课的结论，再逐块讲要点。</a:t>
-            </a:r>
-          </a:p>
-          <a:p>
-            <a:r>
-              <a:rPr lang="zh-CN" dirty="0"/>
-              <a:t>每讲完一块，问一句「这一步如果写错了，报错会长什么样？」——把错误提前讲。</a:t>
-            </a:r>
-          </a:p>
-          <a:p>
-            <a:r>
-              <a:rPr lang="zh-CN" dirty="0"/>
-              <a:t/>
-            </a:r>
-          </a:p>
-          <a:p>
-            <a:r>
-              <a:rPr lang="zh-CN" dirty="0"/>
-              <a:t>本节目标：独立完成单元 13 练习，能讲清每处遍历删除的写法</a:t>
-            </a:r>
-          </a:p>
-          <a:p>
-            <a:r>
-              <a:rPr lang="zh-CN" dirty="0"/>
-              <a:t/>
-            </a:r>
-          </a:p>
-          <a:p>
-            <a:r>
-              <a:rPr lang="zh-CN" dirty="0"/>
-              <a:t>看不到懂的地方，回讲义对应小节读一遍，再回来对着这页复述一次——能讲出来才算真懂。</a:t>
-            </a:r>
-          </a:p>
-        </p:txBody>
-      </p:sp>
-    </p:spTree>
-  </p:cSld>
-  <p:clrMapOvr>
-    <a:masterClrMapping/>
-  </p:clrMapOvr>
-</p:notes>
-</file>
-
-<file path=ppt/notesSlides/notesSlide12.xml><?xml version="1.0" encoding="utf-8"?>
-<p:notes xmlns:a="http://schemas.openxmlformats.org/drawingml/2006/main" xmlns:p="http://schemas.openxmlformats.org/presentationml/2006/main" xmlns:r="http://schemas.openxmlformats.org/officeDocument/2006/relationships">
-  <p:cSld>
-    <p:spTree>
-      <p:nvGrpSpPr>
-        <p:cNvPr id="1" name=""/>
-        <p:cNvGrpSpPr/>
-        <p:nvPr/>
-      </p:nvGrpSpPr>
-      <p:grpSpPr>
-        <a:xfrm>
-          <a:off x="0" y="0"/>
-          <a:ext cx="0" cy="0"/>
-          <a:chOff x="0" y="0"/>
-          <a:chExt cx="0" cy="0"/>
-        </a:xfrm>
-      </p:grpSpPr>
-      <p:sp>
-        <p:nvSpPr>
-          <p:cNvPr id="2" name="讲课提示"/>
-          <p:cNvSpPr txBox="1"/>
-          <p:nvPr/>
-        </p:nvSpPr>
-        <p:spPr>
-          <a:xfrm>
-            <a:off x="457200" y="457200"/>
-            <a:ext cx="6858000" cy="4800600"/>
-          </a:xfrm>
-          <a:prstGeom prst="rect">
-            <a:avLst/>
-          </a:prstGeom>
-        </p:spPr>
-        <p:txBody>
-          <a:bodyPr wrap="square"/>
-          <a:lstStyle/>
-          <a:p>
-            <a:r>
-              <a:rPr lang="zh-CN" dirty="0"/>
-              <a:t>单元 13 小结 · 单元 13 · 小结</a:t>
-            </a:r>
-          </a:p>
-          <a:p>
-            <a:r>
-              <a:rPr lang="zh-CN" dirty="0"/>
-              <a:t/>
-            </a:r>
-          </a:p>
-          <a:p>
-            <a:r>
-              <a:rPr lang="zh-CN" dirty="0"/>
-              <a:t>收尾动作：让学生合上讲义，口述本单元三个最重要的结论；说不出来的，回对应课节。</a:t>
-            </a:r>
-          </a:p>
-          <a:p>
-            <a:r>
-              <a:rPr lang="zh-CN" dirty="0"/>
-              <a:t>然后当场勾一遍本单元课节的「已完成」，没打勾的进下一单元前补掉。</a:t>
-            </a:r>
-          </a:p>
-        </p:txBody>
-      </p:sp>
-      <p:sp>
-        <p:nvSpPr>
-          <p:cNvPr id="2" name="讲课提示"/>
-          <p:cNvSpPr txBox="1"/>
-          <p:nvPr/>
-        </p:nvSpPr>
-        <p:spPr>
-          <a:xfrm>
-            <a:off x="457200" y="457200"/>
-            <a:ext cx="6858000" cy="4800600"/>
-          </a:xfrm>
-          <a:prstGeom prst="rect">
-            <a:avLst/>
-          </a:prstGeom>
-        </p:spPr>
-        <p:txBody>
-          <a:bodyPr wrap="square"/>
-          <a:lstStyle/>
-          <a:p>
-            <a:r>
-              <a:rPr lang="zh-CN" dirty="0"/>
-              <a:t>单元 13 小结 · 单元 13 · 小结</a:t>
-            </a:r>
-          </a:p>
-          <a:p>
-            <a:r>
-              <a:rPr lang="zh-CN" dirty="0"/>
-              <a:t/>
-            </a:r>
-          </a:p>
-          <a:p>
-            <a:r>
-              <a:rPr lang="zh-CN" dirty="0"/>
-              <a:t>收尾动作：让学生合上讲义，口述本单元三个最重要的结论；说不出来的，回对应课节。</a:t>
-            </a:r>
-          </a:p>
-          <a:p>
-            <a:r>
-              <a:rPr lang="zh-CN" dirty="0"/>
-              <a:t>然后当场勾一遍本单元课节的「已完成」，没打勾的进下一单元前补掉。</a:t>
-            </a:r>
-          </a:p>
-        </p:txBody>
-      </p:sp>
-    </p:spTree>
-  </p:cSld>
-  <p:clrMapOvr>
-    <a:masterClrMapping/>
-  </p:clrMapOvr>
-</p:notes>
-</file>
-
-<file path=ppt/notesSlides/notesSlide2.xml><?xml version="1.0" encoding="utf-8"?>
-<p:notes xmlns:a="http://schemas.openxmlformats.org/drawingml/2006/main" xmlns:p="http://schemas.openxmlformats.org/presentationml/2006/main" xmlns:r="http://schemas.openxmlformats.org/officeDocument/2006/relationships">
-  <p:cSld>
-    <p:spTree>
-      <p:nvGrpSpPr>
-        <p:cNvPr id="1" name=""/>
-        <p:cNvGrpSpPr/>
-        <p:nvPr/>
-      </p:nvGrpSpPr>
-      <p:grpSpPr>
-        <a:xfrm>
-          <a:off x="0" y="0"/>
-          <a:ext cx="0" cy="0"/>
-          <a:chOff x="0" y="0"/>
-          <a:chExt cx="0" cy="0"/>
-        </a:xfrm>
-      </p:grpSpPr>
-      <p:sp>
-        <p:nvSpPr>
-          <p:cNvPr id="2" name="讲课提示"/>
-          <p:cNvSpPr txBox="1"/>
-          <p:nvPr/>
-        </p:nvSpPr>
-        <p:spPr>
-          <a:xfrm>
-            <a:off x="457200" y="457200"/>
-            <a:ext cx="6858000" cy="4800600"/>
-          </a:xfrm>
-          <a:prstGeom prst="rect">
-            <a:avLst/>
-          </a:prstGeom>
-        </p:spPr>
-        <p:txBody>
-          <a:bodyPr wrap="square"/>
-          <a:lstStyle/>
-          <a:p>
-            <a:r>
-              <a:rPr lang="zh-CN" dirty="0"/>
-              <a:t>第 70 节 · 编组 Group 与精灵 Sprite</a:t>
-            </a:r>
-          </a:p>
-          <a:p>
-            <a:r>
-              <a:rPr lang="zh-CN" dirty="0"/>
-              <a:t>单元 13 · 射击与外星舰队 · W15</a:t>
-            </a:r>
-          </a:p>
-          <a:p>
-            <a:r>
-              <a:rPr lang="zh-CN" dirty="0"/>
-              <a:t/>
-            </a:r>
-          </a:p>
-          <a:p>
-            <a:r>
-              <a:rPr lang="zh-CN" dirty="0"/>
-              <a:t>学习目标：说清 Group 和普通 list 的三点差别；理解为什么 Pygame 用编组而不是列表</a:t>
-            </a:r>
-          </a:p>
-          <a:p>
-            <a:r>
-              <a:rPr lang="zh-CN" dirty="0"/>
-              <a:t/>
-            </a:r>
-          </a:p>
-          <a:p>
-            <a:r>
-              <a:rPr lang="zh-CN" dirty="0"/>
-              <a:t>课堂实操（40 分钟，不看答案）：</a:t>
-            </a:r>
-          </a:p>
-          <a:p>
-            <a:r>
-              <a:rPr lang="zh-CN" dirty="0"/>
-              <a:t>· 用纯 Python 演示 Group 的 add/update/remove 行为</a:t>
-            </a:r>
-          </a:p>
-          <a:p>
-            <a:r>
-              <a:rPr lang="zh-CN" dirty="0"/>
-              <a:t>· 对比 list 与 Group 的删除差异</a:t>
-            </a:r>
-          </a:p>
-          <a:p>
-            <a:r>
-              <a:rPr lang="zh-CN" dirty="0"/>
-              <a:t/>
-            </a:r>
-          </a:p>
-          <a:p>
-            <a:r>
-              <a:rPr lang="zh-CN" dirty="0"/>
-              <a:t>课后作业：</a:t>
-            </a:r>
-          </a:p>
-          <a:p>
-            <a:r>
-              <a:rPr lang="zh-CN" dirty="0"/>
-              <a:t>· 完成练习 13-1【编组基本功】</a:t>
-            </a:r>
-          </a:p>
-          <a:p>
-            <a:r>
-              <a:rPr lang="zh-CN" dirty="0"/>
-              <a:t/>
-            </a:r>
-          </a:p>
-          <a:p>
-            <a:r>
-              <a:rPr lang="zh-CN" dirty="0"/>
-              <a:t>节奏：讲 20 分钟 → 学员自己敲 40 分钟（不看答案）→ 对讲评自查 20 分钟 → 写作业 10 分钟。</a:t>
-            </a:r>
-          </a:p>
-        </p:txBody>
-      </p:sp>
-      <p:sp>
-        <p:nvSpPr>
-          <p:cNvPr id="2" name="讲课提示"/>
-          <p:cNvSpPr txBox="1"/>
-          <p:nvPr/>
-        </p:nvSpPr>
-        <p:spPr>
-          <a:xfrm>
-            <a:off x="457200" y="457200"/>
-            <a:ext cx="6858000" cy="4800600"/>
-          </a:xfrm>
-          <a:prstGeom prst="rect">
-            <a:avLst/>
-          </a:prstGeom>
-        </p:spPr>
-        <p:txBody>
-          <a:bodyPr wrap="square"/>
-          <a:lstStyle/>
-          <a:p>
-            <a:r>
-              <a:rPr lang="zh-CN" dirty="0"/>
-              <a:t>第 70 节 · 编组 Group 与精灵 Sprite</a:t>
-            </a:r>
-          </a:p>
-          <a:p>
-            <a:r>
-              <a:rPr lang="zh-CN" dirty="0"/>
-              <a:t>单元 13 · 射击与外星舰队 · W15</a:t>
-            </a:r>
-          </a:p>
-          <a:p>
-            <a:r>
-              <a:rPr lang="zh-CN" dirty="0"/>
-              <a:t/>
-            </a:r>
-          </a:p>
-          <a:p>
-            <a:r>
-              <a:rPr lang="zh-CN" dirty="0"/>
-              <a:t>学习目标：说清 Group 和普通 list 的三点差别；理解为什么 Pygame 用编组而不是列表</a:t>
-            </a:r>
-          </a:p>
-          <a:p>
-            <a:r>
-              <a:rPr lang="zh-CN" dirty="0"/>
-              <a:t/>
-            </a:r>
-          </a:p>
-          <a:p>
-            <a:r>
-              <a:rPr lang="zh-CN" dirty="0"/>
-              <a:t>课堂实操（40 分钟，不看答案）：</a:t>
-            </a:r>
-          </a:p>
-          <a:p>
-            <a:r>
-              <a:rPr lang="zh-CN" dirty="0"/>
-              <a:t>· 用纯 Python 演示 Group 的 add/update/remove 行为</a:t>
-            </a:r>
-          </a:p>
-          <a:p>
-            <a:r>
-              <a:rPr lang="zh-CN" dirty="0"/>
-              <a:t>· 对比 list 与 Group 的删除差异</a:t>
-            </a:r>
-          </a:p>
-          <a:p>
-            <a:r>
-              <a:rPr lang="zh-CN" dirty="0"/>
-              <a:t/>
-            </a:r>
-          </a:p>
-          <a:p>
-            <a:r>
-              <a:rPr lang="zh-CN" dirty="0"/>
-              <a:t>课后作业：</a:t>
-            </a:r>
-          </a:p>
-          <a:p>
-            <a:r>
-              <a:rPr lang="zh-CN" dirty="0"/>
-              <a:t>· 完成练习 13-1【编组基本功】</a:t>
-            </a:r>
-          </a:p>
-          <a:p>
-            <a:r>
-              <a:rPr lang="zh-CN" dirty="0"/>
-              <a:t/>
-            </a:r>
-          </a:p>
-          <a:p>
-            <a:r>
-              <a:rPr lang="zh-CN" dirty="0"/>
-              <a:t>节奏：讲 20 分钟 → 学员自己敲 40 分钟（不看答案）→ 对讲评自查 20 分钟 → 写作业 10 分钟。</a:t>
-            </a:r>
-          </a:p>
-        </p:txBody>
-      </p:sp>
-    </p:spTree>
-  </p:cSld>
-  <p:clrMapOvr>
-    <a:masterClrMapping/>
-  </p:clrMapOvr>
-</p:notes>
-</file>
-
-<file path=ppt/notesSlides/notesSlide3.xml><?xml version="1.0" encoding="utf-8"?>
-<p:notes xmlns:a="http://schemas.openxmlformats.org/drawingml/2006/main" xmlns:p="http://schemas.openxmlformats.org/presentationml/2006/main" xmlns:r="http://schemas.openxmlformats.org/officeDocument/2006/relationships">
-  <p:cSld>
-    <p:spTree>
-      <p:nvGrpSpPr>
-        <p:cNvPr id="1" name=""/>
-        <p:cNvGrpSpPr/>
-        <p:nvPr/>
-      </p:nvGrpSpPr>
-      <p:grpSpPr>
-        <a:xfrm>
-          <a:off x="0" y="0"/>
-          <a:ext cx="0" cy="0"/>
-          <a:chOff x="0" y="0"/>
-          <a:chExt cx="0" cy="0"/>
-        </a:xfrm>
-      </p:grpSpPr>
-      <p:sp>
-        <p:nvSpPr>
-          <p:cNvPr id="2" name="讲课提示"/>
-          <p:cNvSpPr txBox="1"/>
-          <p:nvPr/>
-        </p:nvSpPr>
-        <p:spPr>
-          <a:xfrm>
-            <a:off x="457200" y="457200"/>
-            <a:ext cx="6858000" cy="4800600"/>
-          </a:xfrm>
-          <a:prstGeom prst="rect">
-            <a:avLst/>
-          </a:prstGeom>
-        </p:spPr>
-        <p:txBody>
-          <a:bodyPr wrap="square"/>
-          <a:lstStyle/>
-          <a:p>
-            <a:r>
-              <a:rPr lang="zh-CN" dirty="0"/>
-              <a:t>第 70 节 · 核心知识点：编组 Group 与精灵 Sprite</a:t>
-            </a:r>
-          </a:p>
-          <a:p>
-            <a:r>
-              <a:rPr lang="zh-CN" dirty="0"/>
-              <a:t/>
-            </a:r>
-          </a:p>
-          <a:p>
-            <a:r>
-              <a:rPr lang="zh-CN" dirty="0"/>
-              <a:t>讲这一页时：先让学生说出上节课的结论，再逐块讲要点。</a:t>
-            </a:r>
-          </a:p>
-          <a:p>
-            <a:r>
-              <a:rPr lang="zh-CN" dirty="0"/>
-              <a:t>每讲完一块，问一句「这一步如果写错了，报错会长什么样？」——把错误提前讲。</a:t>
-            </a:r>
-          </a:p>
-          <a:p>
-            <a:r>
-              <a:rPr lang="zh-CN" dirty="0"/>
-              <a:t/>
-            </a:r>
-          </a:p>
-          <a:p>
-            <a:r>
-              <a:rPr lang="zh-CN" dirty="0"/>
-              <a:t>本节目标：说清 Group 和普通 list 的三点差别；理解为什么 Pygame 用编组而不是列表</a:t>
-            </a:r>
-          </a:p>
-          <a:p>
-            <a:r>
-              <a:rPr lang="zh-CN" dirty="0"/>
-              <a:t/>
-            </a:r>
-          </a:p>
-          <a:p>
-            <a:r>
-              <a:rPr lang="zh-CN" dirty="0"/>
-              <a:t>看不到懂的地方，回讲义对应小节读一遍，再回来对着这页复述一次——能讲出来才算真懂。</a:t>
-            </a:r>
-          </a:p>
-        </p:txBody>
-      </p:sp>
-      <p:sp>
-        <p:nvSpPr>
-          <p:cNvPr id="2" name="讲课提示"/>
-          <p:cNvSpPr txBox="1"/>
-          <p:nvPr/>
-        </p:nvSpPr>
-        <p:spPr>
-          <a:xfrm>
-            <a:off x="457200" y="457200"/>
-            <a:ext cx="6858000" cy="4800600"/>
-          </a:xfrm>
-          <a:prstGeom prst="rect">
-            <a:avLst/>
-          </a:prstGeom>
-        </p:spPr>
-        <p:txBody>
-          <a:bodyPr wrap="square"/>
-          <a:lstStyle/>
-          <a:p>
-            <a:r>
-              <a:rPr lang="zh-CN" dirty="0"/>
-              <a:t>第 70 节 · 核心知识点：编组 Group 与精灵 Sprite</a:t>
-            </a:r>
-          </a:p>
-          <a:p>
-            <a:r>
-              <a:rPr lang="zh-CN" dirty="0"/>
-              <a:t/>
-            </a:r>
-          </a:p>
-          <a:p>
-            <a:r>
-              <a:rPr lang="zh-CN" dirty="0"/>
-              <a:t>讲这一页时：先让学生说出上节课的结论，再逐块讲要点。</a:t>
-            </a:r>
-          </a:p>
-          <a:p>
-            <a:r>
-              <a:rPr lang="zh-CN" dirty="0"/>
-              <a:t>每讲完一块，问一句「这一步如果写错了，报错会长什么样？」——把错误提前讲。</a:t>
-            </a:r>
-          </a:p>
-          <a:p>
-            <a:r>
-              <a:rPr lang="zh-CN" dirty="0"/>
-              <a:t/>
-            </a:r>
-          </a:p>
-          <a:p>
-            <a:r>
-              <a:rPr lang="zh-CN" dirty="0"/>
-              <a:t>本节目标：说清 Group 和普通 list 的三点差别；理解为什么 Pygame 用编组而不是列表</a:t>
-            </a:r>
-          </a:p>
-          <a:p>
-            <a:r>
-              <a:rPr lang="zh-CN" dirty="0"/>
-              <a:t/>
-            </a:r>
-          </a:p>
-          <a:p>
-            <a:r>
-              <a:rPr lang="zh-CN" dirty="0"/>
-              <a:t>看不到懂的地方，回讲义对应小节读一遍，再回来对着这页复述一次——能讲出来才算真懂。</a:t>
-            </a:r>
-          </a:p>
-        </p:txBody>
-      </p:sp>
-    </p:spTree>
-  </p:cSld>
-  <p:clrMapOvr>
-    <a:masterClrMapping/>
-  </p:clrMapOvr>
-</p:notes>
-</file>
-
-<file path=ppt/notesSlides/notesSlide4.xml><?xml version="1.0" encoding="utf-8"?>
-<p:notes xmlns:a="http://schemas.openxmlformats.org/drawingml/2006/main" xmlns:p="http://schemas.openxmlformats.org/presentationml/2006/main" xmlns:r="http://schemas.openxmlformats.org/officeDocument/2006/relationships">
-  <p:cSld>
-    <p:spTree>
-      <p:nvGrpSpPr>
-        <p:cNvPr id="1" name=""/>
-        <p:cNvGrpSpPr/>
-        <p:nvPr/>
-      </p:nvGrpSpPr>
-      <p:grpSpPr>
-        <a:xfrm>
-          <a:off x="0" y="0"/>
-          <a:ext cx="0" cy="0"/>
-          <a:chOff x="0" y="0"/>
-          <a:chExt cx="0" cy="0"/>
-        </a:xfrm>
-      </p:grpSpPr>
-      <p:sp>
-        <p:nvSpPr>
-          <p:cNvPr id="2" name="讲课提示"/>
-          <p:cNvSpPr txBox="1"/>
-          <p:nvPr/>
-        </p:nvSpPr>
-        <p:spPr>
-          <a:xfrm>
-            <a:off x="457200" y="457200"/>
-            <a:ext cx="6858000" cy="4800600"/>
-          </a:xfrm>
-          <a:prstGeom prst="rect">
-            <a:avLst/>
-          </a:prstGeom>
-        </p:spPr>
-        <p:txBody>
-          <a:bodyPr wrap="square"/>
-          <a:lstStyle/>
-          <a:p>
-            <a:r>
-              <a:rPr lang="zh-CN" dirty="0"/>
-              <a:t>第 71 节 · 射击：Bullet 类与开火</a:t>
-            </a:r>
-          </a:p>
-          <a:p>
-            <a:r>
-              <a:rPr lang="zh-CN" dirty="0"/>
-              <a:t>单元 13 · 射击与外星舰队 · W15–W16</a:t>
-            </a:r>
-          </a:p>
-          <a:p>
-            <a:r>
-              <a:rPr lang="zh-CN" dirty="0"/>
-              <a:t/>
-            </a:r>
-          </a:p>
-          <a:p>
-            <a:r>
-              <a:rPr lang="zh-CN" dirty="0"/>
-              <a:t>学习目标：能创建 Bullet 类、把子弹存进编组、限制子弹数量</a:t>
-            </a:r>
-          </a:p>
-          <a:p>
-            <a:r>
-              <a:rPr lang="zh-CN" dirty="0"/>
-              <a:t/>
-            </a:r>
-          </a:p>
-          <a:p>
-            <a:r>
-              <a:rPr lang="zh-CN" dirty="0"/>
-              <a:t>课堂实操（40 分钟，不看答案）：</a:t>
-            </a:r>
-          </a:p>
-          <a:p>
-            <a:r>
-              <a:rPr lang="zh-CN" dirty="0"/>
-              <a:t>· 实现 Bullet 类并让它能向上飞</a:t>
-            </a:r>
-          </a:p>
-          <a:p>
-            <a:r>
-              <a:rPr lang="zh-CN" dirty="0"/>
-              <a:t>· 故意不开火，看子弹越积越多</a:t>
-            </a:r>
-          </a:p>
-          <a:p>
-            <a:r>
-              <a:rPr lang="zh-CN" dirty="0"/>
-              <a:t>· 把 limit 加严，观察效果</a:t>
-            </a:r>
-          </a:p>
-          <a:p>
-            <a:r>
-              <a:rPr lang="zh-CN" dirty="0"/>
-              <a:t/>
-            </a:r>
-          </a:p>
-          <a:p>
-            <a:r>
-              <a:rPr lang="zh-CN" dirty="0"/>
-              <a:t>课后作业：</a:t>
-            </a:r>
-          </a:p>
-          <a:p>
-            <a:r>
-              <a:rPr lang="zh-CN" dirty="0"/>
-              <a:t>· 完成练习 13-2【复现并修复「漏删」bug】</a:t>
-            </a:r>
-          </a:p>
-          <a:p>
-            <a:r>
-              <a:rPr lang="zh-CN" dirty="0"/>
-              <a:t/>
-            </a:r>
-          </a:p>
-          <a:p>
-            <a:r>
-              <a:rPr lang="zh-CN" dirty="0"/>
-              <a:t>节奏：讲 20 分钟 → 学员自己敲 40 分钟（不看答案）→ 对讲评自查 20 分钟 → 写作业 10 分钟。</a:t>
-            </a:r>
-          </a:p>
-        </p:txBody>
-      </p:sp>
-      <p:sp>
-        <p:nvSpPr>
-          <p:cNvPr id="2" name="讲课提示"/>
-          <p:cNvSpPr txBox="1"/>
-          <p:nvPr/>
-        </p:nvSpPr>
-        <p:spPr>
-          <a:xfrm>
-            <a:off x="457200" y="457200"/>
-            <a:ext cx="6858000" cy="4800600"/>
-          </a:xfrm>
-          <a:prstGeom prst="rect">
-            <a:avLst/>
-          </a:prstGeom>
-        </p:spPr>
-        <p:txBody>
-          <a:bodyPr wrap="square"/>
-          <a:lstStyle/>
-          <a:p>
-            <a:r>
-              <a:rPr lang="zh-CN" dirty="0"/>
-              <a:t>第 71 节 · 射击：Bullet 类与开火</a:t>
-            </a:r>
-          </a:p>
-          <a:p>
-            <a:r>
-              <a:rPr lang="zh-CN" dirty="0"/>
-              <a:t>单元 13 · 射击与外星舰队 · W15–W16</a:t>
-            </a:r>
-          </a:p>
-          <a:p>
-            <a:r>
-              <a:rPr lang="zh-CN" dirty="0"/>
-              <a:t/>
-            </a:r>
-          </a:p>
-          <a:p>
-            <a:r>
-              <a:rPr lang="zh-CN" dirty="0"/>
-              <a:t>学习目标：能创建 Bullet 类、把子弹存进编组、限制子弹数量</a:t>
-            </a:r>
-          </a:p>
-          <a:p>
-            <a:r>
-              <a:rPr lang="zh-CN" dirty="0"/>
-              <a:t/>
-            </a:r>
-          </a:p>
-          <a:p>
-            <a:r>
-              <a:rPr lang="zh-CN" dirty="0"/>
-              <a:t>课堂实操（40 分钟，不看答案）：</a:t>
-            </a:r>
-          </a:p>
-          <a:p>
-            <a:r>
-              <a:rPr lang="zh-CN" dirty="0"/>
-              <a:t>· 实现 Bullet 类并让它能向上飞</a:t>
-            </a:r>
-          </a:p>
-          <a:p>
-            <a:r>
-              <a:rPr lang="zh-CN" dirty="0"/>
-              <a:t>· 故意不开火，看子弹越积越多</a:t>
-            </a:r>
-          </a:p>
-          <a:p>
-            <a:r>
-              <a:rPr lang="zh-CN" dirty="0"/>
-              <a:t>· 把 limit 加严，观察效果</a:t>
-            </a:r>
-          </a:p>
-          <a:p>
-            <a:r>
-              <a:rPr lang="zh-CN" dirty="0"/>
-              <a:t/>
-            </a:r>
-          </a:p>
-          <a:p>
-            <a:r>
-              <a:rPr lang="zh-CN" dirty="0"/>
-              <a:t>课后作业：</a:t>
-            </a:r>
-          </a:p>
-          <a:p>
-            <a:r>
-              <a:rPr lang="zh-CN" dirty="0"/>
-              <a:t>· 完成练习 13-2【复现并修复「漏删」bug】</a:t>
-            </a:r>
-          </a:p>
-          <a:p>
-            <a:r>
-              <a:rPr lang="zh-CN" dirty="0"/>
-              <a:t/>
-            </a:r>
-          </a:p>
-          <a:p>
-            <a:r>
-              <a:rPr lang="zh-CN" dirty="0"/>
-              <a:t>节奏：讲 20 分钟 → 学员自己敲 40 分钟（不看答案）→ 对讲评自查 20 分钟 → 写作业 10 分钟。</a:t>
-            </a:r>
-          </a:p>
-        </p:txBody>
-      </p:sp>
-    </p:spTree>
-  </p:cSld>
-  <p:clrMapOvr>
-    <a:masterClrMapping/>
-  </p:clrMapOvr>
-</p:notes>
-</file>
-
-<file path=ppt/notesSlides/notesSlide5.xml><?xml version="1.0" encoding="utf-8"?>
-<p:notes xmlns:a="http://schemas.openxmlformats.org/drawingml/2006/main" xmlns:p="http://schemas.openxmlformats.org/presentationml/2006/main" xmlns:r="http://schemas.openxmlformats.org/officeDocument/2006/relationships">
-  <p:cSld>
-    <p:spTree>
-      <p:nvGrpSpPr>
-        <p:cNvPr id="1" name=""/>
-        <p:cNvGrpSpPr/>
-        <p:nvPr/>
-      </p:nvGrpSpPr>
-      <p:grpSpPr>
-        <a:xfrm>
-          <a:off x="0" y="0"/>
-          <a:ext cx="0" cy="0"/>
-          <a:chOff x="0" y="0"/>
-          <a:chExt cx="0" cy="0"/>
-        </a:xfrm>
-      </p:grpSpPr>
-      <p:sp>
-        <p:nvSpPr>
-          <p:cNvPr id="2" name="讲课提示"/>
-          <p:cNvSpPr txBox="1"/>
-          <p:nvPr/>
-        </p:nvSpPr>
-        <p:spPr>
-          <a:xfrm>
-            <a:off x="457200" y="457200"/>
-            <a:ext cx="6858000" cy="4800600"/>
-          </a:xfrm>
-          <a:prstGeom prst="rect">
-            <a:avLst/>
-          </a:prstGeom>
-        </p:spPr>
-        <p:txBody>
-          <a:bodyPr wrap="square"/>
-          <a:lstStyle/>
-          <a:p>
-            <a:r>
-              <a:rPr lang="zh-CN" dirty="0"/>
-              <a:t>第 71 节 · 核心知识点：射击：Bullet 类与开火</a:t>
-            </a:r>
-          </a:p>
-          <a:p>
-            <a:r>
-              <a:rPr lang="zh-CN" dirty="0"/>
-              <a:t/>
-            </a:r>
-          </a:p>
-          <a:p>
-            <a:r>
-              <a:rPr lang="zh-CN" dirty="0"/>
-              <a:t>讲这一页时：先让学生说出上节课的结论，再逐块讲要点。</a:t>
-            </a:r>
-          </a:p>
-          <a:p>
-            <a:r>
-              <a:rPr lang="zh-CN" dirty="0"/>
-              <a:t>每讲完一块，问一句「这一步如果写错了，报错会长什么样？」——把错误提前讲。</a:t>
-            </a:r>
-          </a:p>
-          <a:p>
-            <a:r>
-              <a:rPr lang="zh-CN" dirty="0"/>
-              <a:t/>
-            </a:r>
-          </a:p>
-          <a:p>
-            <a:r>
-              <a:rPr lang="zh-CN" dirty="0"/>
-              <a:t>本节目标：能创建 Bullet 类、把子弹存进编组、限制子弹数量</a:t>
-            </a:r>
-          </a:p>
-          <a:p>
-            <a:r>
-              <a:rPr lang="zh-CN" dirty="0"/>
-              <a:t/>
-            </a:r>
-          </a:p>
-          <a:p>
-            <a:r>
-              <a:rPr lang="zh-CN" dirty="0"/>
-              <a:t>看不到懂的地方，回讲义对应小节读一遍，再回来对着这页复述一次——能讲出来才算真懂。</a:t>
-            </a:r>
-          </a:p>
-        </p:txBody>
-      </p:sp>
-      <p:sp>
-        <p:nvSpPr>
-          <p:cNvPr id="2" name="讲课提示"/>
-          <p:cNvSpPr txBox="1"/>
-          <p:nvPr/>
-        </p:nvSpPr>
-        <p:spPr>
-          <a:xfrm>
-            <a:off x="457200" y="457200"/>
-            <a:ext cx="6858000" cy="4800600"/>
-          </a:xfrm>
-          <a:prstGeom prst="rect">
-            <a:avLst/>
-          </a:prstGeom>
-        </p:spPr>
-        <p:txBody>
-          <a:bodyPr wrap="square"/>
-          <a:lstStyle/>
-          <a:p>
-            <a:r>
-              <a:rPr lang="zh-CN" dirty="0"/>
-              <a:t>第 71 节 · 核心知识点：射击：Bullet 类与开火</a:t>
-            </a:r>
-          </a:p>
-          <a:p>
-            <a:r>
-              <a:rPr lang="zh-CN" dirty="0"/>
-              <a:t/>
-            </a:r>
-          </a:p>
-          <a:p>
-            <a:r>
-              <a:rPr lang="zh-CN" dirty="0"/>
-              <a:t>讲这一页时：先让学生说出上节课的结论，再逐块讲要点。</a:t>
-            </a:r>
-          </a:p>
-          <a:p>
-            <a:r>
-              <a:rPr lang="zh-CN" dirty="0"/>
-              <a:t>每讲完一块，问一句「这一步如果写错了，报错会长什么样？」——把错误提前讲。</a:t>
-            </a:r>
-          </a:p>
-          <a:p>
-            <a:r>
-              <a:rPr lang="zh-CN" dirty="0"/>
-              <a:t/>
-            </a:r>
-          </a:p>
-          <a:p>
-            <a:r>
-              <a:rPr lang="zh-CN" dirty="0"/>
-              <a:t>本节目标：能创建 Bullet 类、把子弹存进编组、限制子弹数量</a:t>
-            </a:r>
-          </a:p>
-          <a:p>
-            <a:r>
-              <a:rPr lang="zh-CN" dirty="0"/>
-              <a:t/>
-            </a:r>
-          </a:p>
-          <a:p>
-            <a:r>
-              <a:rPr lang="zh-CN" dirty="0"/>
-              <a:t>看不到懂的地方，回讲义对应小节读一遍，再回来对着这页复述一次——能讲出来才算真懂。</a:t>
-            </a:r>
-          </a:p>
-        </p:txBody>
-      </p:sp>
-    </p:spTree>
-  </p:cSld>
-  <p:clrMapOvr>
-    <a:masterClrMapping/>
-  </p:clrMapOvr>
-</p:notes>
-</file>
-
-<file path=ppt/notesSlides/notesSlide6.xml><?xml version="1.0" encoding="utf-8"?>
-<p:notes xmlns:a="http://schemas.openxmlformats.org/drawingml/2006/main" xmlns:p="http://schemas.openxmlformats.org/presentationml/2006/main" xmlns:r="http://schemas.openxmlformats.org/officeDocument/2006/relationships">
-  <p:cSld>
-    <p:spTree>
-      <p:nvGrpSpPr>
-        <p:cNvPr id="1" name=""/>
-        <p:cNvGrpSpPr/>
-        <p:nvPr/>
-      </p:nvGrpSpPr>
-      <p:grpSpPr>
-        <a:xfrm>
-          <a:off x="0" y="0"/>
-          <a:ext cx="0" cy="0"/>
-          <a:chOff x="0" y="0"/>
-          <a:chExt cx="0" cy="0"/>
-        </a:xfrm>
-      </p:grpSpPr>
-      <p:sp>
-        <p:nvSpPr>
-          <p:cNvPr id="2" name="讲课提示"/>
-          <p:cNvSpPr txBox="1"/>
-          <p:nvPr/>
-        </p:nvSpPr>
-        <p:spPr>
-          <a:xfrm>
-            <a:off x="457200" y="457200"/>
-            <a:ext cx="6858000" cy="4800600"/>
-          </a:xfrm>
-          <a:prstGeom prst="rect">
-            <a:avLst/>
-          </a:prstGeom>
-        </p:spPr>
-        <p:txBody>
-          <a:bodyPr wrap="square"/>
-          <a:lstStyle/>
-          <a:p>
-            <a:r>
-              <a:rPr lang="zh-CN" dirty="0"/>
-              <a:t>第 72 节 · 外星舰队与整体移动</a:t>
-            </a:r>
-          </a:p>
-          <a:p>
-            <a:r>
-              <a:rPr lang="zh-CN" dirty="0"/>
-              <a:t>单元 13 · 射击与外星舰队 · W16</a:t>
-            </a:r>
-          </a:p>
-          <a:p>
-            <a:r>
-              <a:rPr lang="zh-CN" dirty="0"/>
-              <a:t/>
-            </a:r>
-          </a:p>
-          <a:p>
-            <a:r>
-              <a:rPr lang="zh-CN" dirty="0"/>
-              <a:t>学习目标：能生成多行外星舰队；用 fleet_direction 让整队移动、触边下移并反向</a:t>
-            </a:r>
-          </a:p>
-          <a:p>
-            <a:r>
-              <a:rPr lang="zh-CN" dirty="0"/>
-              <a:t/>
-            </a:r>
-          </a:p>
-          <a:p>
-            <a:r>
-              <a:rPr lang="zh-CN" dirty="0"/>
-              <a:t>课堂实操（40 分钟，不看答案）：</a:t>
-            </a:r>
-          </a:p>
-          <a:p>
-            <a:r>
-              <a:rPr lang="zh-CN" dirty="0"/>
-              <a:t>· 现场写 `_create_fleet()` 并重构</a:t>
-            </a:r>
-          </a:p>
-          <a:p>
-            <a:r>
-              <a:rPr lang="zh-CN" dirty="0"/>
-              <a:t>· 把速度改成 2，观察为什么 `==` 检测不到边缘</a:t>
-            </a:r>
-          </a:p>
-          <a:p>
-            <a:r>
-              <a:rPr lang="zh-CN" dirty="0"/>
-              <a:t>· 把舰队方向手动改反，看它怎么走</a:t>
-            </a:r>
-          </a:p>
-          <a:p>
-            <a:r>
-              <a:rPr lang="zh-CN" dirty="0"/>
-              <a:t/>
-            </a:r>
-          </a:p>
-          <a:p>
-            <a:r>
-              <a:rPr lang="zh-CN" dirty="0"/>
-              <a:t>课后作业：</a:t>
-            </a:r>
-          </a:p>
-          <a:p>
-            <a:r>
-              <a:rPr lang="zh-CN" dirty="0"/>
-              <a:t>· 完成练习 13-3【边缘检测】</a:t>
-            </a:r>
-          </a:p>
-          <a:p>
-            <a:r>
-              <a:rPr lang="zh-CN" dirty="0"/>
-              <a:t/>
-            </a:r>
-          </a:p>
-          <a:p>
-            <a:r>
-              <a:rPr lang="zh-CN" dirty="0"/>
-              <a:t>节奏：讲 20 分钟 → 学员自己敲 40 分钟（不看答案）→ 对讲评自查 20 分钟 → 写作业 10 分钟。</a:t>
-            </a:r>
-          </a:p>
-        </p:txBody>
-      </p:sp>
-      <p:sp>
-        <p:nvSpPr>
-          <p:cNvPr id="2" name="讲课提示"/>
-          <p:cNvSpPr txBox="1"/>
-          <p:nvPr/>
-        </p:nvSpPr>
-        <p:spPr>
-          <a:xfrm>
-            <a:off x="457200" y="457200"/>
-            <a:ext cx="6858000" cy="4800600"/>
-          </a:xfrm>
-          <a:prstGeom prst="rect">
-            <a:avLst/>
-          </a:prstGeom>
-        </p:spPr>
-        <p:txBody>
-          <a:bodyPr wrap="square"/>
-          <a:lstStyle/>
-          <a:p>
-            <a:r>
-              <a:rPr lang="zh-CN" dirty="0"/>
-              <a:t>第 72 节 · 外星舰队与整体移动</a:t>
-            </a:r>
-          </a:p>
-          <a:p>
-            <a:r>
-              <a:rPr lang="zh-CN" dirty="0"/>
-              <a:t>单元 13 · 射击与外星舰队 · W16</a:t>
-            </a:r>
-          </a:p>
-          <a:p>
-            <a:r>
-              <a:rPr lang="zh-CN" dirty="0"/>
-              <a:t/>
-            </a:r>
-          </a:p>
-          <a:p>
-            <a:r>
-              <a:rPr lang="zh-CN" dirty="0"/>
-              <a:t>学习目标：能生成多行外星舰队；用 fleet_direction 让整队移动、触边下移并反向</a:t>
-            </a:r>
-          </a:p>
-          <a:p>
-            <a:r>
-              <a:rPr lang="zh-CN" dirty="0"/>
-              <a:t/>
-            </a:r>
-          </a:p>
-          <a:p>
-            <a:r>
-              <a:rPr lang="zh-CN" dirty="0"/>
-              <a:t>课堂实操（40 分钟，不看答案）：</a:t>
-            </a:r>
-          </a:p>
-          <a:p>
-            <a:r>
-              <a:rPr lang="zh-CN" dirty="0"/>
-              <a:t>· 现场写 `_create_fleet()` 并重构</a:t>
-            </a:r>
-          </a:p>
-          <a:p>
-            <a:r>
-              <a:rPr lang="zh-CN" dirty="0"/>
-              <a:t>· 把速度改成 2，观察为什么 `==` 检测不到边缘</a:t>
-            </a:r>
-          </a:p>
-          <a:p>
-            <a:r>
-              <a:rPr lang="zh-CN" dirty="0"/>
-              <a:t>· 把舰队方向手动改反，看它怎么走</a:t>
-            </a:r>
-          </a:p>
-          <a:p>
-            <a:r>
-              <a:rPr lang="zh-CN" dirty="0"/>
-              <a:t/>
-            </a:r>
-          </a:p>
-          <a:p>
-            <a:r>
-              <a:rPr lang="zh-CN" dirty="0"/>
-              <a:t>课后作业：</a:t>
-            </a:r>
-          </a:p>
-          <a:p>
-            <a:r>
-              <a:rPr lang="zh-CN" dirty="0"/>
-              <a:t>· 完成练习 13-3【边缘检测】</a:t>
-            </a:r>
-          </a:p>
-          <a:p>
-            <a:r>
-              <a:rPr lang="zh-CN" dirty="0"/>
-              <a:t/>
-            </a:r>
-          </a:p>
-          <a:p>
-            <a:r>
-              <a:rPr lang="zh-CN" dirty="0"/>
-              <a:t>节奏：讲 20 分钟 → 学员自己敲 40 分钟（不看答案）→ 对讲评自查 20 分钟 → 写作业 10 分钟。</a:t>
-            </a:r>
-          </a:p>
-        </p:txBody>
-      </p:sp>
-    </p:spTree>
-  </p:cSld>
-  <p:clrMapOvr>
-    <a:masterClrMapping/>
-  </p:clrMapOvr>
-</p:notes>
-</file>
-
-<file path=ppt/notesSlides/notesSlide7.xml><?xml version="1.0" encoding="utf-8"?>
-<p:notes xmlns:a="http://schemas.openxmlformats.org/drawingml/2006/main" xmlns:p="http://schemas.openxmlformats.org/presentationml/2006/main" xmlns:r="http://schemas.openxmlformats.org/officeDocument/2006/relationships">
-  <p:cSld>
-    <p:spTree>
-      <p:nvGrpSpPr>
-        <p:cNvPr id="1" name=""/>
-        <p:cNvGrpSpPr/>
-        <p:nvPr/>
-      </p:nvGrpSpPr>
-      <p:grpSpPr>
-        <a:xfrm>
-          <a:off x="0" y="0"/>
-          <a:ext cx="0" cy="0"/>
-          <a:chOff x="0" y="0"/>
-          <a:chExt cx="0" cy="0"/>
-        </a:xfrm>
-      </p:grpSpPr>
-      <p:sp>
-        <p:nvSpPr>
-          <p:cNvPr id="2" name="讲课提示"/>
-          <p:cNvSpPr txBox="1"/>
-          <p:nvPr/>
-        </p:nvSpPr>
-        <p:spPr>
-          <a:xfrm>
-            <a:off x="457200" y="457200"/>
-            <a:ext cx="6858000" cy="4800600"/>
-          </a:xfrm>
-          <a:prstGeom prst="rect">
-            <a:avLst/>
-          </a:prstGeom>
-        </p:spPr>
-        <p:txBody>
-          <a:bodyPr wrap="square"/>
-          <a:lstStyle/>
-          <a:p>
-            <a:r>
-              <a:rPr lang="zh-CN" dirty="0"/>
-              <a:t>第 72 节 · 核心知识点：外星舰队与整体移动</a:t>
-            </a:r>
-          </a:p>
-          <a:p>
-            <a:r>
-              <a:rPr lang="zh-CN" dirty="0"/>
-              <a:t/>
-            </a:r>
-          </a:p>
-          <a:p>
-            <a:r>
-              <a:rPr lang="zh-CN" dirty="0"/>
-              <a:t>讲这一页时：先让学生说出上节课的结论，再逐块讲要点。</a:t>
-            </a:r>
-          </a:p>
-          <a:p>
-            <a:r>
-              <a:rPr lang="zh-CN" dirty="0"/>
-              <a:t>每讲完一块，问一句「这一步如果写错了，报错会长什么样？」——把错误提前讲。</a:t>
-            </a:r>
-          </a:p>
-          <a:p>
-            <a:r>
-              <a:rPr lang="zh-CN" dirty="0"/>
-              <a:t/>
-            </a:r>
-          </a:p>
-          <a:p>
-            <a:r>
-              <a:rPr lang="zh-CN" dirty="0"/>
-              <a:t>本节目标：能生成多行外星舰队；用 fleet_direction 让整队移动、触边下移并反向</a:t>
-            </a:r>
-          </a:p>
-          <a:p>
-            <a:r>
-              <a:rPr lang="zh-CN" dirty="0"/>
-              <a:t/>
-            </a:r>
-          </a:p>
-          <a:p>
-            <a:r>
-              <a:rPr lang="zh-CN" dirty="0"/>
-              <a:t>看不到懂的地方，回讲义对应小节读一遍，再回来对着这页复述一次——能讲出来才算真懂。</a:t>
-            </a:r>
-          </a:p>
-        </p:txBody>
-      </p:sp>
-      <p:sp>
-        <p:nvSpPr>
-          <p:cNvPr id="2" name="讲课提示"/>
-          <p:cNvSpPr txBox="1"/>
-          <p:nvPr/>
-        </p:nvSpPr>
-        <p:spPr>
-          <a:xfrm>
-            <a:off x="457200" y="457200"/>
-            <a:ext cx="6858000" cy="4800600"/>
-          </a:xfrm>
-          <a:prstGeom prst="rect">
-            <a:avLst/>
-          </a:prstGeom>
-        </p:spPr>
-        <p:txBody>
-          <a:bodyPr wrap="square"/>
-          <a:lstStyle/>
-          <a:p>
-            <a:r>
-              <a:rPr lang="zh-CN" dirty="0"/>
-              <a:t>第 72 节 · 核心知识点：外星舰队与整体移动</a:t>
-            </a:r>
-          </a:p>
-          <a:p>
-            <a:r>
-              <a:rPr lang="zh-CN" dirty="0"/>
-              <a:t/>
-            </a:r>
-          </a:p>
-          <a:p>
-            <a:r>
-              <a:rPr lang="zh-CN" dirty="0"/>
-              <a:t>讲这一页时：先让学生说出上节课的结论，再逐块讲要点。</a:t>
-            </a:r>
-          </a:p>
-          <a:p>
-            <a:r>
-              <a:rPr lang="zh-CN" dirty="0"/>
-              <a:t>每讲完一块，问一句「这一步如果写错了，报错会长什么样？」——把错误提前讲。</a:t>
-            </a:r>
-          </a:p>
-          <a:p>
-            <a:r>
-              <a:rPr lang="zh-CN" dirty="0"/>
-              <a:t/>
-            </a:r>
-          </a:p>
-          <a:p>
-            <a:r>
-              <a:rPr lang="zh-CN" dirty="0"/>
-              <a:t>本节目标：能生成多行外星舰队；用 fleet_direction 让整队移动、触边下移并反向</a:t>
-            </a:r>
-          </a:p>
-          <a:p>
-            <a:r>
-              <a:rPr lang="zh-CN" dirty="0"/>
-              <a:t/>
-            </a:r>
-          </a:p>
-          <a:p>
-            <a:r>
-              <a:rPr lang="zh-CN" dirty="0"/>
-              <a:t>看不到懂的地方，回讲义对应小节读一遍，再回来对着这页复述一次——能讲出来才算真懂。</a:t>
-            </a:r>
-          </a:p>
-        </p:txBody>
-      </p:sp>
-    </p:spTree>
-  </p:cSld>
-  <p:clrMapOvr>
-    <a:masterClrMapping/>
-  </p:clrMapOvr>
-</p:notes>
-</file>
-
-<file path=ppt/notesSlides/notesSlide8.xml><?xml version="1.0" encoding="utf-8"?>
-<p:notes xmlns:a="http://schemas.openxmlformats.org/drawingml/2006/main" xmlns:p="http://schemas.openxmlformats.org/presentationml/2006/main" xmlns:r="http://schemas.openxmlformats.org/officeDocument/2006/relationships">
-  <p:cSld>
-    <p:spTree>
-      <p:nvGrpSpPr>
-        <p:cNvPr id="1" name=""/>
-        <p:cNvGrpSpPr/>
-        <p:nvPr/>
-      </p:nvGrpSpPr>
-      <p:grpSpPr>
-        <a:xfrm>
-          <a:off x="0" y="0"/>
-          <a:ext cx="0" cy="0"/>
-          <a:chOff x="0" y="0"/>
-          <a:chExt cx="0" cy="0"/>
-        </a:xfrm>
-      </p:grpSpPr>
-      <p:sp>
-        <p:nvSpPr>
-          <p:cNvPr id="2" name="讲课提示"/>
-          <p:cNvSpPr txBox="1"/>
-          <p:nvPr/>
-        </p:nvSpPr>
-        <p:spPr>
-          <a:xfrm>
-            <a:off x="457200" y="457200"/>
-            <a:ext cx="6858000" cy="4800600"/>
-          </a:xfrm>
-          <a:prstGeom prst="rect">
-            <a:avLst/>
-          </a:prstGeom>
-        </p:spPr>
-        <p:txBody>
-          <a:bodyPr wrap="square"/>
-          <a:lstStyle/>
-          <a:p>
-            <a:r>
-              <a:rPr lang="zh-CN" dirty="0"/>
-              <a:t>第 73 节 · 碰撞检测与游戏结束</a:t>
-            </a:r>
-          </a:p>
-          <a:p>
-            <a:r>
-              <a:rPr lang="zh-CN" dirty="0"/>
-              <a:t>单元 13 · 射击与外星舰队 · W16</a:t>
-            </a:r>
-          </a:p>
-          <a:p>
-            <a:r>
-              <a:rPr lang="zh-CN" dirty="0"/>
-              <a:t/>
-            </a:r>
-          </a:p>
-          <a:p>
-            <a:r>
-              <a:rPr lang="zh-CN" dirty="0"/>
-              <a:t>学习目标：用 groupcollide 击落外星人；检测飞船被撞与外星人触底，正确结束游戏</a:t>
-            </a:r>
-          </a:p>
-          <a:p>
-            <a:r>
-              <a:rPr lang="zh-CN" dirty="0"/>
-              <a:t/>
-            </a:r>
-          </a:p>
-          <a:p>
-            <a:r>
-              <a:rPr lang="zh-CN" dirty="0"/>
-              <a:t>课堂实操（40 分钟，不看答案）：</a:t>
-            </a:r>
-          </a:p>
-          <a:p>
-            <a:r>
-              <a:rPr lang="zh-CN" dirty="0"/>
-              <a:t>· 实现击落与加分</a:t>
-            </a:r>
-          </a:p>
-          <a:p>
-            <a:r>
-              <a:rPr lang="zh-CN" dirty="0"/>
-              <a:t>· 把两个 True 改成 False，复现「外星人不消失」bug</a:t>
-            </a:r>
-          </a:p>
-          <a:p>
-            <a:r>
-              <a:rPr lang="zh-CN" dirty="0"/>
-              <a:t>· 故意撞自己一次，看游戏是否正确结束</a:t>
-            </a:r>
-          </a:p>
-          <a:p>
-            <a:r>
-              <a:rPr lang="zh-CN" dirty="0"/>
-              <a:t/>
-            </a:r>
-          </a:p>
-          <a:p>
-            <a:r>
-              <a:rPr lang="zh-CN" dirty="0"/>
-              <a:t>课后作业：</a:t>
-            </a:r>
-          </a:p>
-          <a:p>
-            <a:r>
-              <a:rPr lang="zh-CN" dirty="0"/>
-              <a:t>· ★ 完成练习 13-5【三条命的完整流程】</a:t>
-            </a:r>
-          </a:p>
-          <a:p>
-            <a:r>
-              <a:rPr lang="zh-CN" dirty="0"/>
-              <a:t/>
-            </a:r>
-          </a:p>
-          <a:p>
-            <a:r>
-              <a:rPr lang="zh-CN" dirty="0"/>
-              <a:t>节奏：讲 20 分钟 → 学员自己敲 40 分钟（不看答案）→ 对讲评自查 20 分钟 → 写作业 10 分钟。</a:t>
-            </a:r>
-          </a:p>
-        </p:txBody>
-      </p:sp>
-      <p:sp>
-        <p:nvSpPr>
-          <p:cNvPr id="2" name="讲课提示"/>
-          <p:cNvSpPr txBox="1"/>
-          <p:nvPr/>
-        </p:nvSpPr>
-        <p:spPr>
-          <a:xfrm>
-            <a:off x="457200" y="457200"/>
-            <a:ext cx="6858000" cy="4800600"/>
-          </a:xfrm>
-          <a:prstGeom prst="rect">
-            <a:avLst/>
-          </a:prstGeom>
-        </p:spPr>
-        <p:txBody>
-          <a:bodyPr wrap="square"/>
-          <a:lstStyle/>
-          <a:p>
-            <a:r>
-              <a:rPr lang="zh-CN" dirty="0"/>
-              <a:t>第 73 节 · 碰撞检测与游戏结束</a:t>
-            </a:r>
-          </a:p>
-          <a:p>
-            <a:r>
-              <a:rPr lang="zh-CN" dirty="0"/>
-              <a:t>单元 13 · 射击与外星舰队 · W16</a:t>
-            </a:r>
-          </a:p>
-          <a:p>
-            <a:r>
-              <a:rPr lang="zh-CN" dirty="0"/>
-              <a:t/>
-            </a:r>
-          </a:p>
-          <a:p>
-            <a:r>
-              <a:rPr lang="zh-CN" dirty="0"/>
-              <a:t>学习目标：用 groupcollide 击落外星人；检测飞船被撞与外星人触底，正确结束游戏</a:t>
-            </a:r>
-          </a:p>
-          <a:p>
-            <a:r>
-              <a:rPr lang="zh-CN" dirty="0"/>
-              <a:t/>
-            </a:r>
-          </a:p>
-          <a:p>
-            <a:r>
-              <a:rPr lang="zh-CN" dirty="0"/>
-              <a:t>课堂实操（40 分钟，不看答案）：</a:t>
-            </a:r>
-          </a:p>
-          <a:p>
-            <a:r>
-              <a:rPr lang="zh-CN" dirty="0"/>
-              <a:t>· 实现击落与加分</a:t>
-            </a:r>
-          </a:p>
-          <a:p>
-            <a:r>
-              <a:rPr lang="zh-CN" dirty="0"/>
-              <a:t>· 把两个 True 改成 False，复现「外星人不消失」bug</a:t>
-            </a:r>
-          </a:p>
-          <a:p>
-            <a:r>
-              <a:rPr lang="zh-CN" dirty="0"/>
-              <a:t>· 故意撞自己一次，看游戏是否正确结束</a:t>
-            </a:r>
-          </a:p>
-          <a:p>
-            <a:r>
-              <a:rPr lang="zh-CN" dirty="0"/>
-              <a:t/>
-            </a:r>
-          </a:p>
-          <a:p>
-            <a:r>
-              <a:rPr lang="zh-CN" dirty="0"/>
-              <a:t>课后作业：</a:t>
-            </a:r>
-          </a:p>
-          <a:p>
-            <a:r>
-              <a:rPr lang="zh-CN" dirty="0"/>
-              <a:t>· ★ 完成练习 13-5【三条命的完整流程】</a:t>
-            </a:r>
-          </a:p>
-          <a:p>
-            <a:r>
-              <a:rPr lang="zh-CN" dirty="0"/>
-              <a:t/>
-            </a:r>
-          </a:p>
-          <a:p>
-            <a:r>
-              <a:rPr lang="zh-CN" dirty="0"/>
-              <a:t>节奏：讲 20 分钟 → 学员自己敲 40 分钟（不看答案）→ 对讲评自查 20 分钟 → 写作业 10 分钟。</a:t>
-            </a:r>
-          </a:p>
-        </p:txBody>
-      </p:sp>
-    </p:spTree>
-  </p:cSld>
-  <p:clrMapOvr>
-    <a:masterClrMapping/>
-  </p:clrMapOvr>
-</p:notes>
-</file>
-
-<file path=ppt/notesSlides/notesSlide9.xml><?xml version="1.0" encoding="utf-8"?>
-<p:notes xmlns:a="http://schemas.openxmlformats.org/drawingml/2006/main" xmlns:p="http://schemas.openxmlformats.org/presentationml/2006/main" xmlns:r="http://schemas.openxmlformats.org/officeDocument/2006/relationships">
-  <p:cSld>
-    <p:spTree>
-      <p:nvGrpSpPr>
-        <p:cNvPr id="1" name=""/>
-        <p:cNvGrpSpPr/>
-        <p:nvPr/>
-      </p:nvGrpSpPr>
-      <p:grpSpPr>
-        <a:xfrm>
-          <a:off x="0" y="0"/>
-          <a:ext cx="0" cy="0"/>
-          <a:chOff x="0" y="0"/>
-          <a:chExt cx="0" cy="0"/>
-        </a:xfrm>
-      </p:grpSpPr>
-      <p:sp>
-        <p:nvSpPr>
-          <p:cNvPr id="2" name="讲课提示"/>
-          <p:cNvSpPr txBox="1"/>
-          <p:nvPr/>
-        </p:nvSpPr>
-        <p:spPr>
-          <a:xfrm>
-            <a:off x="457200" y="457200"/>
-            <a:ext cx="6858000" cy="4800600"/>
-          </a:xfrm>
-          <a:prstGeom prst="rect">
-            <a:avLst/>
-          </a:prstGeom>
-        </p:spPr>
-        <p:txBody>
-          <a:bodyPr wrap="square"/>
-          <a:lstStyle/>
-          <a:p>
-            <a:r>
-              <a:rPr lang="zh-CN" dirty="0"/>
-              <a:t>第 73 节 · 核心知识点：碰撞检测与游戏结束</a:t>
-            </a:r>
-          </a:p>
-          <a:p>
-            <a:r>
-              <a:rPr lang="zh-CN" dirty="0"/>
-              <a:t/>
-            </a:r>
-          </a:p>
-          <a:p>
-            <a:r>
-              <a:rPr lang="zh-CN" dirty="0"/>
-              <a:t>讲这一页时：先让学生说出上节课的结论，再逐块讲要点。</a:t>
-            </a:r>
-          </a:p>
-          <a:p>
-            <a:r>
-              <a:rPr lang="zh-CN" dirty="0"/>
-              <a:t>每讲完一块，问一句「这一步如果写错了，报错会长什么样？」——把错误提前讲。</a:t>
-            </a:r>
-          </a:p>
-          <a:p>
-            <a:r>
-              <a:rPr lang="zh-CN" dirty="0"/>
-              <a:t/>
-            </a:r>
-          </a:p>
-          <a:p>
-            <a:r>
-              <a:rPr lang="zh-CN" dirty="0"/>
-              <a:t>本节目标：用 groupcollide 击落外星人；检测飞船被撞与外星人触底，正确结束游戏</a:t>
-            </a:r>
-          </a:p>
-          <a:p>
-            <a:r>
-              <a:rPr lang="zh-CN" dirty="0"/>
-              <a:t/>
-            </a:r>
-          </a:p>
-          <a:p>
-            <a:r>
-              <a:rPr lang="zh-CN" dirty="0"/>
-              <a:t>看不到懂的地方，回讲义对应小节读一遍，再回来对着这页复述一次——能讲出来才算真懂。</a:t>
-            </a:r>
-          </a:p>
-        </p:txBody>
-      </p:sp>
-      <p:sp>
-        <p:nvSpPr>
-          <p:cNvPr id="2" name="讲课提示"/>
-          <p:cNvSpPr txBox="1"/>
-          <p:nvPr/>
-        </p:nvSpPr>
-        <p:spPr>
-          <a:xfrm>
-            <a:off x="457200" y="457200"/>
-            <a:ext cx="6858000" cy="4800600"/>
-          </a:xfrm>
-          <a:prstGeom prst="rect">
-            <a:avLst/>
-          </a:prstGeom>
-        </p:spPr>
-        <p:txBody>
-          <a:bodyPr wrap="square"/>
-          <a:lstStyle/>
-          <a:p>
-            <a:r>
-              <a:rPr lang="zh-CN" dirty="0"/>
-              <a:t>第 73 节 · 核心知识点：碰撞检测与游戏结束</a:t>
-            </a:r>
-          </a:p>
-          <a:p>
-            <a:r>
-              <a:rPr lang="zh-CN" dirty="0"/>
-              <a:t/>
-            </a:r>
-          </a:p>
-          <a:p>
-            <a:r>
-              <a:rPr lang="zh-CN" dirty="0"/>
-              <a:t>讲这一页时：先让学生说出上节课的结论，再逐块讲要点。</a:t>
-            </a:r>
-          </a:p>
-          <a:p>
-            <a:r>
-              <a:rPr lang="zh-CN" dirty="0"/>
-              <a:t>每讲完一块，问一句「这一步如果写错了，报错会长什么样？」——把错误提前讲。</a:t>
-            </a:r>
-          </a:p>
-          <a:p>
-            <a:r>
-              <a:rPr lang="zh-CN" dirty="0"/>
-              <a:t/>
-            </a:r>
-          </a:p>
-          <a:p>
-            <a:r>
-              <a:rPr lang="zh-CN" dirty="0"/>
-              <a:t>本节目标：用 groupcollide 击落外星人；检测飞船被撞与外星人触底，正确结束游戏</a:t>
-            </a:r>
-          </a:p>
-          <a:p>
-            <a:r>
-              <a:rPr lang="zh-CN" dirty="0"/>
-              <a:t/>
-            </a:r>
-          </a:p>
-          <a:p>
-            <a:r>
-              <a:rPr lang="zh-CN" dirty="0"/>
-              <a:t>看不到懂的地方，回讲义对应小节读一遍，再回来对着这页复述一次——能讲出来才算真懂。</a:t>
-            </a:r>
-          </a:p>
-        </p:txBody>
-      </p:sp>
-    </p:spTree>
-  </p:cSld>
-  <p:clrMapOvr>
-    <a:masterClrMapping/>
-  </p:clrMapOvr>
-</p:notes>
-</file>
-
 <file path=ppt/slideLayouts/slideLayout1.xml><?xml version="1.0" encoding="utf-8"?>
 <p:sldLayout xmlns:p="http://schemas.openxmlformats.org/presentationml/2006/main" xmlns:a="http://schemas.openxmlformats.org/drawingml/2006/main">
   <p:cSld name="DEFAULT">
@@ -2799,7 +555,7 @@
   <p:cSld>
     <p:spTree>
       <p:nvGrpSpPr>
-        <p:cNvPr id="1" name="" descr="&lt;Slide style={{ width: '1280px', height: '720px', backgroundColor: '#FAFCFE', padding: 0, position: 'relative', overflow: 'hidden' }}&gt;&#13;&#10;    &lt;Box style={{ position: 'absolute', left: 0, top: 0, width: '1280px', height: '150px', background: '#1F5FA8' }} /&gt;&#13;&#10;    &lt;Box style={{ position: 'absolute', left: 64, top: 34, width: '1152px', flexDirection: 'column' }}&gt;&#13;&#10;        &lt;Text style={{ fontSize: 15, fontWeight: 'bold', color: '#BFD9F2', letterSpacing: 2 }}&gt;阶段 2 · 单元 13&lt;/Text&gt;&#13;&#10;        &lt;Text style={{ fontSize: 38, fontWeight: 'bold', color: '#FFFFFF', marginTop: 6 }}&gt;射击与外星舰队&lt;/Text&gt;&#13;&#10;    &lt;/Box&gt;&#13;&#10;    &lt;Box style={{ position: 'absolute', left: 64, top: 168, width: '1152px', height: 470 }}&gt;&#13;&#10;        &lt;svg width='1152' height='470' viewBox='0 0 1152 470'&gt;&#13;&#10;            &lt;text x='0' y='18' fontSize='15' fontWeight='bold' fill='#16232E' fontFamily='Microsoft YaHei'&gt;本单元共 5 节课&lt;/text&gt;&#13;&#10;            &lt;rect x='0' y='196' width='1152' height='38' rx='7' fill='#FFFFFF' /&gt;&lt;text x='16' y='221' fontSize='15' fontWeight='bold' fill='#1F5FA8' fontFamily='Microsoft YaHei'&gt;第 70 节&lt;/text&gt;&lt;text x='96' y='221' fontSize='15' fill='#16232E' fontFamily='Microsoft YaHei'&gt;编组 Group 与精灵 Sprite&lt;/text&gt;&lt;text x='1080' y='221' fontSize='13' fill='#5A6B7A' textAnchor='end' fontFamily='Microsoft YaHei'&gt;W15&lt;/text&gt;&lt;rect x='0' y='238' width='1152' height='38' rx='7' fill='#F2F7FD' /&gt;&lt;text x='16' y='263' fontSize='15' fontWeight='bold' fill='#1F5FA8' fontFamily='Microsoft YaHei'&gt;第 71 节&lt;/text&gt;&lt;text x='96' y='263' fontSize='15' fill='#16232E' fontFamily='Microsoft YaHei'&gt;射击：Bullet 类与开火&lt;/text&gt;&lt;text x='1080' y='263' fontSize='13' fill='#5A6B7A' textAnchor='end' fontFamily='Microsoft YaHei'&gt;W15&lt;/text&gt;&lt;rect x='0' y='280' width='1152' height='38' rx='7' fill='#FFFFFF' /&gt;&lt;text x='16' y='305' fontSize='15' fontWeight='bold' fill='#1F5FA8' fontFamily='Microsoft YaHei'&gt;第 72 节&lt;/text&gt;&lt;text x='96' y='305' fontSize='15' fill='#16232E' fontFamily='Microsoft YaHei'&gt;外星舰队与整体移动&lt;/text&gt;&lt;text x='1080' y='305' fontSize='13' fill='#5A6B7A' textAnchor='end' fontFamily='Microsoft YaHei'&gt;W15&lt;/text&gt;&lt;rect x='0' y='322' width='1152' height='38' rx='7' fill='#F2F7FD' /&gt;&lt;text x='16' y='347' fontSize='15' fontWeight='bold' fill='#1F5FA8' fontFamily='Microsoft YaHei'&gt;第 73 节&lt;/text&gt;&lt;text x='96' y='347' fontSize='15' fill='#16232E' fontFamily='Microsoft YaHei'&gt;碰撞检测与游戏结束&lt;/text&gt;&lt;text x='1080' y='347' fontSize='13' fill='#5A6B7A' textAnchor='end' fontFamily='Microsoft YaHei'&gt;W15&lt;/text&gt;&lt;rect x='0' y='364' width='1152' height='38' rx='7' fill='#FFFFFF' /&gt;&lt;text x='16' y='389' fontSize='15' fontWeight='bold' fill='#1F5FA8' fontFamily='Microsoft YaHei'&gt;第 74 节&lt;/text&gt;&lt;text x='96' y='389' fontSize='15' fill='#16232E' fontFamily='Microsoft YaHei'&gt;实战、答案与验收复盘&lt;/text&gt;&lt;text x='1080' y='389' fontSize='13' fill='#5A6B7A' textAnchor='end' fontFamily='Microsoft YaHei'&gt;W15&lt;/text&gt;&#13;&#10;        &lt;/svg&gt;&#13;&#10;    &lt;/Box&gt;&#13;&#10;    &lt;Box style={{ position: 'absolute', left: 64, bottom: 22, width: '1152px', flexDirection: 'row', justifyContent: 'space-between' }}&gt;&#13;&#10;        &lt;Text style={{ fontSize: 13, color: '#8A9AAA' }}&gt;Python 讲授课件 · 逐节版&lt;/Text&gt;&#13;&#10;        &lt;Text style={{ fontSize: 13, color: '#8A9AAA' }}&gt;单元 13 · 封面&lt;/Text&gt;&#13;&#10;    &lt;/Box&gt;&#13;&#10;&lt;/Slide&gt;&#13;&#10;"/>
+        <p:cNvPr id="1" name="" descr="&lt;Slide style={{ width: '1280px', height: '720px', backgroundColor: '#FAFCFE', padding: 0, position: 'relative', overflow: 'hidden' }}&gt;&#13;&#10;    &lt;Box style={{ position: 'absolute', left: 0, top: 0, width: '1280px', height: '150px', background: '#1F5FA8' }} /&gt;&#13;&#10;    &lt;Box style={{ position: 'absolute', left: 64, top: 34, width: '1152px', flexDirection: 'column' }}&gt;&#13;&#10;        &lt;Text style={{ fontSize: 15, fontWeight: 'bold', color: '#BFD9F2', letterSpacing: 2 }}&gt;阶段 2 · 单元 13&lt;/Text&gt;&#13;&#10;        &lt;Text style={{ fontSize: 38, fontWeight: 'bold', color: '#FFFFFF', marginTop: 6 }}&gt;射击与外星舰队&lt;/Text&gt;&#13;&#10;    &lt;/Box&gt;&#13;&#10;    &lt;Box style={{ position: 'absolute', left: 64, top: 168, width: '1152px', height: 470 }}&gt;&#13;&#10;        &lt;svg width='1152' height='470' viewBox='0 0 1152 470'&gt;&#13;&#10;            &lt;text x='0' y='18' fontSize='15' fontWeight='bold' fill='#16232E' fontFamily='Microsoft YaHei'&gt;本单元共 5 节课&lt;/text&gt;&#13;&#10;            &lt;rect x='0' y='56.0' width='1152' height='48.0' rx='7' fill='#FFFFFF' /&gt;&lt;text x='16' y='85.0' fontSize='15' fontWeight='bold' fill='#1F5FA8' fontFamily='Microsoft YaHei'&gt;第 70 节&lt;/text&gt;&lt;text x='96' y='85.0' fontSize='15' fill='#16232E' fontFamily='Microsoft YaHei'&gt;编组 Group 与精灵 Sprite&lt;/text&gt;&lt;text x='1080' y='85.0' fontSize='13' fill='#5A6B7A' textAnchor='end' fontFamily='Microsoft YaHei'&gt;W15&lt;/text&gt;&lt;rect x='0' y='135.2' width='1152' height='48.0' rx='7' fill='#F2F7FD' /&gt;&lt;text x='16' y='164.2' fontSize='15' fontWeight='bold' fill='#1F5FA8' fontFamily='Microsoft YaHei'&gt;第 71 节&lt;/text&gt;&lt;text x='96' y='164.2' fontSize='15' fill='#16232E' fontFamily='Microsoft YaHei'&gt;射击：Bullet 类与开火&lt;/text&gt;&lt;text x='1080' y='164.2' fontSize='13' fill='#5A6B7A' textAnchor='end' fontFamily='Microsoft YaHei'&gt;W15&lt;/text&gt;&lt;rect x='0' y='214.4' width='1152' height='48.0' rx='7' fill='#FFFFFF' /&gt;&lt;text x='16' y='243.4' fontSize='15' fontWeight='bold' fill='#1F5FA8' fontFamily='Microsoft YaHei'&gt;第 72 节&lt;/text&gt;&lt;text x='96' y='243.4' fontSize='15' fill='#16232E' fontFamily='Microsoft YaHei'&gt;外星舰队与整体移动&lt;/text&gt;&lt;text x='1080' y='243.4' fontSize='13' fill='#5A6B7A' textAnchor='end' fontFamily='Microsoft YaHei'&gt;W15&lt;/text&gt;&lt;rect x='0' y='293.6' width='1152' height='48.0' rx='7' fill='#F2F7FD' /&gt;&lt;text x='16' y='322.6' fontSize='15' fontWeight='bold' fill='#1F5FA8' fontFamily='Microsoft YaHei'&gt;第 73 节&lt;/text&gt;&lt;text x='96' y='322.6' fontSize='15' fill='#16232E' fontFamily='Microsoft YaHei'&gt;碰撞检测与游戏结束&lt;/text&gt;&lt;text x='1080' y='322.6' fontSize='13' fill='#5A6B7A' textAnchor='end' fontFamily='Microsoft YaHei'&gt;W15&lt;/text&gt;&lt;rect x='0' y='372.8' width='1152' height='48.0' rx='7' fill='#FFFFFF' /&gt;&lt;text x='16' y='401.8' fontSize='15' fontWeight='bold' fill='#1F5FA8' fontFamily='Microsoft YaHei'&gt;第 74 节&lt;/text&gt;&lt;text x='96' y='401.8' fontSize='15' fill='#16232E' fontFamily='Microsoft YaHei'&gt;实战、答案与验收复盘&lt;/text&gt;&lt;text x='1080' y='401.8' fontSize='13' fill='#5A6B7A' textAnchor='end' fontFamily='Microsoft YaHei'&gt;W15&lt;/text&gt;&#13;&#10;        &lt;/svg&gt;&#13;&#10;    &lt;/Box&gt;&#13;&#10;    &lt;Box style={{ position: 'absolute', left: 64, bottom: 22, width: '1152px', flexDirection: 'row', justifyContent: 'space-between' }}&gt;&#13;&#10;        &lt;Text style={{ fontSize: 13, color: '#8A9AAA' }}&gt;Python 讲授课件 · 逐节版&lt;/Text&gt;&#13;&#10;        &lt;Text style={{ fontSize: 13, color: '#8A9AAA' }}&gt;单元 13 · 封面&lt;/Text&gt;&#13;&#10;    &lt;/Box&gt;&#13;&#10;&lt;/Slide&gt;&#13;&#10;"/>
         <p:cNvGrpSpPr/>
         <p:nvPr/>
       </p:nvGrpSpPr>
@@ -3313,7 +1069,7 @@
   <p:cSld>
     <p:spTree>
       <p:nvGrpSpPr>
-        <p:cNvPr id="15" name="" descr="&lt;Slide style={{ width: '1280px', height: '720px', backgroundColor: '#FAFCFE', padding: 0, position: 'relative', overflow: 'hidden' }}&gt;&#13;&#10;    &lt;Box style={{ position: 'absolute', left: 64, top: 36, width: '1152px', flexDirection: 'row', alignItems: 'center', gap: 12 }}&gt;&#13;&#10;        &lt;Box style={{ background: '#0E9B78', borderRadius: 5, padding: '3px 11px' }}&gt;&#13;&#10;            &lt;Text style={{ fontSize: 14, fontWeight: 'bold', color: '#FFFFFF' }}&gt;第 74 节&lt;/Text&gt;&#13;&#10;        &lt;/Box&gt;&#13;&#10;        &lt;Text style={{ fontSize: 30, fontWeight: 'bold', color: '#16232E' }}&gt;核心知识点&lt;/Text&gt;&#13;&#10;        &lt;Text style={{ fontSize: 15, color: '#5A6B7A', marginTop: 10 }}&gt;· 实战、答案与验收复盘&lt;/Text&gt;&#13;&#10;    &lt;/Box&gt;&#13;&#10;    &lt;Box style={{ position: 'absolute', left: 0, top: 0, width: '1280px', height: '720px' }}&gt;&#13;&#10;        &lt;svg width='1280' height='720' viewBox='0 0 1280 720'&gt;&#13;&#10;            &lt;rect x='64' y='96' width='368' height='330' rx='12' fill='#FFFFFF' stroke='#D8E3EE' /&gt;&lt;rect x='64' y='96' width='368' height='4' rx='2' fill='#1F5FA8' /&gt;&lt;text x='82' y='130' fontSize='15.5' fontWeight='bold' fill='#1F5FA8' textAnchor='start' fontFamily='Microsoft YaHei'&gt;基础档&lt;/text&gt;&lt;text x='82' y='169.0' fontSize='13' fill='#3A4A58' textAnchor='start' fontFamily='Microsoft YaHei'&gt;· 练习 13-1【编组基本功】&lt;/text&gt;&lt;text x='82' y='197.5' fontSize='13' fill='#3A4A58' textAnchor='start' fontFamily='Microsoft YaHei'&gt;· 练习 13-2【复现并修复「漏删」bug】&lt;/text&gt;&lt;text x='82' y='226.0' fontSize='13' fill='#3A4A58' textAnchor='start' fontFamily='Microsoft YaHei'&gt;· 练习 13-3【边缘检测】&lt;/text&gt;&lt;rect x='468' y='96' width='368' height='330' rx='12' fill='#FFFFFF' stroke='#D8E3EE' /&gt;&lt;rect x='468' y='96' width='368' height='4' rx='2' fill='#1F5FA8' /&gt;&lt;text x='486' y='130' fontSize='15.5' fontWeight='bold' fill='#1F5FA8' textAnchor='start' fontFamily='Microsoft YaHei'&gt;进阶档&lt;/text&gt;&lt;text x='486' y='169.0' fontSize='13' fill='#3A4A58' textAnchor='start' fontFamily='Microsoft YaHei'&gt;· 练习 13-4【舰队密度可调】&lt;/text&gt;&lt;text x='486' y='197.5' fontSize='13' fill='#3A4A58' textAnchor='start' fontFamily='Microsoft YaHei'&gt;· 练习 13-5【三条命的完整流程】&lt;/text&gt;&lt;text x='486' y='226.0' fontSize='13' fill='#3A4A58' textAnchor='start' fontFamily='Microsoft YaHei'&gt;· 练习 13-6【子弹越打越快，结束时有简报】&lt;/text&gt;&lt;rect x='872' y='96' width='368' height='330' rx='12' fill='#FFFFFF' stroke='#D8E3EE' /&gt;&lt;rect x='872' y='96' width='368' height='4' rx='2' fill='#1F5FA8' /&gt;&lt;text x='890' y='130' fontSize='15.5' fontWeight='bold' fill='#1F5FA8' textAnchor='start' fontFamily='Microsoft YaHei'&gt;参考答案 13-1&lt;/text&gt;&lt;text x='890' y='169.0' fontSize='13' fill='#3A4A58' textAnchor='start' fontFamily='Microsoft YaHei'&gt;· import os&lt;/text&gt;&lt;rect x='64' y='574' width='1152' height='66' rx='12' fill='#EEF5FB' /&gt;&lt;text x='84' y='616' fontSize='14' fill='#243444' textAnchor='start' fontFamily='Microsoft YaHei'&gt;看不懂的地方先回讲义对应小节读一遍，再回来对着这页复述一次——能讲出来才算真懂。&lt;/text&gt;&#13;&#10;            &lt;text x='64' y='684' fontSize='13' fill='#8A9AAA' fontFamily='Microsoft YaHei'&gt;Python 讲授课件 · 逐节版&lt;/text&gt;&#13;&#10;            &lt;text x='1216' y='684' fontSize='13' fill='#8A9AAA' textAnchor='end' fontFamily='Microsoft YaHei'&gt;单元 13 · 第 74 节&lt;/text&gt;&#13;&#10;        &lt;/svg&gt;&#13;&#10;    &lt;/Box&gt;&#13;&#10;&lt;/Slide&gt;&#13;&#10;"/>
+        <p:cNvPr id="15" name="" descr="&lt;Slide style={{ width: '1280px', height: '720px', backgroundColor: '#FAFCFE', padding: 0, position: 'relative', overflow: 'hidden' }}&gt;&#13;&#10;    &lt;Box style={{ position: 'absolute', left: 64, top: 36, width: '1152px', flexDirection: 'row', alignItems: 'center', gap: 12 }}&gt;&#13;&#10;        &lt;Box style={{ background: '#0E9B78', borderRadius: 5, padding: '3px 11px' }}&gt;&#13;&#10;            &lt;Text style={{ fontSize: 14, fontWeight: 'bold', color: '#FFFFFF' }}&gt;第 74 节&lt;/Text&gt;&#13;&#10;        &lt;/Box&gt;&#13;&#10;        &lt;Text style={{ fontSize: 30, fontWeight: 'bold', color: '#16232E' }}&gt;核心知识点&lt;/Text&gt;&#13;&#10;        &lt;Text style={{ fontSize: 15, color: '#5A6B7A', marginTop: 10 }}&gt;· 实战、答案与验收复盘&lt;/Text&gt;&#13;&#10;    &lt;/Box&gt;&#13;&#10;    &lt;Box style={{ position: 'absolute', left: 0, top: 0, width: '1280px', height: '720px' }}&gt;&#13;&#10;        &lt;svg width='1280' height='720' viewBox='0 0 1280 720'&gt;&#13;&#10;            &lt;rect x='64' y='96' width='368' height='330' rx='12' fill='#FFFFFF' stroke='#D8E3EE' /&gt;&lt;rect x='64' y='96' width='368' height='4' rx='2' fill='#1F5FA8' /&gt;&lt;text x='82' y='130' fontSize='15.5' fontWeight='bold' fill='#1F5FA8' textAnchor='start' fontFamily='Microsoft YaHei'&gt;基础档&lt;/text&gt;&lt;text x='82' y='169.0' fontSize='13' fill='#3A4A58' textAnchor='start' fontFamily='Microsoft YaHei'&gt;· 练习 13-1【编组基本功】&lt;/text&gt;&lt;text x='82' y='197.5' fontSize='13' fill='#3A4A58' textAnchor='start' fontFamily='Microsoft YaHei'&gt;· 练习 13-2【复现并修复「漏删」bug】&lt;/text&gt;&lt;text x='82' y='226.0' fontSize='13' fill='#3A4A58' textAnchor='start' fontFamily='Microsoft YaHei'&gt;· 练习 13-3【边缘检测】&lt;/text&gt;&lt;rect x='468' y='96' width='368' height='330' rx='12' fill='#FFFFFF' stroke='#D8E3EE' /&gt;&lt;rect x='468' y='96' width='368' height='4' rx='2' fill='#1F5FA8' /&gt;&lt;text x='486' y='130' fontSize='15.5' fontWeight='bold' fill='#1F5FA8' textAnchor='start' fontFamily='Microsoft YaHei'&gt;进阶档&lt;/text&gt;&lt;text x='486' y='169.0' fontSize='13' fill='#3A4A58' textAnchor='start' fontFamily='Microsoft YaHei'&gt;· 练习 13-4【舰队密度可调】&lt;/text&gt;&lt;text x='486' y='197.5' fontSize='13' fill='#3A4A58' textAnchor='start' fontFamily='Microsoft YaHei'&gt;· 练习 13-5【三条命的完整流程】&lt;/text&gt;&lt;text x='486' y='226.0' fontSize='13' fill='#3A4A58' textAnchor='start' fontFamily='Microsoft YaHei'&gt;· 练习 13-6【子弹越打越快，结束时有简报】&lt;/text&gt;&lt;rect x='872' y='96' width='368' height='330' rx='12' fill='#FFFFFF' stroke='#D8E3EE' /&gt;&lt;rect x='872' y='96' width='368' height='4' rx='2' fill='#1F5FA8' /&gt;&lt;text x='890' y='130' fontSize='15.5' fontWeight='bold' fill='#1F5FA8' textAnchor='start' fontFamily='Microsoft YaHei'&gt;参考答案 13-3&lt;/text&gt;&lt;text x='890' y='169.0' fontSize='13' fill='#3A4A58' textAnchor='start' fontFamily='Microsoft YaHei'&gt;· 1. 判断题&lt;/text&gt;&lt;text x='890' y='197.5' fontSize='13' fill='#3A4A58' textAnchor='start' fontFamily='Microsoft YaHei'&gt;· 2. 简答题&lt;/text&gt;&lt;text x='890' y='226.0' fontSize='13' fill='#3A4A58' textAnchor='start' fontFamily='Microsoft YaHei'&gt;· 3. 简答题&lt;/text&gt;&lt;rect x='64' y='574' width='1152' height='66' rx='12' fill='#EEF5FB' /&gt;&lt;text x='84' y='616' fontSize='14' fill='#243444' textAnchor='start' fontFamily='Microsoft YaHei'&gt;看不懂的地方先回讲义对应小节读一遍，再回来对着这页复述一次——能讲出来才算真懂。&lt;/text&gt;&#13;&#10;            &lt;text x='64' y='684' fontSize='13' fill='#8A9AAA' fontFamily='Microsoft YaHei'&gt;Python 讲授课件 · 逐节版&lt;/text&gt;&#13;&#10;            &lt;text x='1216' y='684' fontSize='13' fill='#8A9AAA' textAnchor='end' fontFamily='Microsoft YaHei'&gt;单元 13 · 第 74 节&lt;/text&gt;&#13;&#10;        &lt;/svg&gt;&#13;&#10;    &lt;/Box&gt;&#13;&#10;&lt;/Slide&gt;&#13;&#10;"/>
         <p:cNvGrpSpPr/>
         <p:nvPr/>
       </p:nvGrpSpPr>
@@ -4364,7 +2120,7 @@
   <p:cSld>
     <p:spTree>
       <p:nvGrpSpPr>
-        <p:cNvPr id="42" name="" descr="&lt;Slide style={{ width: '1280px', height: '720px', backgroundColor: '#FAFCFE', padding: 0, position: 'relative', overflow: 'hidden' }}&gt;&#13;&#10;    &lt;Box style={{ position: 'absolute', left: 64, top: 36, width: '1152px', flexDirection: 'row', alignItems: 'center', gap: 12 }}&gt;&#13;&#10;        &lt;Box style={{ background: '#0E9B78', borderRadius: 5, padding: '3px 11px' }}&gt;&#13;&#10;            &lt;Text style={{ fontSize: 14, fontWeight: 'bold', color: '#FFFFFF' }}&gt;第 70 节&lt;/Text&gt;&#13;&#10;        &lt;/Box&gt;&#13;&#10;        &lt;Text style={{ fontSize: 30, fontWeight: 'bold', color: '#16232E' }}&gt;核心知识点&lt;/Text&gt;&#13;&#10;        &lt;Text style={{ fontSize: 15, color: '#5A6B7A', marginTop: 10 }}&gt;· 编组 Group 与精灵 Sprite&lt;/Text&gt;&#13;&#10;    &lt;/Box&gt;&#13;&#10;    &lt;Box style={{ position: 'absolute', left: 0, top: 0, width: '1280px', height: '720px' }}&gt;&#13;&#10;        &lt;svg width='1280' height='720' viewBox='0 0 1280 720'&gt;&#13;&#10;            &lt;rect x='64' y='96' width='548' height='330' rx='12' fill='#FFFFFF' stroke='#D8E3EE' /&gt;&lt;rect x='64' y='96' width='548' height='4' rx='2' fill='#1F5FA8' /&gt;&lt;text x='82' y='130' fontSize='15.5' fontWeight='bold' fill='#1F5FA8' textAnchor='start' fontFamily='Microsoft YaHei'&gt;2.1 项目回顾：现在的代码里有什么（13.1）&lt;/text&gt;&lt;text x='82' y='169.0' fontSize='13' fill='#3A4A58' textAnchor='start' fontFamily='Microsoft YaHei'&gt;· 单元 12 结束时，项目是三个文件：alien_invasion.py（主循环）、settings.p…&lt;/text&gt;&lt;rect x='668' y='96' width='548' height='330' rx='12' fill='#FFFFFF' stroke='#D8E3EE' /&gt;&lt;rect x='668' y='96' width='548' height='4' rx='2' fill='#1F5FA8' /&gt;&lt;text x='686' y='130' fontSize='15.5' fontWeight='bold' fill='#1F5FA8' textAnchor='start' fontFamily='Microsoft YaHei'&gt;2.2 编组 Group 与精灵 Sprite：为什么不用…&lt;/text&gt;&lt;text x='686' y='169.0' fontSize='13' fill='#3A4A58' textAnchor='start' fontFamily='Microsoft YaHei'&gt;· image：长相（一张表面，决定绘制时画什么）；&lt;/text&gt;&lt;text x='686' y='197.5' fontSize='13' fill='#3A4A58' textAnchor='start' fontFamily='Microsoft YaHei'&gt;· rect：站位（矩形，决定画在哪、碰撞时怎么比）。&lt;/text&gt;&lt;rect x='64' y='574' width='1152' height='66' rx='12' fill='#EEF5FB' /&gt;&lt;text x='84' y='616' fontSize='14' fill='#243444' textAnchor='start' fontFamily='Microsoft YaHei'&gt;看不懂的地方先回讲义对应小节读一遍，再回来对着这页复述一次——能讲出来才算真懂。&lt;/text&gt;&#13;&#10;            &lt;text x='64' y='684' fontSize='13' fill='#8A9AAA' fontFamily='Microsoft YaHei'&gt;Python 讲授课件 · 逐节版&lt;/text&gt;&#13;&#10;            &lt;text x='1216' y='684' fontSize='13' fill='#8A9AAA' textAnchor='end' fontFamily='Microsoft YaHei'&gt;单元 13 · 第 70 节&lt;/text&gt;&#13;&#10;        &lt;/svg&gt;&#13;&#10;    &lt;/Box&gt;&#13;&#10;&lt;/Slide&gt;&#13;&#10;"/>
+        <p:cNvPr id="42" name="" descr="&lt;Slide style={{ width: '1280px', height: '720px', backgroundColor: '#FAFCFE', padding: 0, position: 'relative', overflow: 'hidden' }}&gt;&#13;&#10;    &lt;Box style={{ position: 'absolute', left: 64, top: 36, width: '1152px', flexDirection: 'row', alignItems: 'center', gap: 12 }}&gt;&#13;&#10;        &lt;Box style={{ background: '#0E9B78', borderRadius: 5, padding: '3px 11px' }}&gt;&#13;&#10;            &lt;Text style={{ fontSize: 14, fontWeight: 'bold', color: '#FFFFFF' }}&gt;第 70 节&lt;/Text&gt;&#13;&#10;        &lt;/Box&gt;&#13;&#10;        &lt;Text style={{ fontSize: 30, fontWeight: 'bold', color: '#16232E' }}&gt;核心知识点&lt;/Text&gt;&#13;&#10;        &lt;Text style={{ fontSize: 15, color: '#5A6B7A', marginTop: 10 }}&gt;· 编组 Group 与精灵 Sprite&lt;/Text&gt;&#13;&#10;    &lt;/Box&gt;&#13;&#10;    &lt;Box style={{ position: 'absolute', left: 0, top: 0, width: '1280px', height: '720px' }}&gt;&#13;&#10;        &lt;svg width='1280' height='720' viewBox='0 0 1280 720'&gt;&#13;&#10;            &lt;rect x='64' y='96' width='548' height='330' rx='12' fill='#FFFFFF' stroke='#D8E3EE' /&gt;&lt;rect x='64' y='96' width='548' height='4' rx='2' fill='#1F5FA8' /&gt;&lt;text x='82' y='130' fontSize='15.5' fontWeight='bold' fill='#1F5FA8' textAnchor='start' fontFamily='Microsoft YaHei'&gt;2.1 项目回顾：现在的代码里有什么（13.1）&lt;/text&gt;&lt;text x='82' y='169.0' fontSize='13' fill='#3A4A58' textAnchor='start' fontFamily='Microsoft YaHei'&gt;· 除了 Settings 和 GameStats，每个可见的东西都是一个类。&lt;/text&gt;&lt;rect x='668' y='96' width='548' height='330' rx='12' fill='#FFFFFF' stroke='#D8E3EE' /&gt;&lt;rect x='668' y='96' width='548' height='4' rx='2' fill='#1F5FA8' /&gt;&lt;text x='686' y='130' fontSize='15.5' fontWeight='bold' fill='#1F5FA8' textAnchor='start' fontFamily='Microsoft YaHei'&gt;2.2 编组 Group 与精灵 Sprite…&lt;/text&gt;&lt;text x='686' y='169.0' fontSize='13' fill='#3A4A58' textAnchor='start' fontFamily='Microsoft YaHei'&gt;· image：长相（一张表面，决定绘制时画什么）；&lt;/text&gt;&lt;text x='686' y='197.5' fontSize='13' fill='#3A4A58' textAnchor='start' fontFamily='Microsoft YaHei'&gt;· rect：站位（矩形，决定画在哪、碰撞时怎么比）。&lt;/text&gt;&lt;rect x='64' y='574' width='1152' height='66' rx='12' fill='#EEF5FB' /&gt;&lt;text x='84' y='616' fontSize='14' fill='#243444' textAnchor='start' fontFamily='Microsoft YaHei'&gt;看不懂的地方先回讲义对应小节读一遍，再回来对着这页复述一次——能讲出来才算真懂。&lt;/text&gt;&#13;&#10;            &lt;text x='64' y='684' fontSize='13' fill='#8A9AAA' fontFamily='Microsoft YaHei'&gt;Python 讲授课件 · 逐节版&lt;/text&gt;&#13;&#10;            &lt;text x='1216' y='684' fontSize='13' fill='#8A9AAA' textAnchor='end' fontFamily='Microsoft YaHei'&gt;单元 13 · 第 70 节&lt;/text&gt;&#13;&#10;        &lt;/svg&gt;&#13;&#10;    &lt;/Box&gt;&#13;&#10;&lt;/Slide&gt;&#13;&#10;"/>
         <p:cNvGrpSpPr/>
         <p:nvPr/>
       </p:nvGrpSpPr>
@@ -4845,7 +2601,7 @@
   <p:cSld>
     <p:spTree>
       <p:nvGrpSpPr>
-        <p:cNvPr id="55" name="" descr="&lt;Slide style={{ width: '1280px', height: '720px', backgroundColor: '#FAFCFE', padding: 0, position: 'relative', overflow: 'hidden' }}&gt;&#13;&#10;    &lt;Box style={{ position: 'absolute', left: 64, top: 36, width: '1152px', flexDirection: 'row', alignItems: 'center', gap: 12 }}&gt;&#13;&#10;        &lt;Box style={{ background: '#0E9B78', borderRadius: 5, padding: '3px 11px' }}&gt;&#13;&#10;            &lt;Text style={{ fontSize: 14, fontWeight: 'bold', color: '#FFFFFF' }}&gt;第 71 节&lt;/Text&gt;&#13;&#10;        &lt;/Box&gt;&#13;&#10;        &lt;Text style={{ fontSize: 30, fontWeight: 'bold', color: '#16232E' }}&gt;核心知识点&lt;/Text&gt;&#13;&#10;        &lt;Text style={{ fontSize: 15, color: '#5A6B7A', marginTop: 10 }}&gt;· 射击：Bullet 类与开火&lt;/Text&gt;&#13;&#10;    &lt;/Box&gt;&#13;&#10;    &lt;Box style={{ position: 'absolute', left: 0, top: 0, width: '1280px', height: '720px' }}&gt;&#13;&#10;        &lt;svg width='1280' height='720' viewBox='0 0 1280 720'&gt;&#13;&#10;            &lt;rect x='64' y='96' width='548' height='330' rx='12' fill='#FFFFFF' stroke='#D8E3EE' /&gt;&lt;rect x='64' y='96' width='548' height='4' rx='2' fill='#1F5FA8' /&gt;&lt;text x='82' y='130' fontSize='15.5' fontWeight='bold' fill='#1F5FA8' textAnchor='start' fontFamily='Microsoft YaHei'&gt;2.3 射击：Bullet 类与开火（12.8）&lt;/text&gt;&lt;text x='82' y='169.0' fontSize='13' fill='#3A4A58' textAnchor='start' fontFamily='Microsoft YaHei'&gt;· （1）子弹长什么样。 教材没有给子弹找图片，而是用 pygame.Rect 画一个细长条，&lt;/text&gt;&lt;text x='82' y='188.5' fontSize='13' fill='#3A4A58' textAnchor='start' fontFamily='Microsoft YaHei'&gt;再用 pyg…&lt;/text&gt;&lt;text x='82' y='217.0' fontSize='13' fill='#3A4A58' textAnchor='start' fontFamily='Microsoft YaHei'&gt;· （2）存到编组里。 在主文件的 __init__ 里建一个空编组 self.bullets = Gro…&lt;/text&gt;&lt;text x='82' y='245.5' fontSize='13' fill='#3A4A58' textAnchor='start' fontFamily='Microsoft YaHei'&gt;· （3）删除已消失的子弹。 子弹飞出屏幕顶部后要删掉，否则编组越涨越大，最终拖慢&lt;/text&gt;&lt;text x='82' y='265.0' fontSize='13' fill='#3A4A58' textAnchor='start' fontFamily='Microsoft YaHei'&gt;游戏。判断条件是 bul…&lt;/text&gt;&lt;rect x='668' y='96' width='548' height='330' rx='12' fill='#FFFFFF' stroke='#D8E3EE' /&gt;&lt;rect x='668' y='96' width='548' height='4' rx='2' fill='#1F5FA8' /&gt;&lt;text x='686' y='130' fontSize='15.5' fontWeight='bold' fill='#1F5FA8' textAnchor='start' fontFamily='Microsoft YaHei'&gt;2.4 创建第一个外星人（13.2）&lt;/text&gt;&lt;text x='686' y='169.0' fontSize='13' fill='#3A4A58' textAnchor='start' fontFamily='Microsoft YaHei'&gt;· Alien 和 Ship 结构几乎一样，都是「加载图片 → 拿 rect → 放位置」：&lt;/text&gt;&lt;rect x='64' y='574' width='1152' height='66' rx='12' fill='#EEF5FB' /&gt;&lt;text x='84' y='616' fontSize='14' fill='#243444' textAnchor='start' fontFamily='Microsoft YaHei'&gt;看不懂的地方先回讲义对应小节读一遍，再回来对着这页复述一次——能讲出来才算真懂。&lt;/text&gt;&#13;&#10;            &lt;text x='64' y='684' fontSize='13' fill='#8A9AAA' fontFamily='Microsoft YaHei'&gt;Python 讲授课件 · 逐节版&lt;/text&gt;&#13;&#10;            &lt;text x='1216' y='684' fontSize='13' fill='#8A9AAA' textAnchor='end' fontFamily='Microsoft YaHei'&gt;单元 13 · 第 71 节&lt;/text&gt;&#13;&#10;        &lt;/svg&gt;&#13;&#10;    &lt;/Box&gt;&#13;&#10;&lt;/Slide&gt;&#13;&#10;"/>
+        <p:cNvPr id="55" name="" descr="&lt;Slide style={{ width: '1280px', height: '720px', backgroundColor: '#FAFCFE', padding: 0, position: 'relative', overflow: 'hidden' }}&gt;&#13;&#10;    &lt;Box style={{ position: 'absolute', left: 64, top: 36, width: '1152px', flexDirection: 'row', alignItems: 'center', gap: 12 }}&gt;&#13;&#10;        &lt;Box style={{ background: '#0E9B78', borderRadius: 5, padding: '3px 11px' }}&gt;&#13;&#10;            &lt;Text style={{ fontSize: 14, fontWeight: 'bold', color: '#FFFFFF' }}&gt;第 71 节&lt;/Text&gt;&#13;&#10;        &lt;/Box&gt;&#13;&#10;        &lt;Text style={{ fontSize: 30, fontWeight: 'bold', color: '#16232E' }}&gt;核心知识点&lt;/Text&gt;&#13;&#10;        &lt;Text style={{ fontSize: 15, color: '#5A6B7A', marginTop: 10 }}&gt;· 射击：Bullet 类与开火&lt;/Text&gt;&#13;&#10;    &lt;/Box&gt;&#13;&#10;    &lt;Box style={{ position: 'absolute', left: 0, top: 0, width: '1280px', height: '720px' }}&gt;&#13;&#10;        &lt;svg width='1280' height='720' viewBox='0 0 1280 720'&gt;&#13;&#10;            &lt;rect x='64' y='96' width='548' height='330' rx='12' fill='#FFFFFF' stroke='#D8E3EE' /&gt;&lt;rect x='64' y='96' width='548' height='4' rx='2' fill='#1F5FA8' /&gt;&lt;text x='82' y='130' fontSize='15.5' fontWeight='bold' fill='#1F5FA8' textAnchor='start' fontFamily='Microsoft YaHei'&gt;2.3 射击：Bullet 类与开火（12.8）&lt;/text&gt;&lt;text x='82' y='169.0' fontSize='13' fill='#3A4A58' textAnchor='start' fontFamily='Microsoft YaHei'&gt;· （1）子弹长什么样。&lt;/text&gt;&lt;text x='82' y='197.5' fontSize='13' fill='#3A4A58' textAnchor='start' fontFamily='Microsoft YaHei'&gt;· （2）存到编组里。&lt;/text&gt;&lt;text x='82' y='226.0' fontSize='13' fill='#3A4A58' textAnchor='start' fontFamily='Microsoft YaHei'&gt;· （3）删除已消失的子弹。&lt;/text&gt;&lt;rect x='668' y='96' width='548' height='330' rx='12' fill='#FFFFFF' stroke='#D8E3EE' /&gt;&lt;rect x='668' y='96' width='548' height='4' rx='2' fill='#1F5FA8' /&gt;&lt;text x='686' y='130' fontSize='15.5' fontWeight='bold' fill='#1F5FA8' textAnchor='start' fontFamily='Microsoft YaHei'&gt;2.4 创建第一个外星人（13.2）&lt;/text&gt;&lt;text x='686' y='169.0' fontSize='13' fill='#3A4A58' textAnchor='start' fontFamily='Microsoft YaHei'&gt;· 起始坐标用 self.rect.width 而不是 0，是故意留出一个外星人的宽度当边距…&lt;/text&gt;&lt;rect x='64' y='574' width='1152' height='66' rx='12' fill='#EEF5FB' /&gt;&lt;text x='84' y='616' fontSize='14' fill='#243444' textAnchor='start' fontFamily='Microsoft YaHei'&gt;看不懂的地方先回讲义对应小节读一遍，再回来对着这页复述一次——能讲出来才算真懂。&lt;/text&gt;&#13;&#10;            &lt;text x='64' y='684' fontSize='13' fill='#8A9AAA' fontFamily='Microsoft YaHei'&gt;Python 讲授课件 · 逐节版&lt;/text&gt;&#13;&#10;            &lt;text x='1216' y='684' fontSize='13' fill='#8A9AAA' textAnchor='end' fontFamily='Microsoft YaHei'&gt;单元 13 · 第 71 节&lt;/text&gt;&#13;&#10;        &lt;/svg&gt;&#13;&#10;    &lt;/Box&gt;&#13;&#10;&lt;/Slide&gt;&#13;&#10;"/>
         <p:cNvGrpSpPr/>
         <p:nvPr/>
       </p:nvGrpSpPr>
@@ -5296,7 +3052,7 @@
   <p:cSld>
     <p:spTree>
       <p:nvGrpSpPr>
-        <p:cNvPr id="68" name="" descr="&lt;Slide style={{ width: '1280px', height: '720px', backgroundColor: '#FAFCFE', padding: 0, position: 'relative', overflow: 'hidden' }}&gt;&#13;&#10;    &lt;Box style={{ position: 'absolute', left: 64, top: 36, width: '1152px', flexDirection: 'row', alignItems: 'center', gap: 12 }}&gt;&#13;&#10;        &lt;Box style={{ background: '#0E9B78', borderRadius: 5, padding: '3px 11px' }}&gt;&#13;&#10;            &lt;Text style={{ fontSize: 14, fontWeight: 'bold', color: '#FFFFFF' }}&gt;第 72 节&lt;/Text&gt;&#13;&#10;        &lt;/Box&gt;&#13;&#10;        &lt;Text style={{ fontSize: 30, fontWeight: 'bold', color: '#16232E' }}&gt;核心知识点&lt;/Text&gt;&#13;&#10;        &lt;Text style={{ fontSize: 15, color: '#5A6B7A', marginTop: 10 }}&gt;· 外星舰队与整体移动&lt;/Text&gt;&#13;&#10;    &lt;/Box&gt;&#13;&#10;    &lt;Box style={{ position: 'absolute', left: 0, top: 0, width: '1280px', height: '720px' }}&gt;&#13;&#10;        &lt;svg width='1280' height='720' viewBox='0 0 1280 720'&gt;&#13;&#10;            &lt;rect x='64' y='96' width='548' height='330' rx='12' fill='#FFFFFF' stroke='#D8E3EE' /&gt;&lt;rect x='64' y='96' width='548' height='4' rx='2' fill='#1F5FA8' /&gt;&lt;text x='82' y='130' fontSize='15.5' fontWeight='bold' fill='#1F5FA8' textAnchor='start' fontFamily='Microsoft YaHei'&gt;2.5 创建外星舰队（13.3）&lt;/text&gt;&lt;text x='82' y='169.0' fontSize='13' fill='#3A4A58' textAnchor='start' fontFamily='Microsoft YaHei'&gt;· (3 alien_height) - ship_height)&lt;/text&gt;&lt;rect x='668' y='96' width='548' height='330' rx='12' fill='#FFFFFF' stroke='#D8E3EE' /&gt;&lt;rect x='668' y='96' width='548' height='4' rx='2' fill='#1F5FA8' /&gt;&lt;text x='686' y='130' fontSize='15.5' fontWeight='bold' fill='#1F5FA8' textAnchor='start' fontFamily='Microsoft YaHei'&gt;2.6 让外星舰队移动（13.4）&lt;/text&gt;&lt;text x='686' y='169.0' fontSize='13' fill='#3A4A58' textAnchor='start' fontFamily='Microsoft YaHei'&gt;· 舰队移动的规则听起来简单，实现时有一个关键设计：方向不存每个外星人身上，而是全&lt;/text&gt;&lt;text x='686' y='188.5' fontSize='13' fill='#3A4A58' textAnchor='start' fontFamily='Microsoft YaHei'&gt;队共用的一个标志位 fl…&lt;/text&gt;&lt;rect x='64' y='574' width='1152' height='66' rx='12' fill='#EEF5FB' /&gt;&lt;text x='84' y='616' fontSize='14' fill='#243444' textAnchor='start' fontFamily='Microsoft YaHei'&gt;看不懂的地方先回讲义对应小节读一遍，再回来对着这页复述一次——能讲出来才算真懂。&lt;/text&gt;&#13;&#10;            &lt;text x='64' y='684' fontSize='13' fill='#8A9AAA' fontFamily='Microsoft YaHei'&gt;Python 讲授课件 · 逐节版&lt;/text&gt;&#13;&#10;            &lt;text x='1216' y='684' fontSize='13' fill='#8A9AAA' textAnchor='end' fontFamily='Microsoft YaHei'&gt;单元 13 · 第 72 节&lt;/text&gt;&#13;&#10;        &lt;/svg&gt;&#13;&#10;    &lt;/Box&gt;&#13;&#10;&lt;/Slide&gt;&#13;&#10;"/>
+        <p:cNvPr id="68" name="" descr="&lt;Slide style={{ width: '1280px', height: '720px', backgroundColor: '#FAFCFE', padding: 0, position: 'relative', overflow: 'hidden' }}&gt;&#13;&#10;    &lt;Box style={{ position: 'absolute', left: 64, top: 36, width: '1152px', flexDirection: 'row', alignItems: 'center', gap: 12 }}&gt;&#13;&#10;        &lt;Box style={{ background: '#0E9B78', borderRadius: 5, padding: '3px 11px' }}&gt;&#13;&#10;            &lt;Text style={{ fontSize: 14, fontWeight: 'bold', color: '#FFFFFF' }}&gt;第 72 节&lt;/Text&gt;&#13;&#10;        &lt;/Box&gt;&#13;&#10;        &lt;Text style={{ fontSize: 30, fontWeight: 'bold', color: '#16232E' }}&gt;核心知识点&lt;/Text&gt;&#13;&#10;        &lt;Text style={{ fontSize: 15, color: '#5A6B7A', marginTop: 10 }}&gt;· 外星舰队与整体移动&lt;/Text&gt;&#13;&#10;    &lt;/Box&gt;&#13;&#10;    &lt;Box style={{ position: 'absolute', left: 0, top: 0, width: '1280px', height: '720px' }}&gt;&#13;&#10;        &lt;svg width='1280' height='720' viewBox='0 0 1280 720'&gt;&#13;&#10;            &lt;rect x='64' y='96' width='548' height='330' rx='12' fill='#FFFFFF' stroke='#D8E3EE' /&gt;&lt;rect x='64' y='96' width='548' height='4' rx='2' fill='#1F5FA8' /&gt;&lt;text x='82' y='130' fontSize='15.5' fontWeight='bold' fill='#1F5FA8' textAnchor='start' fontFamily='Microsoft YaHei'&gt;2.5 创建外星舰队（13.3）&lt;/text&gt;&lt;text x='82' y='169.0' fontSize='13' fill='#3A4A58' textAnchor='start' fontFamily='Microsoft YaHei'&gt;· 为什么强调「用一个外星人量尺寸」而不要硬编码 alien_width = 60？&lt;/text&gt;&lt;rect x='668' y='96' width='548' height='330' rx='12' fill='#FFFFFF' stroke='#D8E3EE' /&gt;&lt;rect x='668' y='96' width='548' height='4' rx='2' fill='#1F5FA8' /&gt;&lt;text x='686' y='130' fontSize='15.5' fontWeight='bold' fill='#1F5FA8' textAnchor='start' fontFamily='Microsoft YaHei'&gt;2.6 让外星舰队移动（13.4）&lt;/text&gt;&lt;text x='686' y='169.0' fontSize='13' fill='#3A4A58' textAnchor='start' fontFamily='Microsoft YaHei'&gt;· 舰队移动的规则听起来简单，实现时有一个关键设计：方向不存每个外星人身上…&lt;/text&gt;&lt;text x='686' y='197.5' fontSize='13' fill='#3A4A58' textAnchor='start' fontFamily='Microsoft YaHei'&gt;· ★ break 是这里最容易漏的一行。&lt;/text&gt;&lt;text x='686' y='226.0' fontSize='13' fill='#3A4A58' textAnchor='start' fontFamily='Microsoft YaHei'&gt;· fleet_direction = -1 这行也很值得体会：方向在 1 和 -1 之间反复横跳…&lt;/text&gt;&lt;rect x='64' y='574' width='1152' height='66' rx='12' fill='#EEF5FB' /&gt;&lt;text x='84' y='616' fontSize='14' fill='#243444' textAnchor='start' fontFamily='Microsoft YaHei'&gt;看不懂的地方先回讲义对应小节读一遍，再回来对着这页复述一次——能讲出来才算真懂。&lt;/text&gt;&#13;&#10;            &lt;text x='64' y='684' fontSize='13' fill='#8A9AAA' fontFamily='Microsoft YaHei'&gt;Python 讲授课件 · 逐节版&lt;/text&gt;&#13;&#10;            &lt;text x='1216' y='684' fontSize='13' fill='#8A9AAA' textAnchor='end' fontFamily='Microsoft YaHei'&gt;单元 13 · 第 72 节&lt;/text&gt;&#13;&#10;        &lt;/svg&gt;&#13;&#10;    &lt;/Box&gt;&#13;&#10;&lt;/Slide&gt;&#13;&#10;"/>
         <p:cNvGrpSpPr/>
         <p:nvPr/>
       </p:nvGrpSpPr>
@@ -5727,7 +3483,7 @@
   <p:cSld>
     <p:spTree>
       <p:nvGrpSpPr>
-        <p:cNvPr id="81" name="" descr="&lt;Slide style={{ width: '1280px', height: '720px', backgroundColor: '#FAFCFE', padding: 0, position: 'relative', overflow: 'hidden' }}&gt;&#13;&#10;    &lt;Box style={{ position: 'absolute', left: 64, top: 36, width: '1152px', flexDirection: 'row', alignItems: 'center', gap: 12 }}&gt;&#13;&#10;        &lt;Box style={{ background: '#0E9B78', borderRadius: 5, padding: '3px 11px' }}&gt;&#13;&#10;            &lt;Text style={{ fontSize: 14, fontWeight: 'bold', color: '#FFFFFF' }}&gt;第 73 节&lt;/Text&gt;&#13;&#10;        &lt;/Box&gt;&#13;&#10;        &lt;Text style={{ fontSize: 30, fontWeight: 'bold', color: '#16232E' }}&gt;核心知识点&lt;/Text&gt;&#13;&#10;        &lt;Text style={{ fontSize: 15, color: '#5A6B7A', marginTop: 10 }}&gt;· 碰撞检测与游戏结束&lt;/Text&gt;&#13;&#10;    &lt;/Box&gt;&#13;&#10;    &lt;Box style={{ position: 'absolute', left: 0, top: 0, width: '1280px', height: '720px' }}&gt;&#13;&#10;        &lt;svg width='1280' height='720' viewBox='0 0 1280 720'&gt;&#13;&#10;            &lt;rect x='64' y='96' width='1152' height='330' rx='12' fill='#FFFFFF' stroke='#D8E3EE' /&gt;&lt;rect x='64' y='96' width='1152' height='4' rx='2' fill='#1F5FA8' /&gt;&lt;text x='82' y='130' fontSize='15.5' fontWeight='bold' fill='#1F5FA8' textAnchor='start' fontFamily='Microsoft YaHei'&gt;2.7 碰撞检测与游戏结束（13.5–13.7）&lt;/text&gt;&lt;text x='82' y='169.0' fontSize='13' fill='#3A4A58' textAnchor='start' fontFamily='Microsoft YaHei'&gt;· （1）子弹打中外星人。 Pygame 把「两个编组互相检测碰撞」做成了一个函数：&lt;/text&gt;&lt;text x='82' y='197.5' fontSize='13' fill='#3A4A58' textAnchor='start' fontFamily='Microsoft YaHei'&gt;· （2）「为测试创建大子弹」的调试思维。 教材在这里专门讲了一个调试技巧：怀疑碰撞检测有 bug 时，临…&lt;/text&gt;&lt;text x='82' y='226.0' fontSize='13' fill='#3A4A58' textAnchor='start' fontFamily='Microsoft YaHei'&gt;· （3）外星人撞到飞船。 检测「一个精灵 vs 整个编组」用另一个函数：&lt;/text&gt;&lt;text x='64' y='470' fontSize='14.5' fontWeight='bold' fill='#0E9B78' textAnchor='start' fontFamily='Microsoft YaHei'&gt;本节的代码示例&lt;/text&gt;&lt;text x='64' y='500' fontSize='13' fill='#3A4A58' textAnchor='start' fontFamily='Microsoft YaHei'&gt;· settings.py——新增子弹、外星人、舰队三组设置&lt;/text&gt;&lt;text x='468' y='500' fontSize='13' fill='#3A4A58' textAnchor='start' fontFamily='Microsoft YaHei'&gt;· group_demo.py——不打开窗口，把编组的核心行为…&lt;/text&gt;&lt;text x='872' y='500' fontSize='13' fill='#3A4A58' textAnchor='start' fontFamily='Microsoft YaHei'&gt;· bullet.py——子弹类（可直接运行自测）&lt;/text&gt;&lt;rect x='64' y='574' width='1152' height='66' rx='12' fill='#EEF5FB' /&gt;&lt;text x='84' y='616' fontSize='14' fill='#243444' textAnchor='start' fontFamily='Microsoft YaHei'&gt;看不懂的地方先回讲义对应小节读一遍，再回来对着这页复述一次——能讲出来才算真懂。&lt;/text&gt;&#13;&#10;            &lt;text x='64' y='684' fontSize='13' fill='#8A9AAA' fontFamily='Microsoft YaHei'&gt;Python 讲授课件 · 逐节版&lt;/text&gt;&#13;&#10;            &lt;text x='1216' y='684' fontSize='13' fill='#8A9AAA' textAnchor='end' fontFamily='Microsoft YaHei'&gt;单元 13 · 第 73 节&lt;/text&gt;&#13;&#10;        &lt;/svg&gt;&#13;&#10;    &lt;/Box&gt;&#13;&#10;&lt;/Slide&gt;&#13;&#10;"/>
+        <p:cNvPr id="81" name="" descr="&lt;Slide style={{ width: '1280px', height: '720px', backgroundColor: '#FAFCFE', padding: 0, position: 'relative', overflow: 'hidden' }}&gt;&#13;&#10;    &lt;Box style={{ position: 'absolute', left: 64, top: 36, width: '1152px', flexDirection: 'row', alignItems: 'center', gap: 12 }}&gt;&#13;&#10;        &lt;Box style={{ background: '#0E9B78', borderRadius: 5, padding: '3px 11px' }}&gt;&#13;&#10;            &lt;Text style={{ fontSize: 14, fontWeight: 'bold', color: '#FFFFFF' }}&gt;第 73 节&lt;/Text&gt;&#13;&#10;        &lt;/Box&gt;&#13;&#10;        &lt;Text style={{ fontSize: 30, fontWeight: 'bold', color: '#16232E' }}&gt;核心知识点&lt;/Text&gt;&#13;&#10;        &lt;Text style={{ fontSize: 15, color: '#5A6B7A', marginTop: 10 }}&gt;· 碰撞检测与游戏结束&lt;/Text&gt;&#13;&#10;    &lt;/Box&gt;&#13;&#10;    &lt;Box style={{ position: 'absolute', left: 0, top: 0, width: '1280px', height: '720px' }}&gt;&#13;&#10;        &lt;svg width='1280' height='720' viewBox='0 0 1280 720'&gt;&#13;&#10;            &lt;rect x='64' y='96' width='1152' height='330' rx='12' fill='#FFFFFF' stroke='#D8E3EE' /&gt;&lt;rect x='64' y='96' width='1152' height='4' rx='2' fill='#1F5FA8' /&gt;&lt;text x='82' y='130' fontSize='15.5' fontWeight='bold' fill='#1F5FA8' textAnchor='start' fontFamily='Microsoft YaHei'&gt;2.7 碰撞检测与游戏结束（13.5–13.7）&lt;/text&gt;&lt;text x='82' y='169.0' fontSize='13' fill='#3A4A58' textAnchor='start' fontFamily='Microsoft YaHei'&gt;· （1）子弹打中外星人。&lt;/text&gt;&lt;text x='82' y='197.5' fontSize='13' fill='#3A4A58' textAnchor='start' fontFamily='Microsoft YaHei'&gt;· （2）「为测试创建大子弹」的调试思维。&lt;/text&gt;&lt;text x='82' y='226.0' fontSize='13' fill='#3A4A58' textAnchor='start' fontFamily='Microsoft YaHei'&gt;· （3）外星人撞到飞船。&lt;/text&gt;&lt;text x='64' y='470' fontSize='14.5' fontWeight='bold' fill='#0E9B78' textAnchor='start' fontFamily='Microsoft YaHei'&gt;本节的代码示例&lt;/text&gt;&lt;text x='64' y='500' fontSize='13' fill='#3A4A58' textAnchor='start' fontFamily='Microsoft YaHei'&gt;· settings.py——新增子弹、外星人、舰队三组设置&lt;/text&gt;&lt;text x='468' y='500' fontSize='13' fill='#3A4A58' textAnchor='start' fontFamily='Microsoft YaHei'&gt;· group_demo.py——不打开窗口…&lt;/text&gt;&lt;text x='872' y='500' fontSize='13' fill='#3A4A58' textAnchor='start' fontFamily='Microsoft YaHei'&gt;· bullet.py——子弹类（可直接运行自测）&lt;/text&gt;&lt;rect x='64' y='574' width='1152' height='66' rx='12' fill='#EEF5FB' /&gt;&lt;text x='84' y='616' fontSize='14' fill='#243444' textAnchor='start' fontFamily='Microsoft YaHei'&gt;看不懂的地方先回讲义对应小节读一遍，再回来对着这页复述一次——能讲出来才算真懂。&lt;/text&gt;&#13;&#10;            &lt;text x='64' y='684' fontSize='13' fill='#8A9AAA' fontFamily='Microsoft YaHei'&gt;Python 讲授课件 · 逐节版&lt;/text&gt;&#13;&#10;            &lt;text x='1216' y='684' fontSize='13' fill='#8A9AAA' textAnchor='end' fontFamily='Microsoft YaHei'&gt;单元 13 · 第 73 节&lt;/text&gt;&#13;&#10;        &lt;/svg&gt;&#13;&#10;    &lt;/Box&gt;&#13;&#10;&lt;/Slide&gt;&#13;&#10;"/>
         <p:cNvGrpSpPr/>
         <p:nvPr/>
       </p:nvGrpSpPr>

--- a/python-course-ppt/逐节课件/Python讲授课件-单元13.pptx
+++ b/python-course-ppt/逐节课件/Python讲授课件-单元13.pptx
@@ -236,6 +236,1278 @@
     </a:lvl9pPr>
   </p:notesStyle>
 </p:notesMaster>
+</file>
+
+<file path=ppt/notesSlides/notesSlide1.xml><?xml version="1.0" encoding="utf-8"?>
+<p:notes xmlns:a="http://schemas.openxmlformats.org/drawingml/2006/main" xmlns:p="http://schemas.openxmlformats.org/presentationml/2006/main" xmlns:r="http://schemas.openxmlformats.org/officeDocument/2006/relationships">
+  <p:cSld>
+    <p:spTree>
+      <p:nvGrpSpPr>
+        <p:cNvPr id="1" name=""/>
+        <p:cNvGrpSpPr/>
+        <p:nvPr/>
+      </p:nvGrpSpPr>
+      <p:grpSpPr>
+        <a:xfrm>
+          <a:off x="0" y="0"/>
+          <a:ext cx="0" cy="0"/>
+          <a:chOff x="0" y="0"/>
+          <a:chExt cx="0" cy="0"/>
+        </a:xfrm>
+      </p:grpSpPr>
+      <p:sp>
+        <p:nvSpPr>
+          <p:cNvPr id="2" name="讲课提示"/>
+          <p:cNvSpPr txBox="1"/>
+          <p:nvPr/>
+        </p:nvSpPr>
+        <p:spPr>
+          <a:xfrm>
+            <a:off x="457200" y="457200"/>
+            <a:ext cx="6858000" cy="4800600"/>
+          </a:xfrm>
+          <a:prstGeom prst="rect">
+            <a:avLst/>
+          </a:prstGeom>
+        </p:spPr>
+        <p:txBody>
+          <a:bodyPr wrap="square"/>
+          <a:lstStyle/>
+          <a:p>
+            <a:r>
+              <a:rPr lang="zh-CN" dirty="0"/>
+              <a:t>单元 13 · 单元 13 · 射击与外星舰队</a:t>
+            </a:r>
+          </a:p>
+          <a:p>
+            <a:r>
+              <a:rPr lang="zh-CN" dirty="0"/>
+              <a:t/>
+            </a:r>
+          </a:p>
+          <a:p>
+            <a:r>
+              <a:rPr lang="zh-CN" dirty="0"/>
+              <a:t>本单元包含以下课节：</a:t>
+            </a:r>
+          </a:p>
+          <a:p>
+            <a:r>
+              <a:rPr lang="zh-CN" dirty="0"/>
+              <a:t>· 第 70 节 编组 Group 与精灵 Sprite</a:t>
+            </a:r>
+          </a:p>
+          <a:p>
+            <a:r>
+              <a:rPr lang="zh-CN" dirty="0"/>
+              <a:t>· 第 71 节 射击：Bullet 类与开火</a:t>
+            </a:r>
+          </a:p>
+          <a:p>
+            <a:r>
+              <a:rPr lang="zh-CN" dirty="0"/>
+              <a:t>· 第 72 节 外星舰队与整体移动</a:t>
+            </a:r>
+          </a:p>
+          <a:p>
+            <a:r>
+              <a:rPr lang="zh-CN" dirty="0"/>
+              <a:t>· 第 73 节 碰撞检测与游戏结束</a:t>
+            </a:r>
+          </a:p>
+          <a:p>
+            <a:r>
+              <a:rPr lang="zh-CN" dirty="0"/>
+              <a:t>· 第 74 节 实战、答案与验收复盘</a:t>
+            </a:r>
+          </a:p>
+          <a:p>
+            <a:r>
+              <a:rPr lang="zh-CN" dirty="0"/>
+              <a:t/>
+            </a:r>
+          </a:p>
+          <a:p>
+            <a:r>
+              <a:rPr lang="zh-CN" dirty="0"/>
+              <a:t>开场用 3 分钟讲清：这个单元学完能做出什么，最后会被关卡怎么验。</a:t>
+            </a:r>
+          </a:p>
+        </p:txBody>
+      </p:sp>
+    </p:spTree>
+  </p:cSld>
+  <p:clrMapOvr>
+    <a:masterClrMapping/>
+  </p:clrMapOvr>
+</p:notes>
+</file>
+
+<file path=ppt/notesSlides/notesSlide10.xml><?xml version="1.0" encoding="utf-8"?>
+<p:notes xmlns:a="http://schemas.openxmlformats.org/drawingml/2006/main" xmlns:p="http://schemas.openxmlformats.org/presentationml/2006/main" xmlns:r="http://schemas.openxmlformats.org/officeDocument/2006/relationships">
+  <p:cSld>
+    <p:spTree>
+      <p:nvGrpSpPr>
+        <p:cNvPr id="1" name=""/>
+        <p:cNvGrpSpPr/>
+        <p:nvPr/>
+      </p:nvGrpSpPr>
+      <p:grpSpPr>
+        <a:xfrm>
+          <a:off x="0" y="0"/>
+          <a:ext cx="0" cy="0"/>
+          <a:chOff x="0" y="0"/>
+          <a:chExt cx="0" cy="0"/>
+        </a:xfrm>
+      </p:grpSpPr>
+      <p:sp>
+        <p:nvSpPr>
+          <p:cNvPr id="2" name="讲课提示"/>
+          <p:cNvSpPr txBox="1"/>
+          <p:nvPr/>
+        </p:nvSpPr>
+        <p:spPr>
+          <a:xfrm>
+            <a:off x="457200" y="457200"/>
+            <a:ext cx="6858000" cy="4800600"/>
+          </a:xfrm>
+          <a:prstGeom prst="rect">
+            <a:avLst/>
+          </a:prstGeom>
+        </p:spPr>
+        <p:txBody>
+          <a:bodyPr wrap="square"/>
+          <a:lstStyle/>
+          <a:p>
+            <a:r>
+              <a:rPr lang="zh-CN" dirty="0"/>
+              <a:t>第 74 节 · 实战、答案与验收复盘</a:t>
+            </a:r>
+          </a:p>
+          <a:p>
+            <a:r>
+              <a:rPr lang="zh-CN" dirty="0"/>
+              <a:t>单元 13 · 射击与外星舰队 · W16</a:t>
+            </a:r>
+          </a:p>
+          <a:p>
+            <a:r>
+              <a:rPr lang="zh-CN" dirty="0"/>
+              <a:t/>
+            </a:r>
+          </a:p>
+          <a:p>
+            <a:r>
+              <a:rPr lang="zh-CN" dirty="0"/>
+              <a:t>学习目标：独立完成单元 13 练习，能讲清每处遍历删除的写法</a:t>
+            </a:r>
+          </a:p>
+          <a:p>
+            <a:r>
+              <a:rPr lang="zh-CN" dirty="0"/>
+              <a:t/>
+            </a:r>
+          </a:p>
+          <a:p>
+            <a:r>
+              <a:rPr lang="zh-CN" dirty="0"/>
+              <a:t>课堂实操（40 分钟，不看答案）：</a:t>
+            </a:r>
+          </a:p>
+          <a:p>
+            <a:r>
+              <a:rPr lang="zh-CN" dirty="0"/>
+              <a:t>· 限时 30 分钟独立完成基础档</a:t>
+            </a:r>
+          </a:p>
+          <a:p>
+            <a:r>
+              <a:rPr lang="zh-CN" dirty="0"/>
+              <a:t>· 逐题对照答案，错的当场重跑</a:t>
+            </a:r>
+          </a:p>
+          <a:p>
+            <a:r>
+              <a:rPr lang="zh-CN" dirty="0"/>
+              <a:t/>
+            </a:r>
+          </a:p>
+          <a:p>
+            <a:r>
+              <a:rPr lang="zh-CN" dirty="0"/>
+              <a:t>课后作业：</a:t>
+            </a:r>
+          </a:p>
+          <a:p>
+            <a:r>
+              <a:rPr lang="zh-CN" dirty="0"/>
+              <a:t>· ★ 产出：完整可玩的外星人入侵（能射、能得分、能结束）</a:t>
+            </a:r>
+          </a:p>
+          <a:p>
+            <a:r>
+              <a:rPr lang="zh-CN" dirty="0"/>
+              <a:t/>
+            </a:r>
+          </a:p>
+          <a:p>
+            <a:r>
+              <a:rPr lang="zh-CN" dirty="0"/>
+              <a:t>节奏：讲 20 分钟 → 学员自己敲 40 分钟（不看答案）→ 对讲评自查 20 分钟 → 写作业 10 分钟。</a:t>
+            </a:r>
+          </a:p>
+        </p:txBody>
+      </p:sp>
+    </p:spTree>
+  </p:cSld>
+  <p:clrMapOvr>
+    <a:masterClrMapping/>
+  </p:clrMapOvr>
+</p:notes>
+</file>
+
+<file path=ppt/notesSlides/notesSlide11.xml><?xml version="1.0" encoding="utf-8"?>
+<p:notes xmlns:a="http://schemas.openxmlformats.org/drawingml/2006/main" xmlns:p="http://schemas.openxmlformats.org/presentationml/2006/main" xmlns:r="http://schemas.openxmlformats.org/officeDocument/2006/relationships">
+  <p:cSld>
+    <p:spTree>
+      <p:nvGrpSpPr>
+        <p:cNvPr id="1" name=""/>
+        <p:cNvGrpSpPr/>
+        <p:nvPr/>
+      </p:nvGrpSpPr>
+      <p:grpSpPr>
+        <a:xfrm>
+          <a:off x="0" y="0"/>
+          <a:ext cx="0" cy="0"/>
+          <a:chOff x="0" y="0"/>
+          <a:chExt cx="0" cy="0"/>
+        </a:xfrm>
+      </p:grpSpPr>
+      <p:sp>
+        <p:nvSpPr>
+          <p:cNvPr id="2" name="讲课提示"/>
+          <p:cNvSpPr txBox="1"/>
+          <p:nvPr/>
+        </p:nvSpPr>
+        <p:spPr>
+          <a:xfrm>
+            <a:off x="457200" y="457200"/>
+            <a:ext cx="6858000" cy="4800600"/>
+          </a:xfrm>
+          <a:prstGeom prst="rect">
+            <a:avLst/>
+          </a:prstGeom>
+        </p:spPr>
+        <p:txBody>
+          <a:bodyPr wrap="square"/>
+          <a:lstStyle/>
+          <a:p>
+            <a:r>
+              <a:rPr lang="zh-CN" dirty="0"/>
+              <a:t>第 74 节 · 核心知识点：实战、答案与验收复盘</a:t>
+            </a:r>
+          </a:p>
+          <a:p>
+            <a:r>
+              <a:rPr lang="zh-CN" dirty="0"/>
+              <a:t/>
+            </a:r>
+          </a:p>
+          <a:p>
+            <a:r>
+              <a:rPr lang="zh-CN" dirty="0"/>
+              <a:t>讲这一页时：先让学生说出上节课的结论，再逐块讲要点。</a:t>
+            </a:r>
+          </a:p>
+          <a:p>
+            <a:r>
+              <a:rPr lang="zh-CN" dirty="0"/>
+              <a:t>每讲完一块，问一句「这一步如果写错了，报错会长什么样？」——把错误提前讲。</a:t>
+            </a:r>
+          </a:p>
+          <a:p>
+            <a:r>
+              <a:rPr lang="zh-CN" dirty="0"/>
+              <a:t/>
+            </a:r>
+          </a:p>
+          <a:p>
+            <a:r>
+              <a:rPr lang="zh-CN" dirty="0"/>
+              <a:t>本节目标：独立完成单元 13 练习，能讲清每处遍历删除的写法</a:t>
+            </a:r>
+          </a:p>
+          <a:p>
+            <a:r>
+              <a:rPr lang="zh-CN" dirty="0"/>
+              <a:t/>
+            </a:r>
+          </a:p>
+          <a:p>
+            <a:r>
+              <a:rPr lang="zh-CN" dirty="0"/>
+              <a:t>看不到懂的地方，回讲义对应小节读一遍，再回来对着这页复述一次——能讲出来才算真懂。</a:t>
+            </a:r>
+          </a:p>
+        </p:txBody>
+      </p:sp>
+    </p:spTree>
+  </p:cSld>
+  <p:clrMapOvr>
+    <a:masterClrMapping/>
+  </p:clrMapOvr>
+</p:notes>
+</file>
+
+<file path=ppt/notesSlides/notesSlide12.xml><?xml version="1.0" encoding="utf-8"?>
+<p:notes xmlns:a="http://schemas.openxmlformats.org/drawingml/2006/main" xmlns:p="http://schemas.openxmlformats.org/presentationml/2006/main" xmlns:r="http://schemas.openxmlformats.org/officeDocument/2006/relationships">
+  <p:cSld>
+    <p:spTree>
+      <p:nvGrpSpPr>
+        <p:cNvPr id="1" name=""/>
+        <p:cNvGrpSpPr/>
+        <p:nvPr/>
+      </p:nvGrpSpPr>
+      <p:grpSpPr>
+        <a:xfrm>
+          <a:off x="0" y="0"/>
+          <a:ext cx="0" cy="0"/>
+          <a:chOff x="0" y="0"/>
+          <a:chExt cx="0" cy="0"/>
+        </a:xfrm>
+      </p:grpSpPr>
+      <p:sp>
+        <p:nvSpPr>
+          <p:cNvPr id="2" name="讲课提示"/>
+          <p:cNvSpPr txBox="1"/>
+          <p:nvPr/>
+        </p:nvSpPr>
+        <p:spPr>
+          <a:xfrm>
+            <a:off x="457200" y="457200"/>
+            <a:ext cx="6858000" cy="4800600"/>
+          </a:xfrm>
+          <a:prstGeom prst="rect">
+            <a:avLst/>
+          </a:prstGeom>
+        </p:spPr>
+        <p:txBody>
+          <a:bodyPr wrap="square"/>
+          <a:lstStyle/>
+          <a:p>
+            <a:r>
+              <a:rPr lang="zh-CN" dirty="0"/>
+              <a:t>单元 13 小结 · 单元 13 · 小结</a:t>
+            </a:r>
+          </a:p>
+          <a:p>
+            <a:r>
+              <a:rPr lang="zh-CN" dirty="0"/>
+              <a:t/>
+            </a:r>
+          </a:p>
+          <a:p>
+            <a:r>
+              <a:rPr lang="zh-CN" dirty="0"/>
+              <a:t>收尾动作：让学生合上讲义，口述本单元三个最重要的结论；说不出来的，回对应课节。</a:t>
+            </a:r>
+          </a:p>
+          <a:p>
+            <a:r>
+              <a:rPr lang="zh-CN" dirty="0"/>
+              <a:t>然后当场勾一遍本单元课节的「已完成」，没打勾的进下一单元前补掉。</a:t>
+            </a:r>
+          </a:p>
+        </p:txBody>
+      </p:sp>
+    </p:spTree>
+  </p:cSld>
+  <p:clrMapOvr>
+    <a:masterClrMapping/>
+  </p:clrMapOvr>
+</p:notes>
+</file>
+
+<file path=ppt/notesSlides/notesSlide2.xml><?xml version="1.0" encoding="utf-8"?>
+<p:notes xmlns:a="http://schemas.openxmlformats.org/drawingml/2006/main" xmlns:p="http://schemas.openxmlformats.org/presentationml/2006/main" xmlns:r="http://schemas.openxmlformats.org/officeDocument/2006/relationships">
+  <p:cSld>
+    <p:spTree>
+      <p:nvGrpSpPr>
+        <p:cNvPr id="1" name=""/>
+        <p:cNvGrpSpPr/>
+        <p:nvPr/>
+      </p:nvGrpSpPr>
+      <p:grpSpPr>
+        <a:xfrm>
+          <a:off x="0" y="0"/>
+          <a:ext cx="0" cy="0"/>
+          <a:chOff x="0" y="0"/>
+          <a:chExt cx="0" cy="0"/>
+        </a:xfrm>
+      </p:grpSpPr>
+      <p:sp>
+        <p:nvSpPr>
+          <p:cNvPr id="2" name="讲课提示"/>
+          <p:cNvSpPr txBox="1"/>
+          <p:nvPr/>
+        </p:nvSpPr>
+        <p:spPr>
+          <a:xfrm>
+            <a:off x="457200" y="457200"/>
+            <a:ext cx="6858000" cy="4800600"/>
+          </a:xfrm>
+          <a:prstGeom prst="rect">
+            <a:avLst/>
+          </a:prstGeom>
+        </p:spPr>
+        <p:txBody>
+          <a:bodyPr wrap="square"/>
+          <a:lstStyle/>
+          <a:p>
+            <a:r>
+              <a:rPr lang="zh-CN" dirty="0"/>
+              <a:t>第 70 节 · 编组 Group 与精灵 Sprite</a:t>
+            </a:r>
+          </a:p>
+          <a:p>
+            <a:r>
+              <a:rPr lang="zh-CN" dirty="0"/>
+              <a:t>单元 13 · 射击与外星舰队 · W15</a:t>
+            </a:r>
+          </a:p>
+          <a:p>
+            <a:r>
+              <a:rPr lang="zh-CN" dirty="0"/>
+              <a:t/>
+            </a:r>
+          </a:p>
+          <a:p>
+            <a:r>
+              <a:rPr lang="zh-CN" dirty="0"/>
+              <a:t>学习目标：说清 Group 和普通 list 的三点差别；理解为什么 Pygame 用编组而不是列表</a:t>
+            </a:r>
+          </a:p>
+          <a:p>
+            <a:r>
+              <a:rPr lang="zh-CN" dirty="0"/>
+              <a:t/>
+            </a:r>
+          </a:p>
+          <a:p>
+            <a:r>
+              <a:rPr lang="zh-CN" dirty="0"/>
+              <a:t>课堂实操（40 分钟，不看答案）：</a:t>
+            </a:r>
+          </a:p>
+          <a:p>
+            <a:r>
+              <a:rPr lang="zh-CN" dirty="0"/>
+              <a:t>· 用纯 Python 演示 Group 的 add/update/remove 行为</a:t>
+            </a:r>
+          </a:p>
+          <a:p>
+            <a:r>
+              <a:rPr lang="zh-CN" dirty="0"/>
+              <a:t>· 对比 list 与 Group 的删除差异</a:t>
+            </a:r>
+          </a:p>
+          <a:p>
+            <a:r>
+              <a:rPr lang="zh-CN" dirty="0"/>
+              <a:t/>
+            </a:r>
+          </a:p>
+          <a:p>
+            <a:r>
+              <a:rPr lang="zh-CN" dirty="0"/>
+              <a:t>课后作业：</a:t>
+            </a:r>
+          </a:p>
+          <a:p>
+            <a:r>
+              <a:rPr lang="zh-CN" dirty="0"/>
+              <a:t>· 完成练习 13-1【编组基本功】</a:t>
+            </a:r>
+          </a:p>
+          <a:p>
+            <a:r>
+              <a:rPr lang="zh-CN" dirty="0"/>
+              <a:t/>
+            </a:r>
+          </a:p>
+          <a:p>
+            <a:r>
+              <a:rPr lang="zh-CN" dirty="0"/>
+              <a:t>节奏：讲 20 分钟 → 学员自己敲 40 分钟（不看答案）→ 对讲评自查 20 分钟 → 写作业 10 分钟。</a:t>
+            </a:r>
+          </a:p>
+        </p:txBody>
+      </p:sp>
+    </p:spTree>
+  </p:cSld>
+  <p:clrMapOvr>
+    <a:masterClrMapping/>
+  </p:clrMapOvr>
+</p:notes>
+</file>
+
+<file path=ppt/notesSlides/notesSlide3.xml><?xml version="1.0" encoding="utf-8"?>
+<p:notes xmlns:a="http://schemas.openxmlformats.org/drawingml/2006/main" xmlns:p="http://schemas.openxmlformats.org/presentationml/2006/main" xmlns:r="http://schemas.openxmlformats.org/officeDocument/2006/relationships">
+  <p:cSld>
+    <p:spTree>
+      <p:nvGrpSpPr>
+        <p:cNvPr id="1" name=""/>
+        <p:cNvGrpSpPr/>
+        <p:nvPr/>
+      </p:nvGrpSpPr>
+      <p:grpSpPr>
+        <a:xfrm>
+          <a:off x="0" y="0"/>
+          <a:ext cx="0" cy="0"/>
+          <a:chOff x="0" y="0"/>
+          <a:chExt cx="0" cy="0"/>
+        </a:xfrm>
+      </p:grpSpPr>
+      <p:sp>
+        <p:nvSpPr>
+          <p:cNvPr id="2" name="讲课提示"/>
+          <p:cNvSpPr txBox="1"/>
+          <p:nvPr/>
+        </p:nvSpPr>
+        <p:spPr>
+          <a:xfrm>
+            <a:off x="457200" y="457200"/>
+            <a:ext cx="6858000" cy="4800600"/>
+          </a:xfrm>
+          <a:prstGeom prst="rect">
+            <a:avLst/>
+          </a:prstGeom>
+        </p:spPr>
+        <p:txBody>
+          <a:bodyPr wrap="square"/>
+          <a:lstStyle/>
+          <a:p>
+            <a:r>
+              <a:rPr lang="zh-CN" dirty="0"/>
+              <a:t>第 70 节 · 核心知识点：编组 Group 与精灵 Sprite</a:t>
+            </a:r>
+          </a:p>
+          <a:p>
+            <a:r>
+              <a:rPr lang="zh-CN" dirty="0"/>
+              <a:t/>
+            </a:r>
+          </a:p>
+          <a:p>
+            <a:r>
+              <a:rPr lang="zh-CN" dirty="0"/>
+              <a:t>讲这一页时：先让学生说出上节课的结论，再逐块讲要点。</a:t>
+            </a:r>
+          </a:p>
+          <a:p>
+            <a:r>
+              <a:rPr lang="zh-CN" dirty="0"/>
+              <a:t>每讲完一块，问一句「这一步如果写错了，报错会长什么样？」——把错误提前讲。</a:t>
+            </a:r>
+          </a:p>
+          <a:p>
+            <a:r>
+              <a:rPr lang="zh-CN" dirty="0"/>
+              <a:t/>
+            </a:r>
+          </a:p>
+          <a:p>
+            <a:r>
+              <a:rPr lang="zh-CN" dirty="0"/>
+              <a:t>本节目标：说清 Group 和普通 list 的三点差别；理解为什么 Pygame 用编组而不是列表</a:t>
+            </a:r>
+          </a:p>
+          <a:p>
+            <a:r>
+              <a:rPr lang="zh-CN" dirty="0"/>
+              <a:t/>
+            </a:r>
+          </a:p>
+          <a:p>
+            <a:r>
+              <a:rPr lang="zh-CN" dirty="0"/>
+              <a:t>看不到懂的地方，回讲义对应小节读一遍，再回来对着这页复述一次——能讲出来才算真懂。</a:t>
+            </a:r>
+          </a:p>
+        </p:txBody>
+      </p:sp>
+    </p:spTree>
+  </p:cSld>
+  <p:clrMapOvr>
+    <a:masterClrMapping/>
+  </p:clrMapOvr>
+</p:notes>
+</file>
+
+<file path=ppt/notesSlides/notesSlide4.xml><?xml version="1.0" encoding="utf-8"?>
+<p:notes xmlns:a="http://schemas.openxmlformats.org/drawingml/2006/main" xmlns:p="http://schemas.openxmlformats.org/presentationml/2006/main" xmlns:r="http://schemas.openxmlformats.org/officeDocument/2006/relationships">
+  <p:cSld>
+    <p:spTree>
+      <p:nvGrpSpPr>
+        <p:cNvPr id="1" name=""/>
+        <p:cNvGrpSpPr/>
+        <p:nvPr/>
+      </p:nvGrpSpPr>
+      <p:grpSpPr>
+        <a:xfrm>
+          <a:off x="0" y="0"/>
+          <a:ext cx="0" cy="0"/>
+          <a:chOff x="0" y="0"/>
+          <a:chExt cx="0" cy="0"/>
+        </a:xfrm>
+      </p:grpSpPr>
+      <p:sp>
+        <p:nvSpPr>
+          <p:cNvPr id="2" name="讲课提示"/>
+          <p:cNvSpPr txBox="1"/>
+          <p:nvPr/>
+        </p:nvSpPr>
+        <p:spPr>
+          <a:xfrm>
+            <a:off x="457200" y="457200"/>
+            <a:ext cx="6858000" cy="4800600"/>
+          </a:xfrm>
+          <a:prstGeom prst="rect">
+            <a:avLst/>
+          </a:prstGeom>
+        </p:spPr>
+        <p:txBody>
+          <a:bodyPr wrap="square"/>
+          <a:lstStyle/>
+          <a:p>
+            <a:r>
+              <a:rPr lang="zh-CN" dirty="0"/>
+              <a:t>第 71 节 · 射击：Bullet 类与开火</a:t>
+            </a:r>
+          </a:p>
+          <a:p>
+            <a:r>
+              <a:rPr lang="zh-CN" dirty="0"/>
+              <a:t>单元 13 · 射击与外星舰队 · W15–W16</a:t>
+            </a:r>
+          </a:p>
+          <a:p>
+            <a:r>
+              <a:rPr lang="zh-CN" dirty="0"/>
+              <a:t/>
+            </a:r>
+          </a:p>
+          <a:p>
+            <a:r>
+              <a:rPr lang="zh-CN" dirty="0"/>
+              <a:t>学习目标：能创建 Bullet 类、把子弹存进编组、限制子弹数量</a:t>
+            </a:r>
+          </a:p>
+          <a:p>
+            <a:r>
+              <a:rPr lang="zh-CN" dirty="0"/>
+              <a:t/>
+            </a:r>
+          </a:p>
+          <a:p>
+            <a:r>
+              <a:rPr lang="zh-CN" dirty="0"/>
+              <a:t>课堂实操（40 分钟，不看答案）：</a:t>
+            </a:r>
+          </a:p>
+          <a:p>
+            <a:r>
+              <a:rPr lang="zh-CN" dirty="0"/>
+              <a:t>· 实现 Bullet 类并让它能向上飞</a:t>
+            </a:r>
+          </a:p>
+          <a:p>
+            <a:r>
+              <a:rPr lang="zh-CN" dirty="0"/>
+              <a:t>· 故意不开火，看子弹越积越多</a:t>
+            </a:r>
+          </a:p>
+          <a:p>
+            <a:r>
+              <a:rPr lang="zh-CN" dirty="0"/>
+              <a:t>· 把 limit 加严，观察效果</a:t>
+            </a:r>
+          </a:p>
+          <a:p>
+            <a:r>
+              <a:rPr lang="zh-CN" dirty="0"/>
+              <a:t/>
+            </a:r>
+          </a:p>
+          <a:p>
+            <a:r>
+              <a:rPr lang="zh-CN" dirty="0"/>
+              <a:t>课后作业：</a:t>
+            </a:r>
+          </a:p>
+          <a:p>
+            <a:r>
+              <a:rPr lang="zh-CN" dirty="0"/>
+              <a:t>· 完成练习 13-2【复现并修复「漏删」bug】</a:t>
+            </a:r>
+          </a:p>
+          <a:p>
+            <a:r>
+              <a:rPr lang="zh-CN" dirty="0"/>
+              <a:t/>
+            </a:r>
+          </a:p>
+          <a:p>
+            <a:r>
+              <a:rPr lang="zh-CN" dirty="0"/>
+              <a:t>节奏：讲 20 分钟 → 学员自己敲 40 分钟（不看答案）→ 对讲评自查 20 分钟 → 写作业 10 分钟。</a:t>
+            </a:r>
+          </a:p>
+        </p:txBody>
+      </p:sp>
+    </p:spTree>
+  </p:cSld>
+  <p:clrMapOvr>
+    <a:masterClrMapping/>
+  </p:clrMapOvr>
+</p:notes>
+</file>
+
+<file path=ppt/notesSlides/notesSlide5.xml><?xml version="1.0" encoding="utf-8"?>
+<p:notes xmlns:a="http://schemas.openxmlformats.org/drawingml/2006/main" xmlns:p="http://schemas.openxmlformats.org/presentationml/2006/main" xmlns:r="http://schemas.openxmlformats.org/officeDocument/2006/relationships">
+  <p:cSld>
+    <p:spTree>
+      <p:nvGrpSpPr>
+        <p:cNvPr id="1" name=""/>
+        <p:cNvGrpSpPr/>
+        <p:nvPr/>
+      </p:nvGrpSpPr>
+      <p:grpSpPr>
+        <a:xfrm>
+          <a:off x="0" y="0"/>
+          <a:ext cx="0" cy="0"/>
+          <a:chOff x="0" y="0"/>
+          <a:chExt cx="0" cy="0"/>
+        </a:xfrm>
+      </p:grpSpPr>
+      <p:sp>
+        <p:nvSpPr>
+          <p:cNvPr id="2" name="讲课提示"/>
+          <p:cNvSpPr txBox="1"/>
+          <p:nvPr/>
+        </p:nvSpPr>
+        <p:spPr>
+          <a:xfrm>
+            <a:off x="457200" y="457200"/>
+            <a:ext cx="6858000" cy="4800600"/>
+          </a:xfrm>
+          <a:prstGeom prst="rect">
+            <a:avLst/>
+          </a:prstGeom>
+        </p:spPr>
+        <p:txBody>
+          <a:bodyPr wrap="square"/>
+          <a:lstStyle/>
+          <a:p>
+            <a:r>
+              <a:rPr lang="zh-CN" dirty="0"/>
+              <a:t>第 71 节 · 核心知识点：射击：Bullet 类与开火</a:t>
+            </a:r>
+          </a:p>
+          <a:p>
+            <a:r>
+              <a:rPr lang="zh-CN" dirty="0"/>
+              <a:t/>
+            </a:r>
+          </a:p>
+          <a:p>
+            <a:r>
+              <a:rPr lang="zh-CN" dirty="0"/>
+              <a:t>讲这一页时：先让学生说出上节课的结论，再逐块讲要点。</a:t>
+            </a:r>
+          </a:p>
+          <a:p>
+            <a:r>
+              <a:rPr lang="zh-CN" dirty="0"/>
+              <a:t>每讲完一块，问一句「这一步如果写错了，报错会长什么样？」——把错误提前讲。</a:t>
+            </a:r>
+          </a:p>
+          <a:p>
+            <a:r>
+              <a:rPr lang="zh-CN" dirty="0"/>
+              <a:t/>
+            </a:r>
+          </a:p>
+          <a:p>
+            <a:r>
+              <a:rPr lang="zh-CN" dirty="0"/>
+              <a:t>本节目标：能创建 Bullet 类、把子弹存进编组、限制子弹数量</a:t>
+            </a:r>
+          </a:p>
+          <a:p>
+            <a:r>
+              <a:rPr lang="zh-CN" dirty="0"/>
+              <a:t/>
+            </a:r>
+          </a:p>
+          <a:p>
+            <a:r>
+              <a:rPr lang="zh-CN" dirty="0"/>
+              <a:t>看不到懂的地方，回讲义对应小节读一遍，再回来对着这页复述一次——能讲出来才算真懂。</a:t>
+            </a:r>
+          </a:p>
+        </p:txBody>
+      </p:sp>
+    </p:spTree>
+  </p:cSld>
+  <p:clrMapOvr>
+    <a:masterClrMapping/>
+  </p:clrMapOvr>
+</p:notes>
+</file>
+
+<file path=ppt/notesSlides/notesSlide6.xml><?xml version="1.0" encoding="utf-8"?>
+<p:notes xmlns:a="http://schemas.openxmlformats.org/drawingml/2006/main" xmlns:p="http://schemas.openxmlformats.org/presentationml/2006/main" xmlns:r="http://schemas.openxmlformats.org/officeDocument/2006/relationships">
+  <p:cSld>
+    <p:spTree>
+      <p:nvGrpSpPr>
+        <p:cNvPr id="1" name=""/>
+        <p:cNvGrpSpPr/>
+        <p:nvPr/>
+      </p:nvGrpSpPr>
+      <p:grpSpPr>
+        <a:xfrm>
+          <a:off x="0" y="0"/>
+          <a:ext cx="0" cy="0"/>
+          <a:chOff x="0" y="0"/>
+          <a:chExt cx="0" cy="0"/>
+        </a:xfrm>
+      </p:grpSpPr>
+      <p:sp>
+        <p:nvSpPr>
+          <p:cNvPr id="2" name="讲课提示"/>
+          <p:cNvSpPr txBox="1"/>
+          <p:nvPr/>
+        </p:nvSpPr>
+        <p:spPr>
+          <a:xfrm>
+            <a:off x="457200" y="457200"/>
+            <a:ext cx="6858000" cy="4800600"/>
+          </a:xfrm>
+          <a:prstGeom prst="rect">
+            <a:avLst/>
+          </a:prstGeom>
+        </p:spPr>
+        <p:txBody>
+          <a:bodyPr wrap="square"/>
+          <a:lstStyle/>
+          <a:p>
+            <a:r>
+              <a:rPr lang="zh-CN" dirty="0"/>
+              <a:t>第 72 节 · 外星舰队与整体移动</a:t>
+            </a:r>
+          </a:p>
+          <a:p>
+            <a:r>
+              <a:rPr lang="zh-CN" dirty="0"/>
+              <a:t>单元 13 · 射击与外星舰队 · W16</a:t>
+            </a:r>
+          </a:p>
+          <a:p>
+            <a:r>
+              <a:rPr lang="zh-CN" dirty="0"/>
+              <a:t/>
+            </a:r>
+          </a:p>
+          <a:p>
+            <a:r>
+              <a:rPr lang="zh-CN" dirty="0"/>
+              <a:t>学习目标：能生成多行外星舰队；用 fleet_direction 让整队移动、触边下移并反向</a:t>
+            </a:r>
+          </a:p>
+          <a:p>
+            <a:r>
+              <a:rPr lang="zh-CN" dirty="0"/>
+              <a:t/>
+            </a:r>
+          </a:p>
+          <a:p>
+            <a:r>
+              <a:rPr lang="zh-CN" dirty="0"/>
+              <a:t>课堂实操（40 分钟，不看答案）：</a:t>
+            </a:r>
+          </a:p>
+          <a:p>
+            <a:r>
+              <a:rPr lang="zh-CN" dirty="0"/>
+              <a:t>· 现场写 `_create_fleet()` 并重构</a:t>
+            </a:r>
+          </a:p>
+          <a:p>
+            <a:r>
+              <a:rPr lang="zh-CN" dirty="0"/>
+              <a:t>· 把速度改成 2，观察为什么 `==` 检测不到边缘</a:t>
+            </a:r>
+          </a:p>
+          <a:p>
+            <a:r>
+              <a:rPr lang="zh-CN" dirty="0"/>
+              <a:t>· 把舰队方向手动改反，看它怎么走</a:t>
+            </a:r>
+          </a:p>
+          <a:p>
+            <a:r>
+              <a:rPr lang="zh-CN" dirty="0"/>
+              <a:t/>
+            </a:r>
+          </a:p>
+          <a:p>
+            <a:r>
+              <a:rPr lang="zh-CN" dirty="0"/>
+              <a:t>课后作业：</a:t>
+            </a:r>
+          </a:p>
+          <a:p>
+            <a:r>
+              <a:rPr lang="zh-CN" dirty="0"/>
+              <a:t>· 完成练习 13-3【边缘检测】</a:t>
+            </a:r>
+          </a:p>
+          <a:p>
+            <a:r>
+              <a:rPr lang="zh-CN" dirty="0"/>
+              <a:t/>
+            </a:r>
+          </a:p>
+          <a:p>
+            <a:r>
+              <a:rPr lang="zh-CN" dirty="0"/>
+              <a:t>节奏：讲 20 分钟 → 学员自己敲 40 分钟（不看答案）→ 对讲评自查 20 分钟 → 写作业 10 分钟。</a:t>
+            </a:r>
+          </a:p>
+        </p:txBody>
+      </p:sp>
+    </p:spTree>
+  </p:cSld>
+  <p:clrMapOvr>
+    <a:masterClrMapping/>
+  </p:clrMapOvr>
+</p:notes>
+</file>
+
+<file path=ppt/notesSlides/notesSlide7.xml><?xml version="1.0" encoding="utf-8"?>
+<p:notes xmlns:a="http://schemas.openxmlformats.org/drawingml/2006/main" xmlns:p="http://schemas.openxmlformats.org/presentationml/2006/main" xmlns:r="http://schemas.openxmlformats.org/officeDocument/2006/relationships">
+  <p:cSld>
+    <p:spTree>
+      <p:nvGrpSpPr>
+        <p:cNvPr id="1" name=""/>
+        <p:cNvGrpSpPr/>
+        <p:nvPr/>
+      </p:nvGrpSpPr>
+      <p:grpSpPr>
+        <a:xfrm>
+          <a:off x="0" y="0"/>
+          <a:ext cx="0" cy="0"/>
+          <a:chOff x="0" y="0"/>
+          <a:chExt cx="0" cy="0"/>
+        </a:xfrm>
+      </p:grpSpPr>
+      <p:sp>
+        <p:nvSpPr>
+          <p:cNvPr id="2" name="讲课提示"/>
+          <p:cNvSpPr txBox="1"/>
+          <p:nvPr/>
+        </p:nvSpPr>
+        <p:spPr>
+          <a:xfrm>
+            <a:off x="457200" y="457200"/>
+            <a:ext cx="6858000" cy="4800600"/>
+          </a:xfrm>
+          <a:prstGeom prst="rect">
+            <a:avLst/>
+          </a:prstGeom>
+        </p:spPr>
+        <p:txBody>
+          <a:bodyPr wrap="square"/>
+          <a:lstStyle/>
+          <a:p>
+            <a:r>
+              <a:rPr lang="zh-CN" dirty="0"/>
+              <a:t>第 72 节 · 核心知识点：外星舰队与整体移动</a:t>
+            </a:r>
+          </a:p>
+          <a:p>
+            <a:r>
+              <a:rPr lang="zh-CN" dirty="0"/>
+              <a:t/>
+            </a:r>
+          </a:p>
+          <a:p>
+            <a:r>
+              <a:rPr lang="zh-CN" dirty="0"/>
+              <a:t>讲这一页时：先让学生说出上节课的结论，再逐块讲要点。</a:t>
+            </a:r>
+          </a:p>
+          <a:p>
+            <a:r>
+              <a:rPr lang="zh-CN" dirty="0"/>
+              <a:t>每讲完一块，问一句「这一步如果写错了，报错会长什么样？」——把错误提前讲。</a:t>
+            </a:r>
+          </a:p>
+          <a:p>
+            <a:r>
+              <a:rPr lang="zh-CN" dirty="0"/>
+              <a:t/>
+            </a:r>
+          </a:p>
+          <a:p>
+            <a:r>
+              <a:rPr lang="zh-CN" dirty="0"/>
+              <a:t>本节目标：能生成多行外星舰队；用 fleet_direction 让整队移动、触边下移并反向</a:t>
+            </a:r>
+          </a:p>
+          <a:p>
+            <a:r>
+              <a:rPr lang="zh-CN" dirty="0"/>
+              <a:t/>
+            </a:r>
+          </a:p>
+          <a:p>
+            <a:r>
+              <a:rPr lang="zh-CN" dirty="0"/>
+              <a:t>看不到懂的地方，回讲义对应小节读一遍，再回来对着这页复述一次——能讲出来才算真懂。</a:t>
+            </a:r>
+          </a:p>
+        </p:txBody>
+      </p:sp>
+    </p:spTree>
+  </p:cSld>
+  <p:clrMapOvr>
+    <a:masterClrMapping/>
+  </p:clrMapOvr>
+</p:notes>
+</file>
+
+<file path=ppt/notesSlides/notesSlide8.xml><?xml version="1.0" encoding="utf-8"?>
+<p:notes xmlns:a="http://schemas.openxmlformats.org/drawingml/2006/main" xmlns:p="http://schemas.openxmlformats.org/presentationml/2006/main" xmlns:r="http://schemas.openxmlformats.org/officeDocument/2006/relationships">
+  <p:cSld>
+    <p:spTree>
+      <p:nvGrpSpPr>
+        <p:cNvPr id="1" name=""/>
+        <p:cNvGrpSpPr/>
+        <p:nvPr/>
+      </p:nvGrpSpPr>
+      <p:grpSpPr>
+        <a:xfrm>
+          <a:off x="0" y="0"/>
+          <a:ext cx="0" cy="0"/>
+          <a:chOff x="0" y="0"/>
+          <a:chExt cx="0" cy="0"/>
+        </a:xfrm>
+      </p:grpSpPr>
+      <p:sp>
+        <p:nvSpPr>
+          <p:cNvPr id="2" name="讲课提示"/>
+          <p:cNvSpPr txBox="1"/>
+          <p:nvPr/>
+        </p:nvSpPr>
+        <p:spPr>
+          <a:xfrm>
+            <a:off x="457200" y="457200"/>
+            <a:ext cx="6858000" cy="4800600"/>
+          </a:xfrm>
+          <a:prstGeom prst="rect">
+            <a:avLst/>
+          </a:prstGeom>
+        </p:spPr>
+        <p:txBody>
+          <a:bodyPr wrap="square"/>
+          <a:lstStyle/>
+          <a:p>
+            <a:r>
+              <a:rPr lang="zh-CN" dirty="0"/>
+              <a:t>第 73 节 · 碰撞检测与游戏结束</a:t>
+            </a:r>
+          </a:p>
+          <a:p>
+            <a:r>
+              <a:rPr lang="zh-CN" dirty="0"/>
+              <a:t>单元 13 · 射击与外星舰队 · W16</a:t>
+            </a:r>
+          </a:p>
+          <a:p>
+            <a:r>
+              <a:rPr lang="zh-CN" dirty="0"/>
+              <a:t/>
+            </a:r>
+          </a:p>
+          <a:p>
+            <a:r>
+              <a:rPr lang="zh-CN" dirty="0"/>
+              <a:t>学习目标：用 groupcollide 击落外星人；检测飞船被撞与外星人触底，正确结束游戏</a:t>
+            </a:r>
+          </a:p>
+          <a:p>
+            <a:r>
+              <a:rPr lang="zh-CN" dirty="0"/>
+              <a:t/>
+            </a:r>
+          </a:p>
+          <a:p>
+            <a:r>
+              <a:rPr lang="zh-CN" dirty="0"/>
+              <a:t>课堂实操（40 分钟，不看答案）：</a:t>
+            </a:r>
+          </a:p>
+          <a:p>
+            <a:r>
+              <a:rPr lang="zh-CN" dirty="0"/>
+              <a:t>· 实现击落与加分</a:t>
+            </a:r>
+          </a:p>
+          <a:p>
+            <a:r>
+              <a:rPr lang="zh-CN" dirty="0"/>
+              <a:t>· 把两个 True 改成 False，复现「外星人不消失」bug</a:t>
+            </a:r>
+          </a:p>
+          <a:p>
+            <a:r>
+              <a:rPr lang="zh-CN" dirty="0"/>
+              <a:t>· 故意撞自己一次，看游戏是否正确结束</a:t>
+            </a:r>
+          </a:p>
+          <a:p>
+            <a:r>
+              <a:rPr lang="zh-CN" dirty="0"/>
+              <a:t/>
+            </a:r>
+          </a:p>
+          <a:p>
+            <a:r>
+              <a:rPr lang="zh-CN" dirty="0"/>
+              <a:t>课后作业：</a:t>
+            </a:r>
+          </a:p>
+          <a:p>
+            <a:r>
+              <a:rPr lang="zh-CN" dirty="0"/>
+              <a:t>· ★ 完成练习 13-5【三条命的完整流程】</a:t>
+            </a:r>
+          </a:p>
+          <a:p>
+            <a:r>
+              <a:rPr lang="zh-CN" dirty="0"/>
+              <a:t/>
+            </a:r>
+          </a:p>
+          <a:p>
+            <a:r>
+              <a:rPr lang="zh-CN" dirty="0"/>
+              <a:t>节奏：讲 20 分钟 → 学员自己敲 40 分钟（不看答案）→ 对讲评自查 20 分钟 → 写作业 10 分钟。</a:t>
+            </a:r>
+          </a:p>
+        </p:txBody>
+      </p:sp>
+    </p:spTree>
+  </p:cSld>
+  <p:clrMapOvr>
+    <a:masterClrMapping/>
+  </p:clrMapOvr>
+</p:notes>
+</file>
+
+<file path=ppt/notesSlides/notesSlide9.xml><?xml version="1.0" encoding="utf-8"?>
+<p:notes xmlns:a="http://schemas.openxmlformats.org/drawingml/2006/main" xmlns:p="http://schemas.openxmlformats.org/presentationml/2006/main" xmlns:r="http://schemas.openxmlformats.org/officeDocument/2006/relationships">
+  <p:cSld>
+    <p:spTree>
+      <p:nvGrpSpPr>
+        <p:cNvPr id="1" name=""/>
+        <p:cNvGrpSpPr/>
+        <p:nvPr/>
+      </p:nvGrpSpPr>
+      <p:grpSpPr>
+        <a:xfrm>
+          <a:off x="0" y="0"/>
+          <a:ext cx="0" cy="0"/>
+          <a:chOff x="0" y="0"/>
+          <a:chExt cx="0" cy="0"/>
+        </a:xfrm>
+      </p:grpSpPr>
+      <p:sp>
+        <p:nvSpPr>
+          <p:cNvPr id="2" name="讲课提示"/>
+          <p:cNvSpPr txBox="1"/>
+          <p:nvPr/>
+        </p:nvSpPr>
+        <p:spPr>
+          <a:xfrm>
+            <a:off x="457200" y="457200"/>
+            <a:ext cx="6858000" cy="4800600"/>
+          </a:xfrm>
+          <a:prstGeom prst="rect">
+            <a:avLst/>
+          </a:prstGeom>
+        </p:spPr>
+        <p:txBody>
+          <a:bodyPr wrap="square"/>
+          <a:lstStyle/>
+          <a:p>
+            <a:r>
+              <a:rPr lang="zh-CN" dirty="0"/>
+              <a:t>第 73 节 · 核心知识点：碰撞检测与游戏结束</a:t>
+            </a:r>
+          </a:p>
+          <a:p>
+            <a:r>
+              <a:rPr lang="zh-CN" dirty="0"/>
+              <a:t/>
+            </a:r>
+          </a:p>
+          <a:p>
+            <a:r>
+              <a:rPr lang="zh-CN" dirty="0"/>
+              <a:t>讲这一页时：先让学生说出上节课的结论，再逐块讲要点。</a:t>
+            </a:r>
+          </a:p>
+          <a:p>
+            <a:r>
+              <a:rPr lang="zh-CN" dirty="0"/>
+              <a:t>每讲完一块，问一句「这一步如果写错了，报错会长什么样？」——把错误提前讲。</a:t>
+            </a:r>
+          </a:p>
+          <a:p>
+            <a:r>
+              <a:rPr lang="zh-CN" dirty="0"/>
+              <a:t/>
+            </a:r>
+          </a:p>
+          <a:p>
+            <a:r>
+              <a:rPr lang="zh-CN" dirty="0"/>
+              <a:t>本节目标：用 groupcollide 击落外星人；检测飞船被撞与外星人触底，正确结束游戏</a:t>
+            </a:r>
+          </a:p>
+          <a:p>
+            <a:r>
+              <a:rPr lang="zh-CN" dirty="0"/>
+              <a:t/>
+            </a:r>
+          </a:p>
+          <a:p>
+            <a:r>
+              <a:rPr lang="zh-CN" dirty="0"/>
+              <a:t>看不到懂的地方，回讲义对应小节读一遍，再回来对着这页复述一次——能讲出来才算真懂。</a:t>
+            </a:r>
+          </a:p>
+        </p:txBody>
+      </p:sp>
+    </p:spTree>
+  </p:cSld>
+  <p:clrMapOvr>
+    <a:masterClrMapping/>
+  </p:clrMapOvr>
+</p:notes>
 </file>
 
 <file path=ppt/slideLayouts/slideLayout1.xml><?xml version="1.0" encoding="utf-8"?>

--- a/python-course-ppt/逐节课件/Python讲授课件-单元13.pptx
+++ b/python-course-ppt/逐节课件/Python讲授课件-单元13.pptx
@@ -2341,7 +2341,7 @@
   <p:cSld>
     <p:spTree>
       <p:nvGrpSpPr>
-        <p:cNvPr id="15" name="" descr="&lt;Slide style={{ width: '1280px', height: '720px', backgroundColor: '#FAFCFE', padding: 0, position: 'relative', overflow: 'hidden' }}&gt;&#13;&#10;    &lt;Box style={{ position: 'absolute', left: 64, top: 36, width: '1152px', flexDirection: 'row', alignItems: 'center', gap: 12 }}&gt;&#13;&#10;        &lt;Box style={{ background: '#0E9B78', borderRadius: 5, padding: '3px 11px' }}&gt;&#13;&#10;            &lt;Text style={{ fontSize: 14, fontWeight: 'bold', color: '#FFFFFF' }}&gt;第 74 节&lt;/Text&gt;&#13;&#10;        &lt;/Box&gt;&#13;&#10;        &lt;Text style={{ fontSize: 30, fontWeight: 'bold', color: '#16232E' }}&gt;核心知识点&lt;/Text&gt;&#13;&#10;        &lt;Text style={{ fontSize: 15, color: '#5A6B7A', marginTop: 10 }}&gt;· 实战、答案与验收复盘&lt;/Text&gt;&#13;&#10;    &lt;/Box&gt;&#13;&#10;    &lt;Box style={{ position: 'absolute', left: 0, top: 0, width: '1280px', height: '720px' }}&gt;&#13;&#10;        &lt;svg width='1280' height='720' viewBox='0 0 1280 720'&gt;&#13;&#10;            &lt;rect x='64' y='96' width='368' height='330' rx='12' fill='#FFFFFF' stroke='#D8E3EE' /&gt;&lt;rect x='64' y='96' width='368' height='4' rx='2' fill='#1F5FA8' /&gt;&lt;text x='82' y='130' fontSize='15.5' fontWeight='bold' fill='#1F5FA8' textAnchor='start' fontFamily='Microsoft YaHei'&gt;基础档&lt;/text&gt;&lt;text x='82' y='169.0' fontSize='13' fill='#3A4A58' textAnchor='start' fontFamily='Microsoft YaHei'&gt;· 练习 13-1【编组基本功】&lt;/text&gt;&lt;text x='82' y='197.5' fontSize='13' fill='#3A4A58' textAnchor='start' fontFamily='Microsoft YaHei'&gt;· 练习 13-2【复现并修复「漏删」bug】&lt;/text&gt;&lt;text x='82' y='226.0' fontSize='13' fill='#3A4A58' textAnchor='start' fontFamily='Microsoft YaHei'&gt;· 练习 13-3【边缘检测】&lt;/text&gt;&lt;rect x='468' y='96' width='368' height='330' rx='12' fill='#FFFFFF' stroke='#D8E3EE' /&gt;&lt;rect x='468' y='96' width='368' height='4' rx='2' fill='#1F5FA8' /&gt;&lt;text x='486' y='130' fontSize='15.5' fontWeight='bold' fill='#1F5FA8' textAnchor='start' fontFamily='Microsoft YaHei'&gt;进阶档&lt;/text&gt;&lt;text x='486' y='169.0' fontSize='13' fill='#3A4A58' textAnchor='start' fontFamily='Microsoft YaHei'&gt;· 练习 13-4【舰队密度可调】&lt;/text&gt;&lt;text x='486' y='197.5' fontSize='13' fill='#3A4A58' textAnchor='start' fontFamily='Microsoft YaHei'&gt;· 练习 13-5【三条命的完整流程】&lt;/text&gt;&lt;text x='486' y='226.0' fontSize='13' fill='#3A4A58' textAnchor='start' fontFamily='Microsoft YaHei'&gt;· 练习 13-6【子弹越打越快，结束时有简报】&lt;/text&gt;&lt;rect x='872' y='96' width='368' height='330' rx='12' fill='#FFFFFF' stroke='#D8E3EE' /&gt;&lt;rect x='872' y='96' width='368' height='4' rx='2' fill='#1F5FA8' /&gt;&lt;text x='890' y='130' fontSize='15.5' fontWeight='bold' fill='#1F5FA8' textAnchor='start' fontFamily='Microsoft YaHei'&gt;参考答案 13-3&lt;/text&gt;&lt;text x='890' y='169.0' fontSize='13' fill='#3A4A58' textAnchor='start' fontFamily='Microsoft YaHei'&gt;· 1. 判断题&lt;/text&gt;&lt;text x='890' y='197.5' fontSize='13' fill='#3A4A58' textAnchor='start' fontFamily='Microsoft YaHei'&gt;· 2. 简答题&lt;/text&gt;&lt;text x='890' y='226.0' fontSize='13' fill='#3A4A58' textAnchor='start' fontFamily='Microsoft YaHei'&gt;· 3. 简答题&lt;/text&gt;&lt;rect x='64' y='574' width='1152' height='66' rx='12' fill='#EEF5FB' /&gt;&lt;text x='84' y='616' fontSize='14' fill='#243444' textAnchor='start' fontFamily='Microsoft YaHei'&gt;看不懂的地方先回讲义对应小节读一遍，再回来对着这页复述一次——能讲出来才算真懂。&lt;/text&gt;&#13;&#10;            &lt;text x='64' y='684' fontSize='13' fill='#8A9AAA' fontFamily='Microsoft YaHei'&gt;Python 讲授课件 · 逐节版&lt;/text&gt;&#13;&#10;            &lt;text x='1216' y='684' fontSize='13' fill='#8A9AAA' textAnchor='end' fontFamily='Microsoft YaHei'&gt;单元 13 · 第 74 节&lt;/text&gt;&#13;&#10;        &lt;/svg&gt;&#13;&#10;    &lt;/Box&gt;&#13;&#10;&lt;/Slide&gt;&#13;&#10;"/>
+        <p:cNvPr id="15" name="" descr="&lt;Slide style={{ width: '1280px', height: '720px', backgroundColor: '#FAFCFE', padding: 0, position: 'relative', overflow: 'hidden' }}&gt;&#13;&#10;    &lt;Box style={{ position: 'absolute', left: 64, top: 36, width: '1152px', flexDirection: 'row', alignItems: 'center', gap: 12 }}&gt;&#13;&#10;        &lt;Box style={{ background: '#0E9B78', borderRadius: 5, padding: '3px 11px' }}&gt;&#13;&#10;            &lt;Text style={{ fontSize: 14, fontWeight: 'bold', color: '#FFFFFF' }}&gt;第 74 节&lt;/Text&gt;&#13;&#10;        &lt;/Box&gt;&#13;&#10;        &lt;Text style={{ fontSize: 30, fontWeight: 'bold', color: '#16232E' }}&gt;核心知识点&lt;/Text&gt;&#13;&#10;        &lt;Text style={{ fontSize: 15, color: '#5A6B7A', marginTop: 10 }}&gt;· 实战、答案与验收复盘&lt;/Text&gt;&#13;&#10;    &lt;/Box&gt;&#13;&#10;    &lt;Box style={{ position: 'absolute', left: 0, top: 0, width: '1280px', height: '720px' }}&gt;&#13;&#10;        &lt;svg width='1280' height='720' viewBox='0 0 1280 720'&gt;&#13;&#10;            &lt;rect x='64' y='96' width='368' height='330' rx='12' fill='#FFFFFF' stroke='#D8E3EE' /&gt;&lt;rect x='64' y='96' width='368' height='4' rx='2' fill='#1F5FA8' /&gt;&lt;text x='82' y='130' fontSize='15.5' fontWeight='bold' fill='#1F5FA8' textAnchor='start' fontFamily='Microsoft YaHei'&gt;基础档&lt;/text&gt;&lt;text x='82' y='169.0' fontSize='13' fill='#3A4A58' textAnchor='start' fontFamily='Microsoft YaHei'&gt;· 练习 13-1【编组基本功】&lt;/text&gt;&lt;text x='82' y='197.5' fontSize='13' fill='#3A4A58' textAnchor='start' fontFamily='Microsoft YaHei'&gt;· 练习 13-2【复现并修复「漏删」bug】&lt;/text&gt;&lt;text x='82' y='226.0' fontSize='13' fill='#3A4A58' textAnchor='start' fontFamily='Microsoft YaHei'&gt;· 练习 13-3【边缘检测】&lt;/text&gt;&lt;rect x='468' y='96' width='368' height='330' rx='12' fill='#FFFFFF' stroke='#D8E3EE' /&gt;&lt;rect x='468' y='96' width='368' height='4' rx='2' fill='#1F5FA8' /&gt;&lt;text x='486' y='130' fontSize='15.5' fontWeight='bold' fill='#1F5FA8' textAnchor='start' fontFamily='Microsoft YaHei'&gt;进阶档&lt;/text&gt;&lt;text x='486' y='169.0' fontSize='13' fill='#3A4A58' textAnchor='start' fontFamily='Microsoft YaHei'&gt;· 练习 13-4【舰队密度可调】&lt;/text&gt;&lt;text x='486' y='197.5' fontSize='13' fill='#3A4A58' textAnchor='start' fontFamily='Microsoft YaHei'&gt;· 练习 13-5【三条命的完整流程】&lt;/text&gt;&lt;text x='486' y='226.0' fontSize='13' fill='#3A4A58' textAnchor='start' fontFamily='Microsoft YaHei'&gt;· 练习 13-6【子弹越打越快，结束时有简报】&lt;/text&gt;&lt;rect x='872' y='96' width='368' height='330' rx='12' fill='#FFFFFF' stroke='#D8E3EE' /&gt;&lt;rect x='872' y='96' width='368' height='4' rx='2' fill='#1F5FA8' /&gt;&lt;text x='890' y='130' fontSize='15.5' fontWeight='bold' fill='#1F5FA8' textAnchor='start' fontFamily='Microsoft YaHei'&gt;参考答案 13-4&lt;/text&gt;&lt;text x='890' y='169.0' fontSize='13' fill='#3A4A58' textAnchor='start' fontFamily='Microsoft YaHei'&gt;· 把逻辑从 pygame 里拿出来，才能不靠眼睛判断对错。&lt;/text&gt;&lt;rect x='64' y='574' width='1152' height='66' rx='12' fill='#EEF5FB' /&gt;&lt;text x='84' y='616' fontSize='14' fill='#243444' textAnchor='start' fontFamily='Microsoft YaHei'&gt;看不懂的地方先回讲义对应小节读一遍，再回来对着这页复述一次——能讲出来才算真懂。&lt;/text&gt;&#13;&#10;            &lt;text x='64' y='684' fontSize='13' fill='#8A9AAA' fontFamily='Microsoft YaHei'&gt;Python 讲授课件 · 逐节版&lt;/text&gt;&#13;&#10;            &lt;text x='1216' y='684' fontSize='13' fill='#8A9AAA' textAnchor='end' fontFamily='Microsoft YaHei'&gt;单元 13 · 第 74 节&lt;/text&gt;&#13;&#10;        &lt;/svg&gt;&#13;&#10;    &lt;/Box&gt;&#13;&#10;&lt;/Slide&gt;&#13;&#10;"/>
         <p:cNvGrpSpPr/>
         <p:nvPr/>
       </p:nvGrpSpPr>
